--- a/statistics_06_x2_distribution.pptx
+++ b/statistics_06_x2_distribution.pptx
@@ -15578,7 +15578,7 @@
         </p:nvSpPr>
         <p:spPr>
           <a:xfrm>
-            <a:off x="104925" y="105600"/>
+            <a:off x="-1091" y="-416"/>
             <a:ext cx="6020184" cy="4563382"/>
           </a:xfrm>
           <a:prstGeom prst="rect">
@@ -15822,21 +15822,83 @@
             </a:endParaRPr>
           </a:p>
           <a:p>
-            <a:pPr marL="0" lvl="0" indent="0" algn="l" rtl="0">
-              <a:spcBef>
-                <a:spcPts val="0"/>
-              </a:spcBef>
-              <a:spcAft>
-                <a:spcPts val="0"/>
-              </a:spcAft>
+            <a:pPr lvl="0">
               <a:buClr>
                 <a:schemeClr val="dk1"/>
               </a:buClr>
               <a:buSzPts val="1100"/>
-              <a:buFont typeface="Arial"/>
-              <a:buNone/>
             </a:pPr>
             <a:r>
+              <a:rPr lang="en-US" dirty="0">
+                <a:latin typeface="Calibri"/>
+                <a:ea typeface="Calibri"/>
+                <a:cs typeface="Calibri"/>
+                <a:sym typeface="Calibri"/>
+              </a:rPr>
+              <a:t>p</a:t>
+            </a:r>
+            <a:r>
+              <a:rPr lang="en-US" baseline="-25000" dirty="0">
+                <a:latin typeface="Calibri"/>
+                <a:ea typeface="Calibri"/>
+                <a:cs typeface="Calibri"/>
+                <a:sym typeface="Calibri"/>
+              </a:rPr>
+              <a:t>i</a:t>
+            </a:r>
+            <a:r>
+              <a:rPr lang="en-US" dirty="0">
+                <a:latin typeface="Calibri"/>
+                <a:ea typeface="Calibri"/>
+                <a:cs typeface="Calibri"/>
+                <a:sym typeface="Calibri"/>
+              </a:rPr>
+              <a:t> - hypothetical probability of each class (null hypothesis). </a:t>
+            </a:r>
+          </a:p>
+          <a:p>
+            <a:pPr lvl="0">
+              <a:buClr>
+                <a:schemeClr val="dk1"/>
+              </a:buClr>
+              <a:buSzPts val="1100"/>
+            </a:pPr>
+            <a:r>
+              <a:rPr lang="en-US" dirty="0">
+                <a:latin typeface="Calibri"/>
+                <a:ea typeface="Calibri"/>
+                <a:cs typeface="Calibri"/>
+                <a:sym typeface="Calibri"/>
+              </a:rPr>
+              <a:t>         sum(p</a:t>
+            </a:r>
+            <a:r>
+              <a:rPr lang="en-US" baseline="-25000" dirty="0">
+                <a:latin typeface="Calibri"/>
+                <a:ea typeface="Calibri"/>
+                <a:cs typeface="Calibri"/>
+                <a:sym typeface="Calibri"/>
+              </a:rPr>
+              <a:t>i</a:t>
+            </a:r>
+            <a:r>
+              <a:rPr lang="en-US" dirty="0">
+                <a:latin typeface="Calibri"/>
+                <a:ea typeface="Calibri"/>
+                <a:cs typeface="Calibri"/>
+                <a:sym typeface="Calibri"/>
+              </a:rPr>
+              <a:t>) = 1</a:t>
+            </a:r>
+          </a:p>
+          <a:p>
+            <a:pPr lvl="0">
+              <a:buClr>
+                <a:schemeClr val="dk1"/>
+              </a:buClr>
+              <a:buSzPts val="1100"/>
+            </a:pPr>
+            <a:r>
               <a:rPr lang="en-US" dirty="0" err="1">
                 <a:latin typeface="Calibri"/>
                 <a:ea typeface="Calibri"/>
@@ -15861,7 +15923,7 @@
                 <a:cs typeface="Calibri"/>
                 <a:sym typeface="Calibri"/>
               </a:rPr>
-              <a:t> (</a:t>
+              <a:t> - number of observations for each class (</a:t>
             </a:r>
             <a:r>
               <a:rPr lang="en-US" dirty="0" err="1">
@@ -15879,7 +15941,7 @@
                 <a:cs typeface="Calibri"/>
                 <a:sym typeface="Calibri"/>
               </a:rPr>
-              <a:t>=1,2,...k) - number of observations for each class</a:t>
+              <a:t>=1,2,...k) </a:t>
             </a:r>
             <a:endParaRPr dirty="0">
               <a:latin typeface="Calibri"/>
@@ -15903,7 +15965,61 @@
               <a:buFont typeface="Arial"/>
               <a:buNone/>
             </a:pPr>
-            <a:endParaRPr lang="en-US" dirty="0">
+            <a:r>
+              <a:rPr lang="en-US" dirty="0">
+                <a:latin typeface="Calibri"/>
+                <a:ea typeface="Calibri"/>
+                <a:cs typeface="Calibri"/>
+                <a:sym typeface="Calibri"/>
+              </a:rPr>
+              <a:t>m</a:t>
+            </a:r>
+            <a:r>
+              <a:rPr lang="en-US" baseline="-25000" dirty="0">
+                <a:latin typeface="Calibri"/>
+                <a:ea typeface="Calibri"/>
+                <a:cs typeface="Calibri"/>
+                <a:sym typeface="Calibri"/>
+              </a:rPr>
+              <a:t>i </a:t>
+            </a:r>
+            <a:r>
+              <a:rPr lang="en-US" dirty="0">
+                <a:latin typeface="Calibri"/>
+                <a:ea typeface="Calibri"/>
+                <a:cs typeface="Calibri"/>
+                <a:sym typeface="Calibri"/>
+              </a:rPr>
+              <a:t>- expected value of observations  m</a:t>
+            </a:r>
+            <a:r>
+              <a:rPr lang="en-US" baseline="-25000" dirty="0">
+                <a:latin typeface="Calibri"/>
+                <a:ea typeface="Calibri"/>
+                <a:cs typeface="Calibri"/>
+                <a:sym typeface="Calibri"/>
+              </a:rPr>
+              <a:t>i</a:t>
+            </a:r>
+            <a:r>
+              <a:rPr lang="en-US" dirty="0">
+                <a:latin typeface="Calibri"/>
+                <a:ea typeface="Calibri"/>
+                <a:cs typeface="Calibri"/>
+                <a:sym typeface="Calibri"/>
+              </a:rPr>
+              <a:t>=N*p</a:t>
+            </a:r>
+            <a:r>
+              <a:rPr lang="en-US" baseline="-25000" dirty="0">
+                <a:latin typeface="Calibri"/>
+                <a:ea typeface="Calibri"/>
+                <a:cs typeface="Calibri"/>
+                <a:sym typeface="Calibri"/>
+              </a:rPr>
+              <a:t>i</a:t>
+            </a:r>
+            <a:endParaRPr baseline="-25000" dirty="0">
               <a:latin typeface="Calibri"/>
               <a:ea typeface="Calibri"/>
               <a:cs typeface="Calibri"/>
@@ -15911,19 +16027,11 @@
             </a:endParaRPr>
           </a:p>
           <a:p>
-            <a:pPr marL="0" lvl="0" indent="0" algn="l" rtl="0">
-              <a:spcBef>
-                <a:spcPts val="0"/>
-              </a:spcBef>
-              <a:spcAft>
-                <a:spcPts val="0"/>
-              </a:spcAft>
+            <a:pPr lvl="0">
               <a:buClr>
                 <a:schemeClr val="dk1"/>
               </a:buClr>
               <a:buSzPts val="1100"/>
-              <a:buFont typeface="Arial"/>
-              <a:buNone/>
             </a:pPr>
             <a:r>
               <a:rPr lang="en-US" dirty="0">
@@ -15932,7 +16040,7 @@
                 <a:cs typeface="Calibri"/>
                 <a:sym typeface="Calibri"/>
               </a:rPr>
-              <a:t>p</a:t>
+              <a:t>         sum(m</a:t>
             </a:r>
             <a:r>
               <a:rPr lang="en-US" baseline="-25000" dirty="0">
@@ -15950,24 +16058,17 @@
                 <a:cs typeface="Calibri"/>
                 <a:sym typeface="Calibri"/>
               </a:rPr>
-              <a:t> - hypothetical probability of each class (null hypothesis). </a:t>
-            </a:r>
-          </a:p>
-          <a:p>
-            <a:pPr marL="0" lvl="0" indent="0" algn="l" rtl="0">
-              <a:spcBef>
-                <a:spcPts val="0"/>
-              </a:spcBef>
-              <a:spcAft>
-                <a:spcPts val="0"/>
-              </a:spcAft>
-              <a:buClr>
-                <a:schemeClr val="dk1"/>
-              </a:buClr>
-              <a:buSzPts val="1100"/>
-              <a:buFont typeface="Arial"/>
-              <a:buNone/>
-            </a:pPr>
+              <a:t>) = N*sum(p</a:t>
+            </a:r>
+            <a:r>
+              <a:rPr lang="en-US" baseline="-25000" dirty="0">
+                <a:latin typeface="Calibri"/>
+                <a:ea typeface="Calibri"/>
+                <a:cs typeface="Calibri"/>
+                <a:sym typeface="Calibri"/>
+              </a:rPr>
+              <a:t>i</a:t>
+            </a:r>
             <a:r>
               <a:rPr lang="en-US" dirty="0">
                 <a:latin typeface="Calibri"/>
@@ -15975,10 +16076,19 @@
                 <a:cs typeface="Calibri"/>
                 <a:sym typeface="Calibri"/>
               </a:rPr>
-              <a:t>So   sum(p</a:t>
-            </a:r>
-            <a:r>
-              <a:rPr lang="en-US" baseline="-25000" dirty="0">
+              <a:t>) = N = sum(</a:t>
+            </a:r>
+            <a:r>
+              <a:rPr lang="en-US" dirty="0" err="1">
+                <a:latin typeface="Calibri"/>
+                <a:ea typeface="Calibri"/>
+                <a:cs typeface="Calibri"/>
+                <a:sym typeface="Calibri"/>
+              </a:rPr>
+              <a:t>n</a:t>
+            </a:r>
+            <a:r>
+              <a:rPr lang="en-US" baseline="-25000" dirty="0" err="1">
                 <a:latin typeface="Calibri"/>
                 <a:ea typeface="Calibri"/>
                 <a:cs typeface="Calibri"/>
@@ -15993,8 +16103,14 @@
                 <a:cs typeface="Calibri"/>
                 <a:sym typeface="Calibri"/>
               </a:rPr>
-              <a:t>) = 1</a:t>
-            </a:r>
+              <a:t>)</a:t>
+            </a:r>
+            <a:endParaRPr dirty="0">
+              <a:latin typeface="Calibri"/>
+              <a:ea typeface="Calibri"/>
+              <a:cs typeface="Calibri"/>
+              <a:sym typeface="Calibri"/>
+            </a:endParaRPr>
           </a:p>
           <a:p>
             <a:pPr marL="0" lvl="0" indent="0" algn="l" rtl="0">
@@ -16019,95 +16135,6 @@
             </a:endParaRPr>
           </a:p>
           <a:p>
-            <a:pPr marL="0" lvl="0" indent="0" algn="l" rtl="0">
-              <a:spcBef>
-                <a:spcPts val="0"/>
-              </a:spcBef>
-              <a:spcAft>
-                <a:spcPts val="0"/>
-              </a:spcAft>
-              <a:buClr>
-                <a:schemeClr val="dk1"/>
-              </a:buClr>
-              <a:buSzPts val="1100"/>
-              <a:buFont typeface="Arial"/>
-              <a:buNone/>
-            </a:pPr>
-            <a:r>
-              <a:rPr lang="en-US" dirty="0">
-                <a:latin typeface="Calibri"/>
-                <a:ea typeface="Calibri"/>
-                <a:cs typeface="Calibri"/>
-                <a:sym typeface="Calibri"/>
-              </a:rPr>
-              <a:t>Then for each class:</a:t>
-            </a:r>
-            <a:endParaRPr dirty="0">
-              <a:latin typeface="Calibri"/>
-              <a:ea typeface="Calibri"/>
-              <a:cs typeface="Calibri"/>
-              <a:sym typeface="Calibri"/>
-            </a:endParaRPr>
-          </a:p>
-          <a:p>
-            <a:pPr marL="0" lvl="0" indent="0" algn="l" rtl="0">
-              <a:spcBef>
-                <a:spcPts val="0"/>
-              </a:spcBef>
-              <a:spcAft>
-                <a:spcPts val="0"/>
-              </a:spcAft>
-              <a:buClr>
-                <a:schemeClr val="dk1"/>
-              </a:buClr>
-              <a:buSzPts val="1100"/>
-              <a:buFont typeface="Arial"/>
-              <a:buNone/>
-            </a:pPr>
-            <a:r>
-              <a:rPr lang="en-US" dirty="0">
-                <a:latin typeface="Calibri"/>
-                <a:ea typeface="Calibri"/>
-                <a:cs typeface="Calibri"/>
-                <a:sym typeface="Calibri"/>
-              </a:rPr>
-              <a:t>   expected value of observations  m</a:t>
-            </a:r>
-            <a:r>
-              <a:rPr lang="en-US" baseline="-25000" dirty="0">
-                <a:latin typeface="Calibri"/>
-                <a:ea typeface="Calibri"/>
-                <a:cs typeface="Calibri"/>
-                <a:sym typeface="Calibri"/>
-              </a:rPr>
-              <a:t>i</a:t>
-            </a:r>
-            <a:r>
-              <a:rPr lang="en-US" dirty="0">
-                <a:latin typeface="Calibri"/>
-                <a:ea typeface="Calibri"/>
-                <a:cs typeface="Calibri"/>
-                <a:sym typeface="Calibri"/>
-              </a:rPr>
-              <a:t>=N*p</a:t>
-            </a:r>
-            <a:r>
-              <a:rPr lang="en-US" baseline="-25000" dirty="0">
-                <a:latin typeface="Calibri"/>
-                <a:ea typeface="Calibri"/>
-                <a:cs typeface="Calibri"/>
-                <a:sym typeface="Calibri"/>
-              </a:rPr>
-              <a:t>i</a:t>
-            </a:r>
-            <a:endParaRPr baseline="-25000" dirty="0">
-              <a:latin typeface="Calibri"/>
-              <a:ea typeface="Calibri"/>
-              <a:cs typeface="Calibri"/>
-              <a:sym typeface="Calibri"/>
-            </a:endParaRPr>
-          </a:p>
-          <a:p>
             <a:pPr lvl="0">
               <a:buClr>
                 <a:schemeClr val="dk1"/>
@@ -16121,16 +16148,37 @@
                 <a:cs typeface="Calibri"/>
                 <a:sym typeface="Calibri"/>
               </a:rPr>
-              <a:t>   sum(m</a:t>
-            </a:r>
-            <a:r>
-              <a:rPr lang="en-US" baseline="-25000" dirty="0">
-                <a:latin typeface="Calibri"/>
-                <a:ea typeface="Calibri"/>
-                <a:cs typeface="Calibri"/>
-                <a:sym typeface="Calibri"/>
-              </a:rPr>
-              <a:t>i</a:t>
+              <a:t>Karl Pearson has proposed that as N gets bigger, the sum below converges to </a:t>
+            </a:r>
+            <a:r>
+              <a:rPr lang="en-US" b="1" i="1" dirty="0">
+                <a:solidFill>
+                  <a:srgbClr val="222222"/>
+                </a:solidFill>
+                <a:highlight>
+                  <a:srgbClr val="FFFFFF"/>
+                </a:highlight>
+                <a:latin typeface="Times New Roman"/>
+                <a:ea typeface="Times New Roman"/>
+                <a:cs typeface="Times New Roman"/>
+                <a:sym typeface="Times New Roman"/>
+              </a:rPr>
+              <a:t>χ</a:t>
+            </a:r>
+            <a:r>
+              <a:rPr lang="en-US" b="1" baseline="30000" dirty="0">
+                <a:solidFill>
+                  <a:srgbClr val="222222"/>
+                </a:solidFill>
+                <a:highlight>
+                  <a:srgbClr val="FFFFFF"/>
+                </a:highlight>
+                <a:latin typeface="Times New Roman"/>
+                <a:ea typeface="Times New Roman"/>
+                <a:cs typeface="Times New Roman"/>
+                <a:sym typeface="Times New Roman"/>
+              </a:rPr>
+              <a:t>2</a:t>
             </a:r>
             <a:r>
               <a:rPr lang="en-US" dirty="0">
@@ -16139,59 +16187,8 @@
                 <a:cs typeface="Calibri"/>
                 <a:sym typeface="Calibri"/>
               </a:rPr>
-              <a:t>) = N*sum(p</a:t>
-            </a:r>
-            <a:r>
-              <a:rPr lang="en-US" baseline="-25000" dirty="0">
-                <a:latin typeface="Calibri"/>
-                <a:ea typeface="Calibri"/>
-                <a:cs typeface="Calibri"/>
-                <a:sym typeface="Calibri"/>
-              </a:rPr>
-              <a:t>i</a:t>
-            </a:r>
-            <a:r>
-              <a:rPr lang="en-US" dirty="0">
-                <a:latin typeface="Calibri"/>
-                <a:ea typeface="Calibri"/>
-                <a:cs typeface="Calibri"/>
-                <a:sym typeface="Calibri"/>
-              </a:rPr>
-              <a:t>) = N = sum(</a:t>
-            </a:r>
-            <a:r>
-              <a:rPr lang="en-US" dirty="0" err="1">
-                <a:latin typeface="Calibri"/>
-                <a:ea typeface="Calibri"/>
-                <a:cs typeface="Calibri"/>
-                <a:sym typeface="Calibri"/>
-              </a:rPr>
-              <a:t>n</a:t>
-            </a:r>
-            <a:r>
-              <a:rPr lang="en-US" baseline="-25000" dirty="0" err="1">
-                <a:latin typeface="Calibri"/>
-                <a:ea typeface="Calibri"/>
-                <a:cs typeface="Calibri"/>
-                <a:sym typeface="Calibri"/>
-              </a:rPr>
-              <a:t>i</a:t>
-            </a:r>
-            <a:r>
-              <a:rPr lang="en-US" dirty="0">
-                <a:latin typeface="Calibri"/>
-                <a:ea typeface="Calibri"/>
-                <a:cs typeface="Calibri"/>
-                <a:sym typeface="Calibri"/>
-              </a:rPr>
-              <a:t>)</a:t>
-            </a:r>
-            <a:endParaRPr dirty="0">
-              <a:latin typeface="Calibri"/>
-              <a:ea typeface="Calibri"/>
-              <a:cs typeface="Calibri"/>
-              <a:sym typeface="Calibri"/>
-            </a:endParaRPr>
+              <a:t> </a:t>
+            </a:r>
           </a:p>
           <a:p>
             <a:pPr marL="0" lvl="0" indent="0" algn="l" rtl="0">
@@ -16216,45 +16213,6 @@
             </a:endParaRPr>
           </a:p>
           <a:p>
-            <a:pPr lvl="0">
-              <a:buClr>
-                <a:schemeClr val="dk1"/>
-              </a:buClr>
-              <a:buSzPts val="1100"/>
-            </a:pPr>
-            <a:r>
-              <a:rPr lang="en-US" dirty="0">
-                <a:latin typeface="Calibri"/>
-                <a:ea typeface="Calibri"/>
-                <a:cs typeface="Calibri"/>
-                <a:sym typeface="Calibri"/>
-              </a:rPr>
-              <a:t>Karl Pearson has proposed that as N gets bigger, the value</a:t>
-            </a:r>
-          </a:p>
-          <a:p>
-            <a:pPr marL="0" lvl="0" indent="0" algn="l" rtl="0">
-              <a:spcBef>
-                <a:spcPts val="0"/>
-              </a:spcBef>
-              <a:spcAft>
-                <a:spcPts val="0"/>
-              </a:spcAft>
-              <a:buClr>
-                <a:schemeClr val="dk1"/>
-              </a:buClr>
-              <a:buSzPts val="1100"/>
-              <a:buFont typeface="Arial"/>
-              <a:buNone/>
-            </a:pPr>
-            <a:endParaRPr dirty="0">
-              <a:latin typeface="Calibri"/>
-              <a:ea typeface="Calibri"/>
-              <a:cs typeface="Calibri"/>
-              <a:sym typeface="Calibri"/>
-            </a:endParaRPr>
-          </a:p>
-          <a:p>
             <a:pPr marL="0" lvl="0" indent="0" algn="l" rtl="0">
               <a:spcBef>
                 <a:spcPts val="0"/>
@@ -16464,9 +16422,111 @@
               </a:rPr>
               <a:t> distribution with (k − 1) degrees of freedom </a:t>
             </a:r>
-            <a:endParaRPr b="1" dirty="0">
+            <a:endParaRPr sz="1800" dirty="0">
+              <a:latin typeface="Calibri"/>
+              <a:ea typeface="Calibri"/>
+              <a:cs typeface="Calibri"/>
+              <a:sym typeface="Calibri"/>
+            </a:endParaRPr>
+          </a:p>
+          <a:p>
+            <a:pPr marL="0" lvl="0" indent="0" algn="l" rtl="0">
+              <a:spcBef>
+                <a:spcPts val="0"/>
+              </a:spcBef>
+              <a:spcAft>
+                <a:spcPts val="0"/>
+              </a:spcAft>
+              <a:buNone/>
+            </a:pPr>
+            <a:r>
+              <a:rPr lang="en-US" dirty="0">
+                <a:solidFill>
+                  <a:srgbClr val="00B050"/>
+                </a:solidFill>
+                <a:latin typeface="Calibri"/>
+                <a:ea typeface="Calibri"/>
+                <a:cs typeface="Calibri"/>
+                <a:sym typeface="Calibri"/>
+              </a:rPr>
+              <a:t>sum( (observed – model)</a:t>
+            </a:r>
+            <a:r>
+              <a:rPr lang="en-US" baseline="30000" dirty="0">
+                <a:solidFill>
+                  <a:srgbClr val="00B050"/>
+                </a:solidFill>
+                <a:latin typeface="Calibri"/>
+                <a:ea typeface="Calibri"/>
+                <a:cs typeface="Calibri"/>
+                <a:sym typeface="Calibri"/>
+              </a:rPr>
+              <a:t>2</a:t>
+            </a:r>
+            <a:r>
+              <a:rPr lang="en-US" dirty="0">
+                <a:solidFill>
+                  <a:srgbClr val="00B050"/>
+                </a:solidFill>
+                <a:latin typeface="Calibri"/>
+                <a:ea typeface="Calibri"/>
+                <a:cs typeface="Calibri"/>
+                <a:sym typeface="Calibri"/>
+              </a:rPr>
+              <a:t>/model )</a:t>
+            </a:r>
+          </a:p>
+          <a:p>
+            <a:r>
+              <a:rPr lang="en-US" dirty="0">
+                <a:solidFill>
+                  <a:srgbClr val="00B050"/>
+                </a:solidFill>
+                <a:latin typeface="Calibri"/>
+                <a:ea typeface="Calibri"/>
+                <a:cs typeface="Calibri"/>
+                <a:sym typeface="Calibri"/>
+              </a:rPr>
+              <a:t>sum( (observed – expected)</a:t>
+            </a:r>
+            <a:r>
+              <a:rPr lang="en-US" baseline="30000" dirty="0">
+                <a:solidFill>
+                  <a:srgbClr val="00B050"/>
+                </a:solidFill>
+                <a:latin typeface="Calibri"/>
+                <a:ea typeface="Calibri"/>
+                <a:cs typeface="Calibri"/>
+                <a:sym typeface="Calibri"/>
+              </a:rPr>
+              <a:t>2</a:t>
+            </a:r>
+            <a:r>
+              <a:rPr lang="en-US" dirty="0">
+                <a:solidFill>
+                  <a:srgbClr val="00B050"/>
+                </a:solidFill>
+                <a:latin typeface="Calibri"/>
+                <a:ea typeface="Calibri"/>
+                <a:cs typeface="Calibri"/>
+                <a:sym typeface="Calibri"/>
+              </a:rPr>
+              <a:t>/expected)</a:t>
+            </a:r>
+          </a:p>
+          <a:p>
+            <a:pPr marL="0" lvl="0" indent="0" algn="l" rtl="0">
+              <a:spcBef>
+                <a:spcPts val="0"/>
+              </a:spcBef>
+              <a:spcAft>
+                <a:spcPts val="0"/>
+              </a:spcAft>
+              <a:buNone/>
+            </a:pPr>
+            <a:endParaRPr lang="en-US" dirty="0">
               <a:solidFill>
-                <a:srgbClr val="0070C0"/>
+                <a:srgbClr val="00B050"/>
               </a:solidFill>
               <a:latin typeface="Calibri"/>
               <a:ea typeface="Calibri"/>
@@ -16482,31 +16542,12 @@
               <a:spcAft>
                 <a:spcPts val="0"/>
               </a:spcAft>
-              <a:buClr>
-                <a:schemeClr val="dk1"/>
-              </a:buClr>
-              <a:buSzPts val="1100"/>
-              <a:buFont typeface="Arial"/>
               <a:buNone/>
             </a:pPr>
-            <a:endParaRPr sz="1800" dirty="0">
-              <a:latin typeface="Calibri"/>
-              <a:ea typeface="Calibri"/>
-              <a:cs typeface="Calibri"/>
-              <a:sym typeface="Calibri"/>
-            </a:endParaRPr>
-          </a:p>
-          <a:p>
-            <a:pPr marL="0" lvl="0" indent="0" algn="l" rtl="0">
-              <a:spcBef>
-                <a:spcPts val="0"/>
-              </a:spcBef>
-              <a:spcAft>
-                <a:spcPts val="0"/>
-              </a:spcAft>
-              <a:buNone/>
-            </a:pPr>
-            <a:endParaRPr sz="1800" dirty="0">
+            <a:endParaRPr dirty="0">
+              <a:solidFill>
+                <a:srgbClr val="00B050"/>
+              </a:solidFill>
               <a:latin typeface="Calibri"/>
               <a:ea typeface="Calibri"/>
               <a:cs typeface="Calibri"/>
@@ -16803,7 +16844,7 @@
           <a:graphicData uri="http://schemas.openxmlformats.org/presentationml/2006/ole">
             <mc:AlternateContent xmlns:mc="http://schemas.openxmlformats.org/markup-compatibility/2006">
               <mc:Choice xmlns:v="urn:schemas-microsoft-com:vml" Requires="v">
-                <p:oleObj spid="_x0000_s5467" name="Equation" r:id="rId6" imgW="26517600" imgH="10363200" progId="Equation.3">
+                <p:oleObj spid="_x0000_s5473" name="Equation" r:id="rId6" imgW="26517600" imgH="10363200" progId="Equation.3">
                   <p:embed/>
                 </p:oleObj>
               </mc:Choice>
@@ -17008,7 +17049,7 @@
           <a:graphicData uri="http://schemas.openxmlformats.org/presentationml/2006/ole">
             <mc:AlternateContent xmlns:mc="http://schemas.openxmlformats.org/markup-compatibility/2006">
               <mc:Choice xmlns:v="urn:schemas-microsoft-com:vml" Requires="v">
-                <p:oleObj spid="_x0000_s5468" name="Equation" r:id="rId8" imgW="14325600" imgH="8839200" progId="Equation.3">
+                <p:oleObj spid="_x0000_s5474" name="Equation" r:id="rId8" imgW="14325600" imgH="8839200" progId="Equation.3">
                   <p:embed/>
                 </p:oleObj>
               </mc:Choice>
@@ -17186,6 +17227,36 @@
           </a:fontRef>
         </p:style>
       </p:cxnSp>
+      <p:pic>
+        <p:nvPicPr>
+          <p:cNvPr id="4" name="Picture 3">
+            <a:extLst>
+              <a:ext uri="{FF2B5EF4-FFF2-40B4-BE49-F238E27FC236}">
+                <a16:creationId xmlns:a16="http://schemas.microsoft.com/office/drawing/2014/main" id="{A8C6E30C-58FF-5242-B79A-6066F6367E73}"/>
+              </a:ext>
+            </a:extLst>
+          </p:cNvPr>
+          <p:cNvPicPr>
+            <a:picLocks noChangeAspect="1"/>
+          </p:cNvPicPr>
+          <p:nvPr/>
+        </p:nvPicPr>
+        <p:blipFill>
+          <a:blip r:embed="rId10"/>
+          <a:stretch>
+            <a:fillRect/>
+          </a:stretch>
+        </p:blipFill>
+        <p:spPr>
+          <a:xfrm>
+            <a:off x="3635501" y="3957282"/>
+            <a:ext cx="1778000" cy="736600"/>
+          </a:xfrm>
+          <a:prstGeom prst="rect">
+            <a:avLst/>
+          </a:prstGeom>
+        </p:spPr>
+      </p:pic>
     </p:spTree>
     <p:extLst>
       <p:ext uri="{BB962C8B-B14F-4D97-AF65-F5344CB8AC3E}">
@@ -17225,7 +17296,7 @@
         <p:spPr>
           <a:xfrm>
             <a:off x="76200" y="76200"/>
-            <a:ext cx="12115800" cy="6781800"/>
+            <a:ext cx="6059557" cy="6205330"/>
           </a:xfrm>
           <a:prstGeom prst="rect">
             <a:avLst/>
@@ -17297,10 +17368,27 @@
                 <a:cs typeface="Calibri"/>
                 <a:sym typeface="Calibri"/>
               </a:rPr>
-              <a:t>   ( from </a:t>
-            </a:r>
-            <a:r>
-              <a:rPr lang="en-US" sz="1800" u="sng" dirty="0">
+              <a:t>   </a:t>
+            </a:r>
+            <a:br>
+              <a:rPr lang="en-US" sz="1800" dirty="0">
+                <a:latin typeface="Calibri"/>
+                <a:ea typeface="Calibri"/>
+                <a:cs typeface="Calibri"/>
+                <a:sym typeface="Calibri"/>
+              </a:rPr>
+            </a:br>
+            <a:r>
+              <a:rPr lang="en-US" sz="1300" dirty="0">
+                <a:latin typeface="Calibri"/>
+                <a:ea typeface="Calibri"/>
+                <a:cs typeface="Calibri"/>
+                <a:sym typeface="Calibri"/>
+              </a:rPr>
+              <a:t>( from </a:t>
+            </a:r>
+            <a:r>
+              <a:rPr lang="en-US" sz="1300" u="sng" dirty="0">
                 <a:solidFill>
                   <a:schemeClr val="hlink"/>
                 </a:solidFill>
@@ -17309,7 +17397,7 @@
               <a:t>https://stattrek.com/chi-square-test/goodness-of-fit.aspx</a:t>
             </a:r>
             <a:r>
-              <a:rPr lang="en-US" sz="1800" dirty="0">
+              <a:rPr lang="en-US" sz="1300" dirty="0">
                 <a:latin typeface="Calibri"/>
                 <a:ea typeface="Calibri"/>
                 <a:cs typeface="Calibri"/>
@@ -17317,7 +17405,7 @@
               </a:rPr>
               <a:t> )</a:t>
             </a:r>
-            <a:endParaRPr sz="1800" dirty="0">
+            <a:endParaRPr sz="1300" dirty="0">
               <a:latin typeface="Calibri"/>
               <a:ea typeface="Calibri"/>
               <a:cs typeface="Calibri"/>
@@ -17340,7 +17428,7 @@
               <a:buNone/>
             </a:pPr>
             <a:br>
-              <a:rPr lang="en-US" sz="1800" dirty="0">
+              <a:rPr lang="en-US" sz="1300" dirty="0">
                 <a:latin typeface="Calibri"/>
                 <a:ea typeface="Calibri"/>
                 <a:cs typeface="Calibri"/>
@@ -17348,7 +17436,7 @@
               </a:rPr>
             </a:br>
             <a:r>
-              <a:rPr lang="en-US" sz="1800" b="1" u="sng" dirty="0">
+              <a:rPr lang="en-US" sz="1300" b="1" u="sng" dirty="0">
                 <a:latin typeface="Calibri"/>
                 <a:ea typeface="Calibri"/>
                 <a:cs typeface="Calibri"/>
@@ -17356,7 +17444,7 @@
               </a:rPr>
               <a:t>Problem:</a:t>
             </a:r>
-            <a:endParaRPr sz="1800" b="1" u="sng" dirty="0">
+            <a:endParaRPr sz="1300" b="1" u="sng" dirty="0">
               <a:latin typeface="Calibri"/>
               <a:ea typeface="Calibri"/>
               <a:cs typeface="Calibri"/>
@@ -17374,7 +17462,7 @@
               <a:buNone/>
             </a:pPr>
             <a:r>
-              <a:rPr lang="en-US" sz="1800" dirty="0">
+              <a:rPr lang="en-US" sz="1300" dirty="0">
                 <a:latin typeface="Calibri"/>
                 <a:ea typeface="Calibri"/>
                 <a:cs typeface="Calibri"/>
@@ -17382,7 +17470,7 @@
               </a:rPr>
               <a:t>We have 3 types of cards (T1,T2,T3) with theoretical frequency of (30%, 60%, 10%).</a:t>
             </a:r>
-            <a:endParaRPr sz="1800" dirty="0">
+            <a:endParaRPr sz="1300" dirty="0">
               <a:latin typeface="Calibri"/>
               <a:ea typeface="Calibri"/>
               <a:cs typeface="Calibri"/>
@@ -17400,7 +17488,7 @@
               <a:buNone/>
             </a:pPr>
             <a:r>
-              <a:rPr lang="en-US" sz="1800" dirty="0">
+              <a:rPr lang="en-US" sz="1300" dirty="0">
                 <a:latin typeface="Calibri"/>
                 <a:ea typeface="Calibri"/>
                 <a:cs typeface="Calibri"/>
@@ -17408,7 +17496,7 @@
               </a:rPr>
               <a:t>We have a random sample of 100 cards with counts (50, 45, 5).</a:t>
             </a:r>
-            <a:endParaRPr sz="1800" dirty="0">
+            <a:endParaRPr sz="1300" dirty="0">
               <a:latin typeface="Calibri"/>
               <a:ea typeface="Calibri"/>
               <a:cs typeface="Calibri"/>
@@ -17431,7 +17519,7 @@
               <a:buNone/>
             </a:pPr>
             <a:r>
-              <a:rPr lang="en-US" sz="1800" dirty="0">
+              <a:rPr lang="en-US" sz="1300" dirty="0">
                 <a:latin typeface="Calibri"/>
                 <a:ea typeface="Calibri"/>
                 <a:cs typeface="Calibri"/>
@@ -17439,7 +17527,7 @@
               </a:rPr>
               <a:t>Is this sample consistent with theory? Use a 0.05 level of significance.</a:t>
             </a:r>
-            <a:endParaRPr sz="1800" dirty="0">
+            <a:endParaRPr sz="1300" dirty="0">
               <a:latin typeface="Calibri"/>
               <a:ea typeface="Calibri"/>
               <a:cs typeface="Calibri"/>
@@ -17461,7 +17549,7 @@
               <a:buFont typeface="Arial"/>
               <a:buNone/>
             </a:pPr>
-            <a:endParaRPr sz="1800" dirty="0">
+            <a:endParaRPr sz="1300" dirty="0">
               <a:latin typeface="Calibri"/>
               <a:ea typeface="Calibri"/>
               <a:cs typeface="Calibri"/>
@@ -17484,7 +17572,7 @@
               <a:buNone/>
             </a:pPr>
             <a:r>
-              <a:rPr lang="en-US" sz="1800" b="1" u="sng" dirty="0">
+              <a:rPr lang="en-US" sz="1300" b="1" u="sng" dirty="0">
                 <a:latin typeface="Calibri"/>
                 <a:ea typeface="Calibri"/>
                 <a:cs typeface="Calibri"/>
@@ -17492,7 +17580,7 @@
               </a:rPr>
               <a:t>Solution:</a:t>
             </a:r>
-            <a:endParaRPr sz="1800" b="1" u="sng" dirty="0">
+            <a:endParaRPr sz="1300" b="1" u="sng" dirty="0">
               <a:latin typeface="Calibri"/>
               <a:ea typeface="Calibri"/>
               <a:cs typeface="Calibri"/>
@@ -17510,7 +17598,7 @@
               <a:buNone/>
             </a:pPr>
             <a:r>
-              <a:rPr lang="en-US" sz="1800" dirty="0">
+              <a:rPr lang="en-US" sz="1300" dirty="0">
                 <a:latin typeface="Calibri"/>
                 <a:ea typeface="Calibri"/>
                 <a:cs typeface="Calibri"/>
@@ -17519,7 +17607,7 @@
               <a:t>Null hypothesis: The proportions are </a:t>
             </a:r>
             <a:r>
-              <a:rPr lang="en-US" sz="1800" dirty="0">
+              <a:rPr lang="en-US" sz="1300" dirty="0">
                 <a:solidFill>
                   <a:schemeClr val="dk1"/>
                 </a:solidFill>
@@ -17530,7 +17618,7 @@
               </a:rPr>
               <a:t>(30%, 60%, 10%)</a:t>
             </a:r>
-            <a:endParaRPr sz="1800" dirty="0">
+            <a:endParaRPr sz="1300" dirty="0">
               <a:solidFill>
                 <a:schemeClr val="dk1"/>
               </a:solidFill>
@@ -17556,7 +17644,7 @@
               <a:buNone/>
             </a:pPr>
             <a:r>
-              <a:rPr lang="en-US" sz="1800" dirty="0">
+              <a:rPr lang="en-US" sz="1300" dirty="0">
                 <a:latin typeface="Calibri"/>
                 <a:ea typeface="Calibri"/>
                 <a:cs typeface="Calibri"/>
@@ -17564,7 +17652,7 @@
               </a:rPr>
               <a:t>Alternative hypothesis: At least one of the proportions in the null hypothesis is false.</a:t>
             </a:r>
-            <a:endParaRPr sz="1800" dirty="0">
+            <a:endParaRPr sz="1300" dirty="0">
               <a:latin typeface="Calibri"/>
               <a:ea typeface="Calibri"/>
               <a:cs typeface="Calibri"/>
@@ -17582,7 +17670,7 @@
               <a:buNone/>
             </a:pPr>
             <a:r>
-              <a:rPr lang="en-US" sz="1800" dirty="0">
+              <a:rPr lang="en-US" sz="1300" dirty="0">
                 <a:latin typeface="Calibri"/>
                 <a:ea typeface="Calibri"/>
                 <a:cs typeface="Calibri"/>
@@ -17590,7 +17678,7 @@
               </a:rPr>
               <a:t>Degrees of Freedom DF = k-1 = 3-1 = 2</a:t>
             </a:r>
-            <a:endParaRPr sz="1800" dirty="0">
+            <a:endParaRPr sz="1300" dirty="0">
               <a:latin typeface="Calibri"/>
               <a:ea typeface="Calibri"/>
               <a:cs typeface="Calibri"/>
@@ -17608,7 +17696,7 @@
               <a:buNone/>
             </a:pPr>
             <a:r>
-              <a:rPr lang="en-US" sz="1800" dirty="0">
+              <a:rPr lang="en-US" sz="1300" dirty="0">
                 <a:latin typeface="Calibri"/>
                 <a:ea typeface="Calibri"/>
                 <a:cs typeface="Calibri"/>
@@ -17616,7 +17704,7 @@
               </a:rPr>
               <a:t>Expected values:</a:t>
             </a:r>
-            <a:endParaRPr sz="1800" dirty="0">
+            <a:endParaRPr sz="1300" dirty="0">
               <a:latin typeface="Calibri"/>
               <a:ea typeface="Calibri"/>
               <a:cs typeface="Calibri"/>
@@ -17634,7 +17722,7 @@
               <a:buNone/>
             </a:pPr>
             <a:r>
-              <a:rPr lang="en-US" sz="1800" dirty="0">
+              <a:rPr lang="en-US" sz="1300" dirty="0">
                 <a:latin typeface="Calibri"/>
                 <a:ea typeface="Calibri"/>
                 <a:cs typeface="Calibri"/>
@@ -17643,7 +17731,7 @@
               <a:t>E</a:t>
             </a:r>
             <a:r>
-              <a:rPr lang="en-US" sz="1800" baseline="-25000" dirty="0">
+              <a:rPr lang="en-US" sz="1300" baseline="-25000" dirty="0">
                 <a:latin typeface="Calibri"/>
                 <a:ea typeface="Calibri"/>
                 <a:cs typeface="Calibri"/>
@@ -17652,7 +17740,7 @@
               <a:t>1</a:t>
             </a:r>
             <a:r>
-              <a:rPr lang="en-US" sz="1800" dirty="0">
+              <a:rPr lang="en-US" sz="1300" dirty="0">
                 <a:latin typeface="Calibri"/>
                 <a:ea typeface="Calibri"/>
                 <a:cs typeface="Calibri"/>
@@ -17661,7 +17749,7 @@
               <a:t> = 100*0.3 = 30, E</a:t>
             </a:r>
             <a:r>
-              <a:rPr lang="en-US" sz="1800" baseline="-25000" dirty="0">
+              <a:rPr lang="en-US" sz="1300" baseline="-25000" dirty="0">
                 <a:latin typeface="Calibri"/>
                 <a:ea typeface="Calibri"/>
                 <a:cs typeface="Calibri"/>
@@ -17670,7 +17758,7 @@
               <a:t>2</a:t>
             </a:r>
             <a:r>
-              <a:rPr lang="en-US" sz="1800" dirty="0">
+              <a:rPr lang="en-US" sz="1300" dirty="0">
                 <a:latin typeface="Calibri"/>
                 <a:ea typeface="Calibri"/>
                 <a:cs typeface="Calibri"/>
@@ -17679,7 +17767,7 @@
               <a:t> = 100*0.6 = 60, E</a:t>
             </a:r>
             <a:r>
-              <a:rPr lang="en-US" sz="1800" baseline="-25000" dirty="0">
+              <a:rPr lang="en-US" sz="1300" baseline="-25000" dirty="0">
                 <a:latin typeface="Calibri"/>
                 <a:ea typeface="Calibri"/>
                 <a:cs typeface="Calibri"/>
@@ -17688,7 +17776,7 @@
               <a:t>3</a:t>
             </a:r>
             <a:r>
-              <a:rPr lang="en-US" sz="1800" dirty="0">
+              <a:rPr lang="en-US" sz="1300" dirty="0">
                 <a:latin typeface="Calibri"/>
                 <a:ea typeface="Calibri"/>
                 <a:cs typeface="Calibri"/>
@@ -17697,7 +17785,7 @@
               <a:t> = </a:t>
             </a:r>
             <a:r>
-              <a:rPr lang="en-US" sz="1800" dirty="0">
+              <a:rPr lang="en-US" sz="1300" dirty="0">
                 <a:solidFill>
                   <a:schemeClr val="dk1"/>
                 </a:solidFill>
@@ -17708,7 +17796,7 @@
               </a:rPr>
               <a:t>100 * 0.10 = 10</a:t>
             </a:r>
-            <a:endParaRPr sz="1800" dirty="0">
+            <a:endParaRPr sz="1300" dirty="0">
               <a:latin typeface="Calibri"/>
               <a:ea typeface="Calibri"/>
               <a:cs typeface="Calibri"/>
@@ -17731,7 +17819,7 @@
               <a:buNone/>
             </a:pPr>
             <a:r>
-              <a:rPr lang="en-US" sz="1800" dirty="0">
+              <a:rPr lang="en-US" sz="1300" dirty="0">
                 <a:latin typeface="Calibri"/>
                 <a:ea typeface="Calibri"/>
                 <a:cs typeface="Calibri"/>
@@ -17740,7 +17828,7 @@
               <a:t>Χ</a:t>
             </a:r>
             <a:r>
-              <a:rPr lang="en-US" sz="1800" baseline="30000" dirty="0">
+              <a:rPr lang="en-US" sz="1300" baseline="30000" dirty="0">
                 <a:latin typeface="Calibri"/>
                 <a:ea typeface="Calibri"/>
                 <a:cs typeface="Calibri"/>
@@ -17749,7 +17837,7 @@
               <a:t>2</a:t>
             </a:r>
             <a:r>
-              <a:rPr lang="en-US" sz="1800" dirty="0">
+              <a:rPr lang="en-US" sz="1300" dirty="0">
                 <a:latin typeface="Calibri"/>
                 <a:ea typeface="Calibri"/>
                 <a:cs typeface="Calibri"/>
@@ -17758,7 +17846,7 @@
               <a:t> = </a:t>
             </a:r>
             <a:r>
-              <a:rPr lang="en-US" sz="1800" dirty="0" err="1">
+              <a:rPr lang="en-US" sz="1300" dirty="0" err="1">
                 <a:latin typeface="Calibri"/>
                 <a:ea typeface="Calibri"/>
                 <a:cs typeface="Calibri"/>
@@ -17767,7 +17855,7 @@
               <a:t>Σ</a:t>
             </a:r>
             <a:r>
-              <a:rPr lang="en-US" sz="1800" dirty="0">
+              <a:rPr lang="en-US" sz="1300" dirty="0">
                 <a:latin typeface="Calibri"/>
                 <a:ea typeface="Calibri"/>
                 <a:cs typeface="Calibri"/>
@@ -17776,7 +17864,7 @@
               <a:t> [ (O</a:t>
             </a:r>
             <a:r>
-              <a:rPr lang="en-US" sz="1800" baseline="-25000" dirty="0">
+              <a:rPr lang="en-US" sz="1300" baseline="-25000" dirty="0">
                 <a:latin typeface="Calibri"/>
                 <a:ea typeface="Calibri"/>
                 <a:cs typeface="Calibri"/>
@@ -17785,7 +17873,7 @@
               <a:t>i</a:t>
             </a:r>
             <a:r>
-              <a:rPr lang="en-US" sz="1800" dirty="0">
+              <a:rPr lang="en-US" sz="1300" dirty="0">
                 <a:latin typeface="Calibri"/>
                 <a:ea typeface="Calibri"/>
                 <a:cs typeface="Calibri"/>
@@ -17794,7 +17882,7 @@
               <a:t> - </a:t>
             </a:r>
             <a:r>
-              <a:rPr lang="en-US" sz="1800" dirty="0" err="1">
+              <a:rPr lang="en-US" sz="1300" dirty="0" err="1">
                 <a:latin typeface="Calibri"/>
                 <a:ea typeface="Calibri"/>
                 <a:cs typeface="Calibri"/>
@@ -17803,7 +17891,7 @@
               <a:t>E</a:t>
             </a:r>
             <a:r>
-              <a:rPr lang="en-US" sz="1800" baseline="-25000" dirty="0" err="1">
+              <a:rPr lang="en-US" sz="1300" baseline="-25000" dirty="0" err="1">
                 <a:latin typeface="Calibri"/>
                 <a:ea typeface="Calibri"/>
                 <a:cs typeface="Calibri"/>
@@ -17812,7 +17900,7 @@
               <a:t>i</a:t>
             </a:r>
             <a:r>
-              <a:rPr lang="en-US" sz="1800" dirty="0">
+              <a:rPr lang="en-US" sz="1300" dirty="0">
                 <a:latin typeface="Calibri"/>
                 <a:ea typeface="Calibri"/>
                 <a:cs typeface="Calibri"/>
@@ -17821,7 +17909,7 @@
               <a:t>)</a:t>
             </a:r>
             <a:r>
-              <a:rPr lang="en-US" sz="1800" baseline="30000" dirty="0">
+              <a:rPr lang="en-US" sz="1300" baseline="30000" dirty="0">
                 <a:latin typeface="Calibri"/>
                 <a:ea typeface="Calibri"/>
                 <a:cs typeface="Calibri"/>
@@ -17830,7 +17918,7 @@
               <a:t>2</a:t>
             </a:r>
             <a:r>
-              <a:rPr lang="en-US" sz="1800" dirty="0">
+              <a:rPr lang="en-US" sz="1300" dirty="0">
                 <a:latin typeface="Calibri"/>
                 <a:ea typeface="Calibri"/>
                 <a:cs typeface="Calibri"/>
@@ -17839,7 +17927,7 @@
               <a:t> / </a:t>
             </a:r>
             <a:r>
-              <a:rPr lang="en-US" sz="1800" dirty="0" err="1">
+              <a:rPr lang="en-US" sz="1300" dirty="0" err="1">
                 <a:latin typeface="Calibri"/>
                 <a:ea typeface="Calibri"/>
                 <a:cs typeface="Calibri"/>
@@ -17848,7 +17936,7 @@
               <a:t>E</a:t>
             </a:r>
             <a:r>
-              <a:rPr lang="en-US" sz="1800" baseline="-25000" dirty="0" err="1">
+              <a:rPr lang="en-US" sz="1300" baseline="-25000" dirty="0" err="1">
                 <a:latin typeface="Calibri"/>
                 <a:ea typeface="Calibri"/>
                 <a:cs typeface="Calibri"/>
@@ -17857,7 +17945,7 @@
               <a:t>i</a:t>
             </a:r>
             <a:r>
-              <a:rPr lang="en-US" sz="1800" dirty="0">
+              <a:rPr lang="en-US" sz="1300" dirty="0">
                 <a:latin typeface="Calibri"/>
                 <a:ea typeface="Calibri"/>
                 <a:cs typeface="Calibri"/>
@@ -17866,7 +17954,7 @@
               <a:t> ] =  [ (50 - 30)</a:t>
             </a:r>
             <a:r>
-              <a:rPr lang="en-US" sz="1800" baseline="30000" dirty="0">
+              <a:rPr lang="en-US" sz="1300" baseline="30000" dirty="0">
                 <a:latin typeface="Calibri"/>
                 <a:ea typeface="Calibri"/>
                 <a:cs typeface="Calibri"/>
@@ -17875,7 +17963,7 @@
               <a:t>2</a:t>
             </a:r>
             <a:r>
-              <a:rPr lang="en-US" sz="1800" dirty="0">
+              <a:rPr lang="en-US" sz="1300" dirty="0">
                 <a:latin typeface="Calibri"/>
                 <a:ea typeface="Calibri"/>
                 <a:cs typeface="Calibri"/>
@@ -17884,7 +17972,7 @@
               <a:t> / 30 ] + [ (45 - 60)</a:t>
             </a:r>
             <a:r>
-              <a:rPr lang="en-US" sz="1800" baseline="30000" dirty="0">
+              <a:rPr lang="en-US" sz="1300" baseline="30000" dirty="0">
                 <a:latin typeface="Calibri"/>
                 <a:ea typeface="Calibri"/>
                 <a:cs typeface="Calibri"/>
@@ -17893,7 +17981,7 @@
               <a:t>2</a:t>
             </a:r>
             <a:r>
-              <a:rPr lang="en-US" sz="1800" dirty="0">
+              <a:rPr lang="en-US" sz="1300" dirty="0">
                 <a:latin typeface="Calibri"/>
                 <a:ea typeface="Calibri"/>
                 <a:cs typeface="Calibri"/>
@@ -17902,7 +17990,7 @@
               <a:t> / 60 ] + [ (5 - 10)</a:t>
             </a:r>
             <a:r>
-              <a:rPr lang="en-US" sz="1800" baseline="30000" dirty="0">
+              <a:rPr lang="en-US" sz="1300" baseline="30000" dirty="0">
                 <a:latin typeface="Calibri"/>
                 <a:ea typeface="Calibri"/>
                 <a:cs typeface="Calibri"/>
@@ -17911,7 +17999,7 @@
               <a:t>2</a:t>
             </a:r>
             <a:r>
-              <a:rPr lang="en-US" sz="1800" dirty="0">
+              <a:rPr lang="en-US" sz="1300" dirty="0">
                 <a:latin typeface="Calibri"/>
                 <a:ea typeface="Calibri"/>
                 <a:cs typeface="Calibri"/>
@@ -17919,7 +18007,7 @@
               </a:rPr>
               <a:t> / 10 ] = 19.58</a:t>
             </a:r>
-            <a:endParaRPr sz="1800" dirty="0">
+            <a:endParaRPr sz="1300" dirty="0">
               <a:latin typeface="Calibri"/>
               <a:ea typeface="Calibri"/>
               <a:cs typeface="Calibri"/>
@@ -17941,7 +18029,7 @@
               <a:buFont typeface="Arial"/>
               <a:buNone/>
             </a:pPr>
-            <a:endParaRPr sz="1800" dirty="0">
+            <a:endParaRPr sz="1300" dirty="0">
               <a:latin typeface="Calibri"/>
               <a:ea typeface="Calibri"/>
               <a:cs typeface="Calibri"/>
@@ -17964,7 +18052,7 @@
               <a:buNone/>
             </a:pPr>
             <a:r>
-              <a:rPr lang="en-US" sz="1800" dirty="0">
+              <a:rPr lang="en-US" sz="1300" dirty="0">
                 <a:latin typeface="Calibri"/>
                 <a:ea typeface="Calibri"/>
                 <a:cs typeface="Calibri"/>
@@ -17972,7 +18060,7 @@
               </a:rPr>
               <a:t>The P-value is the probability that a chi-square statistic having 2 degrees of freedom is more extreme than 19.58.</a:t>
             </a:r>
-            <a:endParaRPr sz="1800" dirty="0">
+            <a:endParaRPr sz="1300" dirty="0">
               <a:latin typeface="Calibri"/>
               <a:ea typeface="Calibri"/>
               <a:cs typeface="Calibri"/>
@@ -17990,7 +18078,7 @@
               <a:buNone/>
             </a:pPr>
             <a:r>
-              <a:rPr lang="en-US" sz="1800" dirty="0">
+              <a:rPr lang="en-US" sz="1300" dirty="0">
                 <a:latin typeface="Calibri"/>
                 <a:ea typeface="Calibri"/>
                 <a:cs typeface="Calibri"/>
@@ -17998,7 +18086,7 @@
               </a:rPr>
               <a:t>Using Chi-Square Distribution we find P(Χ2 &gt; 19.58) = 0.0001.</a:t>
             </a:r>
-            <a:endParaRPr sz="1800" dirty="0">
+            <a:endParaRPr sz="1300" dirty="0">
               <a:latin typeface="Calibri"/>
               <a:ea typeface="Calibri"/>
               <a:cs typeface="Calibri"/>
@@ -18020,7 +18108,7 @@
               <a:buFont typeface="Arial"/>
               <a:buNone/>
             </a:pPr>
-            <a:endParaRPr sz="1800" dirty="0">
+            <a:endParaRPr sz="1300" dirty="0">
               <a:latin typeface="Calibri"/>
               <a:ea typeface="Calibri"/>
               <a:cs typeface="Calibri"/>
@@ -18038,7 +18126,7 @@
               <a:buNone/>
             </a:pPr>
             <a:r>
-              <a:rPr lang="en-US" sz="1800" dirty="0">
+              <a:rPr lang="en-US" sz="1300" dirty="0">
                 <a:latin typeface="Calibri"/>
                 <a:ea typeface="Calibri"/>
                 <a:cs typeface="Calibri"/>
@@ -18046,7 +18134,7 @@
               </a:rPr>
               <a:t>Since the P-value (0.0001) is less than the significance level (0.05), we reject the null hypothesis.</a:t>
             </a:r>
-            <a:endParaRPr sz="1800" dirty="0">
+            <a:endParaRPr sz="1300" dirty="0">
               <a:latin typeface="Calibri"/>
               <a:ea typeface="Calibri"/>
               <a:cs typeface="Calibri"/>
@@ -18068,7 +18156,7 @@
               <a:buFont typeface="Arial"/>
               <a:buNone/>
             </a:pPr>
-            <a:endParaRPr sz="1800" dirty="0">
+            <a:endParaRPr sz="1300" dirty="0">
               <a:latin typeface="Calibri"/>
               <a:ea typeface="Calibri"/>
               <a:cs typeface="Calibri"/>
@@ -18086,7 +18174,7 @@
               <a:buNone/>
             </a:pPr>
             <a:r>
-              <a:rPr lang="en-US" sz="1800" dirty="0">
+              <a:rPr lang="en-US" sz="1300" dirty="0">
                 <a:latin typeface="Calibri"/>
                 <a:ea typeface="Calibri"/>
                 <a:cs typeface="Calibri"/>
@@ -18094,7 +18182,7 @@
               </a:rPr>
               <a:t>Note: If you use this approach on an exam, you may also want to mention why this approach is appropriate. </a:t>
             </a:r>
-            <a:endParaRPr sz="1800" dirty="0">
+            <a:endParaRPr sz="1300" dirty="0">
               <a:latin typeface="Calibri"/>
               <a:ea typeface="Calibri"/>
               <a:cs typeface="Calibri"/>
@@ -18117,7 +18205,7 @@
               <a:buNone/>
             </a:pPr>
             <a:r>
-              <a:rPr lang="en-US" sz="1800" dirty="0">
+              <a:rPr lang="en-US" sz="1300" dirty="0">
                 <a:latin typeface="Calibri"/>
                 <a:ea typeface="Calibri"/>
                 <a:cs typeface="Calibri"/>
@@ -18125,29 +18213,375 @@
               </a:rPr>
               <a:t>Specifically, the approach is appropriate because the sampling method was simple random sampling, the variable under study was categorical, and each level of the categorical variable had an expected frequency count of at least 5.</a:t>
             </a:r>
-            <a:endParaRPr sz="1800" dirty="0">
+            <a:endParaRPr sz="1300" dirty="0">
               <a:latin typeface="Calibri"/>
               <a:ea typeface="Calibri"/>
               <a:cs typeface="Calibri"/>
               <a:sym typeface="Calibri"/>
             </a:endParaRPr>
           </a:p>
-          <a:p>
-            <a:pPr marL="0" lvl="0" indent="0" algn="l" rtl="0">
-              <a:spcBef>
-                <a:spcPts val="0"/>
-              </a:spcBef>
-              <a:spcAft>
-                <a:spcPts val="0"/>
-              </a:spcAft>
-              <a:buNone/>
-            </a:pPr>
-            <a:endParaRPr sz="1800" dirty="0">
+        </p:txBody>
+      </p:sp>
+      <p:sp>
+        <p:nvSpPr>
+          <p:cNvPr id="3" name="Google Shape;130;p18">
+            <a:extLst>
+              <a:ext uri="{FF2B5EF4-FFF2-40B4-BE49-F238E27FC236}">
+                <a16:creationId xmlns:a16="http://schemas.microsoft.com/office/drawing/2014/main" id="{B91C97CA-E596-D14D-8D2B-679B5C2D3B30}"/>
+              </a:ext>
+            </a:extLst>
+          </p:cNvPr>
+          <p:cNvSpPr txBox="1"/>
+          <p:nvPr/>
+        </p:nvSpPr>
+        <p:spPr>
+          <a:xfrm>
+            <a:off x="6390861" y="76200"/>
+            <a:ext cx="5184913" cy="3303104"/>
+          </a:xfrm>
+          <a:prstGeom prst="rect">
+            <a:avLst/>
+          </a:prstGeom>
+          <a:noFill/>
+          <a:ln>
+            <a:noFill/>
+          </a:ln>
+        </p:spPr>
+        <p:txBody>
+          <a:bodyPr spcFirstLastPara="1" wrap="square" lIns="91425" tIns="91425" rIns="91425" bIns="91425" anchor="t" anchorCtr="0">
+            <a:noAutofit/>
+          </a:bodyPr>
+          <a:lstStyle/>
+          <a:p>
+            <a:pPr lvl="0"/>
+            <a:r>
+              <a:rPr lang="en-US" sz="3000" b="1" dirty="0">
+                <a:latin typeface="Calibri"/>
+                <a:ea typeface="Calibri"/>
+                <a:cs typeface="Calibri"/>
+                <a:sym typeface="Calibri"/>
+              </a:rPr>
+              <a:t>Example of </a:t>
+            </a:r>
+            <a:r>
+              <a:rPr lang="en-US" sz="3000" b="1" i="1" dirty="0">
+                <a:solidFill>
+                  <a:srgbClr val="222222"/>
+                </a:solidFill>
+                <a:highlight>
+                  <a:srgbClr val="FFFFFF"/>
+                </a:highlight>
+                <a:latin typeface="Times New Roman"/>
+                <a:ea typeface="Times New Roman"/>
+                <a:cs typeface="Times New Roman"/>
+                <a:sym typeface="Times New Roman"/>
+              </a:rPr>
+              <a:t>χ</a:t>
+            </a:r>
+            <a:r>
+              <a:rPr lang="en-US" sz="3000" b="1" baseline="30000" dirty="0">
+                <a:solidFill>
+                  <a:srgbClr val="222222"/>
+                </a:solidFill>
+                <a:highlight>
+                  <a:srgbClr val="FFFFFF"/>
+                </a:highlight>
+                <a:latin typeface="Times New Roman"/>
+                <a:ea typeface="Times New Roman"/>
+                <a:cs typeface="Times New Roman"/>
+                <a:sym typeface="Times New Roman"/>
+              </a:rPr>
+              <a:t>2</a:t>
+            </a:r>
+            <a:r>
+              <a:rPr lang="en-US" sz="3000" b="1" dirty="0">
+                <a:latin typeface="Calibri"/>
+                <a:ea typeface="Calibri"/>
+                <a:cs typeface="Calibri"/>
+                <a:sym typeface="Calibri"/>
+              </a:rPr>
+              <a:t> test – coin flip</a:t>
+            </a:r>
+            <a:r>
+              <a:rPr lang="en-US" sz="1800" dirty="0">
+                <a:latin typeface="Calibri"/>
+                <a:ea typeface="Calibri"/>
+                <a:cs typeface="Calibri"/>
+                <a:sym typeface="Calibri"/>
+              </a:rPr>
+              <a:t>   </a:t>
+            </a:r>
+            <a:br>
+              <a:rPr lang="en-US" sz="1800" dirty="0">
+                <a:latin typeface="Calibri"/>
+                <a:ea typeface="Calibri"/>
+                <a:cs typeface="Calibri"/>
+                <a:sym typeface="Calibri"/>
+              </a:rPr>
+            </a:br>
+            <a:br>
+              <a:rPr lang="en-US" sz="1300" dirty="0">
+                <a:latin typeface="Calibri"/>
+                <a:ea typeface="Calibri"/>
+                <a:cs typeface="Calibri"/>
+                <a:sym typeface="Calibri"/>
+              </a:rPr>
+            </a:br>
+            <a:r>
+              <a:rPr lang="en-US" sz="1300" b="1" u="sng" dirty="0">
+                <a:latin typeface="Calibri"/>
+                <a:ea typeface="Calibri"/>
+                <a:cs typeface="Calibri"/>
+                <a:sym typeface="Calibri"/>
+              </a:rPr>
+              <a:t>Problem:</a:t>
+            </a:r>
+            <a:endParaRPr sz="1300" b="1" u="sng" dirty="0">
               <a:latin typeface="Calibri"/>
               <a:ea typeface="Calibri"/>
               <a:cs typeface="Calibri"/>
               <a:sym typeface="Calibri"/>
             </a:endParaRPr>
+          </a:p>
+          <a:p>
+            <a:pPr marL="0" lvl="0" indent="0" algn="l" rtl="0">
+              <a:spcBef>
+                <a:spcPts val="0"/>
+              </a:spcBef>
+              <a:spcAft>
+                <a:spcPts val="0"/>
+              </a:spcAft>
+              <a:buNone/>
+            </a:pPr>
+            <a:r>
+              <a:rPr lang="en-US" sz="1300" dirty="0">
+                <a:latin typeface="Calibri"/>
+                <a:ea typeface="Calibri"/>
+                <a:cs typeface="Calibri"/>
+                <a:sym typeface="Calibri"/>
+              </a:rPr>
+              <a:t>We want to test a null hypothesis that the coin is fair.</a:t>
+            </a:r>
+          </a:p>
+          <a:p>
+            <a:pPr marL="0" lvl="0" indent="0" algn="l" rtl="0">
+              <a:spcBef>
+                <a:spcPts val="0"/>
+              </a:spcBef>
+              <a:spcAft>
+                <a:spcPts val="0"/>
+              </a:spcAft>
+              <a:buNone/>
+            </a:pPr>
+            <a:r>
+              <a:rPr lang="en-US" sz="1300" dirty="0">
+                <a:latin typeface="Calibri"/>
+                <a:ea typeface="Calibri"/>
+                <a:cs typeface="Calibri"/>
+                <a:sym typeface="Calibri"/>
+              </a:rPr>
+              <a:t>We flip the coin N times and got H heads.</a:t>
+            </a:r>
+          </a:p>
+          <a:p>
+            <a:pPr marL="0" lvl="0" indent="0" algn="l" rtl="0">
+              <a:spcBef>
+                <a:spcPts val="0"/>
+              </a:spcBef>
+              <a:spcAft>
+                <a:spcPts val="0"/>
+              </a:spcAft>
+              <a:buNone/>
+            </a:pPr>
+            <a:r>
+              <a:rPr lang="en-US" sz="1300" dirty="0">
+                <a:latin typeface="Calibri"/>
+                <a:ea typeface="Calibri"/>
+                <a:cs typeface="Calibri"/>
+                <a:sym typeface="Calibri"/>
+              </a:rPr>
+              <a:t>So number of observed tails T = N-H.</a:t>
+            </a:r>
+          </a:p>
+          <a:p>
+            <a:pPr marL="0" lvl="0" indent="0" algn="l" rtl="0">
+              <a:spcBef>
+                <a:spcPts val="0"/>
+              </a:spcBef>
+              <a:spcAft>
+                <a:spcPts val="0"/>
+              </a:spcAft>
+              <a:buNone/>
+            </a:pPr>
+            <a:endParaRPr lang="en-US" sz="1300" dirty="0">
+              <a:latin typeface="Calibri"/>
+              <a:ea typeface="Calibri"/>
+              <a:cs typeface="Calibri"/>
+              <a:sym typeface="Calibri"/>
+            </a:endParaRPr>
+          </a:p>
+          <a:p>
+            <a:pPr marL="0" lvl="0" indent="0" algn="l" rtl="0">
+              <a:spcBef>
+                <a:spcPts val="0"/>
+              </a:spcBef>
+              <a:spcAft>
+                <a:spcPts val="0"/>
+              </a:spcAft>
+              <a:buNone/>
+            </a:pPr>
+            <a:r>
+              <a:rPr lang="en-US" sz="1300" dirty="0">
+                <a:latin typeface="Calibri"/>
+                <a:ea typeface="Calibri"/>
+                <a:cs typeface="Calibri"/>
+                <a:sym typeface="Calibri"/>
+              </a:rPr>
+              <a:t>Expected values are N/2 for heads and for tails.</a:t>
+            </a:r>
+          </a:p>
+          <a:p>
+            <a:pPr lvl="0"/>
+            <a:endParaRPr lang="en-US" sz="1300" dirty="0">
+              <a:latin typeface="Calibri"/>
+              <a:ea typeface="Calibri"/>
+              <a:cs typeface="Calibri"/>
+              <a:sym typeface="Calibri"/>
+            </a:endParaRPr>
+          </a:p>
+          <a:p>
+            <a:pPr lvl="0"/>
+            <a:r>
+              <a:rPr lang="en-US" sz="1300" dirty="0">
+                <a:latin typeface="Calibri"/>
+                <a:ea typeface="Calibri"/>
+                <a:cs typeface="Calibri"/>
+                <a:sym typeface="Calibri"/>
+              </a:rPr>
+              <a:t>X2 = sum( (observed – expected)</a:t>
+            </a:r>
+            <a:r>
+              <a:rPr lang="en-US" sz="1300" baseline="30000" dirty="0">
+                <a:latin typeface="Calibri"/>
+                <a:ea typeface="Calibri"/>
+                <a:cs typeface="Calibri"/>
+                <a:sym typeface="Calibri"/>
+              </a:rPr>
+              <a:t>2</a:t>
+            </a:r>
+            <a:r>
+              <a:rPr lang="en-US" sz="1300" dirty="0">
+                <a:latin typeface="Calibri"/>
+                <a:ea typeface="Calibri"/>
+                <a:cs typeface="Calibri"/>
+                <a:sym typeface="Calibri"/>
+              </a:rPr>
+              <a:t>/expected) = </a:t>
+            </a:r>
+          </a:p>
+          <a:p>
+            <a:pPr lvl="0"/>
+            <a:endParaRPr lang="en-US" sz="1300" dirty="0">
+              <a:latin typeface="Calibri"/>
+              <a:ea typeface="Calibri"/>
+              <a:cs typeface="Calibri"/>
+              <a:sym typeface="Calibri"/>
+            </a:endParaRPr>
+          </a:p>
+          <a:p>
+            <a:pPr lvl="0"/>
+            <a:r>
+              <a:rPr lang="en-US" sz="1300" dirty="0">
+                <a:latin typeface="Calibri"/>
+                <a:ea typeface="Calibri"/>
+                <a:cs typeface="Calibri"/>
+                <a:sym typeface="Calibri"/>
+              </a:rPr>
+              <a:t>=  [ (H– N/2)</a:t>
+            </a:r>
+            <a:r>
+              <a:rPr lang="en-US" sz="1300" baseline="30000" dirty="0">
+                <a:latin typeface="Calibri"/>
+                <a:ea typeface="Calibri"/>
+                <a:cs typeface="Calibri"/>
+                <a:sym typeface="Calibri"/>
+              </a:rPr>
+              <a:t>2</a:t>
+            </a:r>
+            <a:r>
+              <a:rPr lang="en-US" sz="1300" dirty="0">
+                <a:latin typeface="Calibri"/>
+                <a:ea typeface="Calibri"/>
+                <a:cs typeface="Calibri"/>
+                <a:sym typeface="Calibri"/>
+              </a:rPr>
+              <a:t> / (N/2) ] + [ (T – N/2)</a:t>
+            </a:r>
+            <a:r>
+              <a:rPr lang="en-US" sz="1300" baseline="30000" dirty="0">
+                <a:latin typeface="Calibri"/>
+                <a:ea typeface="Calibri"/>
+                <a:cs typeface="Calibri"/>
+                <a:sym typeface="Calibri"/>
+              </a:rPr>
+              <a:t>2</a:t>
+            </a:r>
+            <a:r>
+              <a:rPr lang="en-US" sz="1300" dirty="0">
+                <a:latin typeface="Calibri"/>
+                <a:ea typeface="Calibri"/>
+                <a:cs typeface="Calibri"/>
+                <a:sym typeface="Calibri"/>
+              </a:rPr>
+              <a:t> / (N/2) ] </a:t>
+            </a:r>
+          </a:p>
+          <a:p>
+            <a:pPr marL="0" lvl="0" indent="0" algn="l" rtl="0">
+              <a:spcBef>
+                <a:spcPts val="0"/>
+              </a:spcBef>
+              <a:spcAft>
+                <a:spcPts val="0"/>
+              </a:spcAft>
+              <a:buClr>
+                <a:schemeClr val="dk1"/>
+              </a:buClr>
+              <a:buSzPts val="1100"/>
+              <a:buFont typeface="Arial"/>
+              <a:buNone/>
+            </a:pPr>
+            <a:endParaRPr sz="1300" dirty="0">
+              <a:latin typeface="Calibri"/>
+              <a:ea typeface="Calibri"/>
+              <a:cs typeface="Calibri"/>
+              <a:sym typeface="Calibri"/>
+            </a:endParaRPr>
+          </a:p>
+          <a:p>
+            <a:pPr marL="0" lvl="0" indent="0" algn="l" rtl="0">
+              <a:spcBef>
+                <a:spcPts val="0"/>
+              </a:spcBef>
+              <a:spcAft>
+                <a:spcPts val="0"/>
+              </a:spcAft>
+              <a:buClr>
+                <a:schemeClr val="dk1"/>
+              </a:buClr>
+              <a:buSzPts val="1100"/>
+              <a:buFont typeface="Arial"/>
+              <a:buNone/>
+            </a:pPr>
+            <a:r>
+              <a:rPr lang="en-US" sz="1300" dirty="0">
+                <a:latin typeface="Calibri"/>
+                <a:ea typeface="Calibri"/>
+                <a:cs typeface="Calibri"/>
+                <a:sym typeface="Calibri"/>
+              </a:rPr>
+              <a:t>The P-value is the probability that a chi-square statistic having one degree of freedom is more extreme than that value.</a:t>
+            </a:r>
           </a:p>
         </p:txBody>
       </p:sp>

--- a/statistics_06_x2_distribution.pptx
+++ b/statistics_06_x2_distribution.pptx
@@ -5,15 +5,16 @@
     <p:sldMasterId id="2147483659" r:id="rId1"/>
   </p:sldMasterIdLst>
   <p:notesMasterIdLst>
-    <p:notesMasterId r:id="rId8"/>
+    <p:notesMasterId r:id="rId9"/>
   </p:notesMasterIdLst>
   <p:sldIdLst>
     <p:sldId id="260" r:id="rId2"/>
     <p:sldId id="276" r:id="rId3"/>
-    <p:sldId id="261" r:id="rId4"/>
-    <p:sldId id="287" r:id="rId5"/>
+    <p:sldId id="287" r:id="rId4"/>
+    <p:sldId id="261" r:id="rId5"/>
     <p:sldId id="277" r:id="rId6"/>
-    <p:sldId id="286" r:id="rId7"/>
+    <p:sldId id="288" r:id="rId7"/>
+    <p:sldId id="286" r:id="rId8"/>
   </p:sldIdLst>
   <p:sldSz cx="12192000" cy="6858000"/>
   <p:notesSz cx="6858000" cy="9144000"/>
@@ -1888,7 +1889,7 @@
             </a:pPr>
             <a:fld id="{00000000-1234-1234-1234-123412341234}" type="slidenum">
               <a:rPr lang="en-US"/>
-              <a:t>3</a:t>
+              <a:t>4</a:t>
             </a:fld>
             <a:endParaRPr/>
           </a:p>
@@ -2048,6 +2049,161 @@
     <p:extLst>
       <p:ext uri="{BB962C8B-B14F-4D97-AF65-F5344CB8AC3E}">
         <p14:creationId xmlns:p14="http://schemas.microsoft.com/office/powerpoint/2010/main" val="1600175110"/>
+      </p:ext>
+    </p:extLst>
+  </p:cSld>
+  <p:clrMapOvr>
+    <a:masterClrMapping/>
+  </p:clrMapOvr>
+</p:notes>
+</file>
+
+<file path=ppt/notesSlides/notesSlide5.xml><?xml version="1.0" encoding="utf-8"?>
+<p:notes xmlns:a="http://schemas.openxmlformats.org/drawingml/2006/main" xmlns:r="http://schemas.openxmlformats.org/officeDocument/2006/relationships" xmlns:p="http://schemas.openxmlformats.org/presentationml/2006/main" showMasterSp="0" showMasterPhAnim="0">
+  <p:cSld>
+    <p:spTree>
+      <p:nvGrpSpPr>
+        <p:cNvPr id="1" name="Shape 116"/>
+        <p:cNvGrpSpPr/>
+        <p:nvPr/>
+      </p:nvGrpSpPr>
+      <p:grpSpPr>
+        <a:xfrm>
+          <a:off x="0" y="0"/>
+          <a:ext cx="0" cy="0"/>
+          <a:chOff x="0" y="0"/>
+          <a:chExt cx="0" cy="0"/>
+        </a:xfrm>
+      </p:grpSpPr>
+      <p:sp>
+        <p:nvSpPr>
+          <p:cNvPr id="117" name="Google Shape;117;g603061e44c_0_0:notes"/>
+          <p:cNvSpPr>
+            <a:spLocks noGrp="1" noRot="1" noChangeAspect="1"/>
+          </p:cNvSpPr>
+          <p:nvPr>
+            <p:ph type="sldImg" idx="2"/>
+          </p:nvPr>
+        </p:nvSpPr>
+        <p:spPr>
+          <a:xfrm>
+            <a:off x="685800" y="1143000"/>
+            <a:ext cx="5486400" cy="3086100"/>
+          </a:xfrm>
+          <a:custGeom>
+            <a:avLst/>
+            <a:gdLst/>
+            <a:ahLst/>
+            <a:cxnLst/>
+            <a:rect l="l" t="t" r="r" b="b"/>
+            <a:pathLst>
+              <a:path w="120000" h="120000" extrusionOk="0">
+                <a:moveTo>
+                  <a:pt x="0" y="0"/>
+                </a:moveTo>
+                <a:lnTo>
+                  <a:pt x="120000" y="0"/>
+                </a:lnTo>
+                <a:lnTo>
+                  <a:pt x="120000" y="120000"/>
+                </a:lnTo>
+                <a:lnTo>
+                  <a:pt x="0" y="120000"/>
+                </a:lnTo>
+                <a:close/>
+              </a:path>
+            </a:pathLst>
+          </a:custGeom>
+        </p:spPr>
+      </p:sp>
+      <p:sp>
+        <p:nvSpPr>
+          <p:cNvPr id="118" name="Google Shape;118;g603061e44c_0_0:notes"/>
+          <p:cNvSpPr txBox="1">
+            <a:spLocks noGrp="1"/>
+          </p:cNvSpPr>
+          <p:nvPr>
+            <p:ph type="body" idx="1"/>
+          </p:nvPr>
+        </p:nvSpPr>
+        <p:spPr>
+          <a:xfrm>
+            <a:off x="685800" y="4400550"/>
+            <a:ext cx="5486400" cy="3600600"/>
+          </a:xfrm>
+          <a:prstGeom prst="rect">
+            <a:avLst/>
+          </a:prstGeom>
+        </p:spPr>
+        <p:txBody>
+          <a:bodyPr spcFirstLastPara="1" wrap="square" lIns="91425" tIns="91425" rIns="91425" bIns="91425" anchor="t" anchorCtr="0">
+            <a:noAutofit/>
+          </a:bodyPr>
+          <a:lstStyle/>
+          <a:p>
+            <a:pPr marL="0" lvl="0" indent="0" algn="l" rtl="0">
+              <a:spcBef>
+                <a:spcPts val="0"/>
+              </a:spcBef>
+              <a:spcAft>
+                <a:spcPts val="0"/>
+              </a:spcAft>
+              <a:buNone/>
+            </a:pPr>
+            <a:endParaRPr/>
+          </a:p>
+        </p:txBody>
+      </p:sp>
+      <p:sp>
+        <p:nvSpPr>
+          <p:cNvPr id="119" name="Google Shape;119;g603061e44c_0_0:notes"/>
+          <p:cNvSpPr txBox="1">
+            <a:spLocks noGrp="1"/>
+          </p:cNvSpPr>
+          <p:nvPr>
+            <p:ph type="sldNum" idx="12"/>
+          </p:nvPr>
+        </p:nvSpPr>
+        <p:spPr>
+          <a:xfrm>
+            <a:off x="3884613" y="8685213"/>
+            <a:ext cx="2971800" cy="458700"/>
+          </a:xfrm>
+          <a:prstGeom prst="rect">
+            <a:avLst/>
+          </a:prstGeom>
+        </p:spPr>
+        <p:txBody>
+          <a:bodyPr spcFirstLastPara="1" wrap="square" lIns="91425" tIns="45700" rIns="91425" bIns="45700" anchor="b" anchorCtr="0">
+            <a:noAutofit/>
+          </a:bodyPr>
+          <a:lstStyle/>
+          <a:p>
+            <a:pPr marL="0" lvl="0" indent="0" algn="r" rtl="0">
+              <a:spcBef>
+                <a:spcPts val="0"/>
+              </a:spcBef>
+              <a:spcAft>
+                <a:spcPts val="0"/>
+              </a:spcAft>
+              <a:buClr>
+                <a:srgbClr val="000000"/>
+              </a:buClr>
+              <a:buFont typeface="Arial"/>
+              <a:buNone/>
+            </a:pPr>
+            <a:fld id="{00000000-1234-1234-1234-123412341234}" type="slidenum">
+              <a:rPr lang="en-US"/>
+              <a:t>6</a:t>
+            </a:fld>
+            <a:endParaRPr/>
+          </a:p>
+        </p:txBody>
+      </p:sp>
+    </p:spTree>
+    <p:extLst>
+      <p:ext uri="{BB962C8B-B14F-4D97-AF65-F5344CB8AC3E}">
+        <p14:creationId xmlns:p14="http://schemas.microsoft.com/office/powerpoint/2010/main" val="2109992940"/>
       </p:ext>
     </p:extLst>
   </p:cSld>
@@ -16844,7 +17000,7 @@
           <a:graphicData uri="http://schemas.openxmlformats.org/presentationml/2006/ole">
             <mc:AlternateContent xmlns:mc="http://schemas.openxmlformats.org/markup-compatibility/2006">
               <mc:Choice xmlns:v="urn:schemas-microsoft-com:vml" Requires="v">
-                <p:oleObj spid="_x0000_s5473" name="Equation" r:id="rId6" imgW="26517600" imgH="10363200" progId="Equation.3">
+                <p:oleObj spid="_x0000_s5483" name="Equation" r:id="rId6" imgW="26517600" imgH="10363200" progId="Equation.3">
                   <p:embed/>
                 </p:oleObj>
               </mc:Choice>
@@ -16884,7 +17040,6 @@
                       <a:ln>
                         <a:noFill/>
                       </a:ln>
-                      <a:extLst/>
                     </p:spPr>
                   </p:pic>
                 </p:oleObj>
@@ -17049,7 +17204,7 @@
           <a:graphicData uri="http://schemas.openxmlformats.org/presentationml/2006/ole">
             <mc:AlternateContent xmlns:mc="http://schemas.openxmlformats.org/markup-compatibility/2006">
               <mc:Choice xmlns:v="urn:schemas-microsoft-com:vml" Requires="v">
-                <p:oleObj spid="_x0000_s5474" name="Equation" r:id="rId8" imgW="14325600" imgH="8839200" progId="Equation.3">
+                <p:oleObj spid="_x0000_s5484" name="Equation" r:id="rId8" imgW="14325600" imgH="8839200" progId="Equation.3">
                   <p:embed/>
                 </p:oleObj>
               </mc:Choice>
@@ -17089,7 +17244,6 @@
                       <a:ln>
                         <a:noFill/>
                       </a:ln>
-                      <a:extLst/>
                     </p:spPr>
                   </p:pic>
                 </p:oleObj>
@@ -17275,1329 +17429,6 @@
   <p:cSld>
     <p:spTree>
       <p:nvGrpSpPr>
-        <p:cNvPr id="1" name="Shape 129"/>
-        <p:cNvGrpSpPr/>
-        <p:nvPr/>
-      </p:nvGrpSpPr>
-      <p:grpSpPr>
-        <a:xfrm>
-          <a:off x="0" y="0"/>
-          <a:ext cx="0" cy="0"/>
-          <a:chOff x="0" y="0"/>
-          <a:chExt cx="0" cy="0"/>
-        </a:xfrm>
-      </p:grpSpPr>
-      <p:sp>
-        <p:nvSpPr>
-          <p:cNvPr id="130" name="Google Shape;130;p18"/>
-          <p:cNvSpPr txBox="1"/>
-          <p:nvPr/>
-        </p:nvSpPr>
-        <p:spPr>
-          <a:xfrm>
-            <a:off x="76200" y="76200"/>
-            <a:ext cx="6059557" cy="6205330"/>
-          </a:xfrm>
-          <a:prstGeom prst="rect">
-            <a:avLst/>
-          </a:prstGeom>
-          <a:noFill/>
-          <a:ln>
-            <a:noFill/>
-          </a:ln>
-        </p:spPr>
-        <p:txBody>
-          <a:bodyPr spcFirstLastPara="1" wrap="square" lIns="91425" tIns="91425" rIns="91425" bIns="91425" anchor="t" anchorCtr="0">
-            <a:noAutofit/>
-          </a:bodyPr>
-          <a:lstStyle/>
-          <a:p>
-            <a:pPr lvl="0"/>
-            <a:r>
-              <a:rPr lang="en-US" sz="3000" b="1" dirty="0">
-                <a:latin typeface="Calibri"/>
-                <a:ea typeface="Calibri"/>
-                <a:cs typeface="Calibri"/>
-                <a:sym typeface="Calibri"/>
-              </a:rPr>
-              <a:t>Example of </a:t>
-            </a:r>
-            <a:r>
-              <a:rPr lang="en-US" sz="3000" b="1" i="1" dirty="0">
-                <a:solidFill>
-                  <a:srgbClr val="222222"/>
-                </a:solidFill>
-                <a:highlight>
-                  <a:srgbClr val="FFFFFF"/>
-                </a:highlight>
-                <a:latin typeface="Times New Roman"/>
-                <a:ea typeface="Times New Roman"/>
-                <a:cs typeface="Times New Roman"/>
-                <a:sym typeface="Times New Roman"/>
-              </a:rPr>
-              <a:t>χ</a:t>
-            </a:r>
-            <a:r>
-              <a:rPr lang="en-US" sz="3000" b="1" baseline="30000" dirty="0">
-                <a:solidFill>
-                  <a:srgbClr val="222222"/>
-                </a:solidFill>
-                <a:highlight>
-                  <a:srgbClr val="FFFFFF"/>
-                </a:highlight>
-                <a:latin typeface="Times New Roman"/>
-                <a:ea typeface="Times New Roman"/>
-                <a:cs typeface="Times New Roman"/>
-                <a:sym typeface="Times New Roman"/>
-              </a:rPr>
-              <a:t>2</a:t>
-            </a:r>
-            <a:r>
-              <a:rPr lang="en-US" sz="3000" b="1" dirty="0">
-                <a:latin typeface="Calibri"/>
-                <a:ea typeface="Calibri"/>
-                <a:cs typeface="Calibri"/>
-                <a:sym typeface="Calibri"/>
-              </a:rPr>
-              <a:t> test</a:t>
-            </a:r>
-            <a:r>
-              <a:rPr lang="en-US" sz="1800" dirty="0">
-                <a:latin typeface="Calibri"/>
-                <a:ea typeface="Calibri"/>
-                <a:cs typeface="Calibri"/>
-                <a:sym typeface="Calibri"/>
-              </a:rPr>
-              <a:t>   </a:t>
-            </a:r>
-            <a:br>
-              <a:rPr lang="en-US" sz="1800" dirty="0">
-                <a:latin typeface="Calibri"/>
-                <a:ea typeface="Calibri"/>
-                <a:cs typeface="Calibri"/>
-                <a:sym typeface="Calibri"/>
-              </a:rPr>
-            </a:br>
-            <a:r>
-              <a:rPr lang="en-US" sz="1300" dirty="0">
-                <a:latin typeface="Calibri"/>
-                <a:ea typeface="Calibri"/>
-                <a:cs typeface="Calibri"/>
-                <a:sym typeface="Calibri"/>
-              </a:rPr>
-              <a:t>( from </a:t>
-            </a:r>
-            <a:r>
-              <a:rPr lang="en-US" sz="1300" u="sng" dirty="0">
-                <a:solidFill>
-                  <a:schemeClr val="hlink"/>
-                </a:solidFill>
-                <a:hlinkClick r:id="rId3"/>
-              </a:rPr>
-              <a:t>https://stattrek.com/chi-square-test/goodness-of-fit.aspx</a:t>
-            </a:r>
-            <a:r>
-              <a:rPr lang="en-US" sz="1300" dirty="0">
-                <a:latin typeface="Calibri"/>
-                <a:ea typeface="Calibri"/>
-                <a:cs typeface="Calibri"/>
-                <a:sym typeface="Calibri"/>
-              </a:rPr>
-              <a:t> )</a:t>
-            </a:r>
-            <a:endParaRPr sz="1300" dirty="0">
-              <a:latin typeface="Calibri"/>
-              <a:ea typeface="Calibri"/>
-              <a:cs typeface="Calibri"/>
-              <a:sym typeface="Calibri"/>
-            </a:endParaRPr>
-          </a:p>
-          <a:p>
-            <a:pPr marL="0" lvl="0" indent="0" algn="l" rtl="0">
-              <a:spcBef>
-                <a:spcPts val="0"/>
-              </a:spcBef>
-              <a:spcAft>
-                <a:spcPts val="0"/>
-              </a:spcAft>
-              <a:buClr>
-                <a:schemeClr val="dk1"/>
-              </a:buClr>
-              <a:buSzPts val="1100"/>
-              <a:buFont typeface="Arial"/>
-              <a:buNone/>
-            </a:pPr>
-            <a:br>
-              <a:rPr lang="en-US" sz="1300" dirty="0">
-                <a:latin typeface="Calibri"/>
-                <a:ea typeface="Calibri"/>
-                <a:cs typeface="Calibri"/>
-                <a:sym typeface="Calibri"/>
-              </a:rPr>
-            </a:br>
-            <a:r>
-              <a:rPr lang="en-US" sz="1300" b="1" u="sng" dirty="0">
-                <a:latin typeface="Calibri"/>
-                <a:ea typeface="Calibri"/>
-                <a:cs typeface="Calibri"/>
-                <a:sym typeface="Calibri"/>
-              </a:rPr>
-              <a:t>Problem:</a:t>
-            </a:r>
-            <a:endParaRPr sz="1300" b="1" u="sng" dirty="0">
-              <a:latin typeface="Calibri"/>
-              <a:ea typeface="Calibri"/>
-              <a:cs typeface="Calibri"/>
-              <a:sym typeface="Calibri"/>
-            </a:endParaRPr>
-          </a:p>
-          <a:p>
-            <a:pPr marL="0" lvl="0" indent="0" algn="l" rtl="0">
-              <a:spcBef>
-                <a:spcPts val="0"/>
-              </a:spcBef>
-              <a:spcAft>
-                <a:spcPts val="0"/>
-              </a:spcAft>
-              <a:buNone/>
-            </a:pPr>
-            <a:r>
-              <a:rPr lang="en-US" sz="1300" dirty="0">
-                <a:latin typeface="Calibri"/>
-                <a:ea typeface="Calibri"/>
-                <a:cs typeface="Calibri"/>
-                <a:sym typeface="Calibri"/>
-              </a:rPr>
-              <a:t>We have 3 types of cards (T1,T2,T3) with theoretical frequency of (30%, 60%, 10%).</a:t>
-            </a:r>
-            <a:endParaRPr sz="1300" dirty="0">
-              <a:latin typeface="Calibri"/>
-              <a:ea typeface="Calibri"/>
-              <a:cs typeface="Calibri"/>
-              <a:sym typeface="Calibri"/>
-            </a:endParaRPr>
-          </a:p>
-          <a:p>
-            <a:pPr marL="0" lvl="0" indent="0" algn="l" rtl="0">
-              <a:spcBef>
-                <a:spcPts val="0"/>
-              </a:spcBef>
-              <a:spcAft>
-                <a:spcPts val="0"/>
-              </a:spcAft>
-              <a:buNone/>
-            </a:pPr>
-            <a:r>
-              <a:rPr lang="en-US" sz="1300" dirty="0">
-                <a:latin typeface="Calibri"/>
-                <a:ea typeface="Calibri"/>
-                <a:cs typeface="Calibri"/>
-                <a:sym typeface="Calibri"/>
-              </a:rPr>
-              <a:t>We have a random sample of 100 cards with counts (50, 45, 5).</a:t>
-            </a:r>
-            <a:endParaRPr sz="1300" dirty="0">
-              <a:latin typeface="Calibri"/>
-              <a:ea typeface="Calibri"/>
-              <a:cs typeface="Calibri"/>
-              <a:sym typeface="Calibri"/>
-            </a:endParaRPr>
-          </a:p>
-          <a:p>
-            <a:pPr marL="0" lvl="0" indent="0" algn="l" rtl="0">
-              <a:spcBef>
-                <a:spcPts val="0"/>
-              </a:spcBef>
-              <a:spcAft>
-                <a:spcPts val="0"/>
-              </a:spcAft>
-              <a:buClr>
-                <a:schemeClr val="dk1"/>
-              </a:buClr>
-              <a:buSzPts val="1100"/>
-              <a:buFont typeface="Arial"/>
-              <a:buNone/>
-            </a:pPr>
-            <a:r>
-              <a:rPr lang="en-US" sz="1300" dirty="0">
-                <a:latin typeface="Calibri"/>
-                <a:ea typeface="Calibri"/>
-                <a:cs typeface="Calibri"/>
-                <a:sym typeface="Calibri"/>
-              </a:rPr>
-              <a:t>Is this sample consistent with theory? Use a 0.05 level of significance.</a:t>
-            </a:r>
-            <a:endParaRPr sz="1300" dirty="0">
-              <a:latin typeface="Calibri"/>
-              <a:ea typeface="Calibri"/>
-              <a:cs typeface="Calibri"/>
-              <a:sym typeface="Calibri"/>
-            </a:endParaRPr>
-          </a:p>
-          <a:p>
-            <a:pPr marL="0" lvl="0" indent="0" algn="l" rtl="0">
-              <a:spcBef>
-                <a:spcPts val="0"/>
-              </a:spcBef>
-              <a:spcAft>
-                <a:spcPts val="0"/>
-              </a:spcAft>
-              <a:buClr>
-                <a:schemeClr val="dk1"/>
-              </a:buClr>
-              <a:buSzPts val="1100"/>
-              <a:buFont typeface="Arial"/>
-              <a:buNone/>
-            </a:pPr>
-            <a:endParaRPr sz="1300" dirty="0">
-              <a:latin typeface="Calibri"/>
-              <a:ea typeface="Calibri"/>
-              <a:cs typeface="Calibri"/>
-              <a:sym typeface="Calibri"/>
-            </a:endParaRPr>
-          </a:p>
-          <a:p>
-            <a:pPr marL="0" lvl="0" indent="0" algn="l" rtl="0">
-              <a:spcBef>
-                <a:spcPts val="0"/>
-              </a:spcBef>
-              <a:spcAft>
-                <a:spcPts val="0"/>
-              </a:spcAft>
-              <a:buClr>
-                <a:schemeClr val="dk1"/>
-              </a:buClr>
-              <a:buSzPts val="1100"/>
-              <a:buFont typeface="Arial"/>
-              <a:buNone/>
-            </a:pPr>
-            <a:r>
-              <a:rPr lang="en-US" sz="1300" b="1" u="sng" dirty="0">
-                <a:latin typeface="Calibri"/>
-                <a:ea typeface="Calibri"/>
-                <a:cs typeface="Calibri"/>
-                <a:sym typeface="Calibri"/>
-              </a:rPr>
-              <a:t>Solution:</a:t>
-            </a:r>
-            <a:endParaRPr sz="1300" b="1" u="sng" dirty="0">
-              <a:latin typeface="Calibri"/>
-              <a:ea typeface="Calibri"/>
-              <a:cs typeface="Calibri"/>
-              <a:sym typeface="Calibri"/>
-            </a:endParaRPr>
-          </a:p>
-          <a:p>
-            <a:pPr marL="0" lvl="0" indent="0" algn="l" rtl="0">
-              <a:spcBef>
-                <a:spcPts val="0"/>
-              </a:spcBef>
-              <a:spcAft>
-                <a:spcPts val="0"/>
-              </a:spcAft>
-              <a:buNone/>
-            </a:pPr>
-            <a:r>
-              <a:rPr lang="en-US" sz="1300" dirty="0">
-                <a:latin typeface="Calibri"/>
-                <a:ea typeface="Calibri"/>
-                <a:cs typeface="Calibri"/>
-                <a:sym typeface="Calibri"/>
-              </a:rPr>
-              <a:t>Null hypothesis: The proportions are </a:t>
-            </a:r>
-            <a:r>
-              <a:rPr lang="en-US" sz="1300" dirty="0">
-                <a:solidFill>
-                  <a:schemeClr val="dk1"/>
-                </a:solidFill>
-                <a:latin typeface="Calibri"/>
-                <a:ea typeface="Calibri"/>
-                <a:cs typeface="Calibri"/>
-                <a:sym typeface="Calibri"/>
-              </a:rPr>
-              <a:t>(30%, 60%, 10%)</a:t>
-            </a:r>
-            <a:endParaRPr sz="1300" dirty="0">
-              <a:solidFill>
-                <a:schemeClr val="dk1"/>
-              </a:solidFill>
-              <a:latin typeface="Calibri"/>
-              <a:ea typeface="Calibri"/>
-              <a:cs typeface="Calibri"/>
-              <a:sym typeface="Calibri"/>
-            </a:endParaRPr>
-          </a:p>
-          <a:p>
-            <a:pPr marL="0" lvl="0" indent="0" algn="l" rtl="0">
-              <a:spcBef>
-                <a:spcPts val="0"/>
-              </a:spcBef>
-              <a:spcAft>
-                <a:spcPts val="0"/>
-              </a:spcAft>
-              <a:buClr>
-                <a:schemeClr val="dk1"/>
-              </a:buClr>
-              <a:buSzPts val="1100"/>
-              <a:buFont typeface="Arial"/>
-              <a:buNone/>
-            </a:pPr>
-            <a:r>
-              <a:rPr lang="en-US" sz="1300" dirty="0">
-                <a:latin typeface="Calibri"/>
-                <a:ea typeface="Calibri"/>
-                <a:cs typeface="Calibri"/>
-                <a:sym typeface="Calibri"/>
-              </a:rPr>
-              <a:t>Alternative hypothesis: At least one of the proportions in the null hypothesis is false.</a:t>
-            </a:r>
-            <a:endParaRPr sz="1300" dirty="0">
-              <a:latin typeface="Calibri"/>
-              <a:ea typeface="Calibri"/>
-              <a:cs typeface="Calibri"/>
-              <a:sym typeface="Calibri"/>
-            </a:endParaRPr>
-          </a:p>
-          <a:p>
-            <a:pPr marL="0" lvl="0" indent="0" algn="l" rtl="0">
-              <a:spcBef>
-                <a:spcPts val="0"/>
-              </a:spcBef>
-              <a:spcAft>
-                <a:spcPts val="0"/>
-              </a:spcAft>
-              <a:buNone/>
-            </a:pPr>
-            <a:r>
-              <a:rPr lang="en-US" sz="1300" dirty="0">
-                <a:latin typeface="Calibri"/>
-                <a:ea typeface="Calibri"/>
-                <a:cs typeface="Calibri"/>
-                <a:sym typeface="Calibri"/>
-              </a:rPr>
-              <a:t>Degrees of Freedom DF = k-1 = 3-1 = 2</a:t>
-            </a:r>
-            <a:endParaRPr sz="1300" dirty="0">
-              <a:latin typeface="Calibri"/>
-              <a:ea typeface="Calibri"/>
-              <a:cs typeface="Calibri"/>
-              <a:sym typeface="Calibri"/>
-            </a:endParaRPr>
-          </a:p>
-          <a:p>
-            <a:pPr marL="0" lvl="0" indent="0" algn="l" rtl="0">
-              <a:spcBef>
-                <a:spcPts val="0"/>
-              </a:spcBef>
-              <a:spcAft>
-                <a:spcPts val="0"/>
-              </a:spcAft>
-              <a:buNone/>
-            </a:pPr>
-            <a:r>
-              <a:rPr lang="en-US" sz="1300" dirty="0">
-                <a:latin typeface="Calibri"/>
-                <a:ea typeface="Calibri"/>
-                <a:cs typeface="Calibri"/>
-                <a:sym typeface="Calibri"/>
-              </a:rPr>
-              <a:t>Expected values:</a:t>
-            </a:r>
-            <a:endParaRPr sz="1300" dirty="0">
-              <a:latin typeface="Calibri"/>
-              <a:ea typeface="Calibri"/>
-              <a:cs typeface="Calibri"/>
-              <a:sym typeface="Calibri"/>
-            </a:endParaRPr>
-          </a:p>
-          <a:p>
-            <a:pPr marL="0" lvl="0" indent="0" algn="l" rtl="0">
-              <a:spcBef>
-                <a:spcPts val="0"/>
-              </a:spcBef>
-              <a:spcAft>
-                <a:spcPts val="0"/>
-              </a:spcAft>
-              <a:buNone/>
-            </a:pPr>
-            <a:r>
-              <a:rPr lang="en-US" sz="1300" dirty="0">
-                <a:latin typeface="Calibri"/>
-                <a:ea typeface="Calibri"/>
-                <a:cs typeface="Calibri"/>
-                <a:sym typeface="Calibri"/>
-              </a:rPr>
-              <a:t>E</a:t>
-            </a:r>
-            <a:r>
-              <a:rPr lang="en-US" sz="1300" baseline="-25000" dirty="0">
-                <a:latin typeface="Calibri"/>
-                <a:ea typeface="Calibri"/>
-                <a:cs typeface="Calibri"/>
-                <a:sym typeface="Calibri"/>
-              </a:rPr>
-              <a:t>1</a:t>
-            </a:r>
-            <a:r>
-              <a:rPr lang="en-US" sz="1300" dirty="0">
-                <a:latin typeface="Calibri"/>
-                <a:ea typeface="Calibri"/>
-                <a:cs typeface="Calibri"/>
-                <a:sym typeface="Calibri"/>
-              </a:rPr>
-              <a:t> = 100*0.3 = 30, E</a:t>
-            </a:r>
-            <a:r>
-              <a:rPr lang="en-US" sz="1300" baseline="-25000" dirty="0">
-                <a:latin typeface="Calibri"/>
-                <a:ea typeface="Calibri"/>
-                <a:cs typeface="Calibri"/>
-                <a:sym typeface="Calibri"/>
-              </a:rPr>
-              <a:t>2</a:t>
-            </a:r>
-            <a:r>
-              <a:rPr lang="en-US" sz="1300" dirty="0">
-                <a:latin typeface="Calibri"/>
-                <a:ea typeface="Calibri"/>
-                <a:cs typeface="Calibri"/>
-                <a:sym typeface="Calibri"/>
-              </a:rPr>
-              <a:t> = 100*0.6 = 60, E</a:t>
-            </a:r>
-            <a:r>
-              <a:rPr lang="en-US" sz="1300" baseline="-25000" dirty="0">
-                <a:latin typeface="Calibri"/>
-                <a:ea typeface="Calibri"/>
-                <a:cs typeface="Calibri"/>
-                <a:sym typeface="Calibri"/>
-              </a:rPr>
-              <a:t>3</a:t>
-            </a:r>
-            <a:r>
-              <a:rPr lang="en-US" sz="1300" dirty="0">
-                <a:latin typeface="Calibri"/>
-                <a:ea typeface="Calibri"/>
-                <a:cs typeface="Calibri"/>
-                <a:sym typeface="Calibri"/>
-              </a:rPr>
-              <a:t> = </a:t>
-            </a:r>
-            <a:r>
-              <a:rPr lang="en-US" sz="1300" dirty="0">
-                <a:solidFill>
-                  <a:schemeClr val="dk1"/>
-                </a:solidFill>
-                <a:latin typeface="Calibri"/>
-                <a:ea typeface="Calibri"/>
-                <a:cs typeface="Calibri"/>
-                <a:sym typeface="Calibri"/>
-              </a:rPr>
-              <a:t>100 * 0.10 = 10</a:t>
-            </a:r>
-            <a:endParaRPr sz="1300" dirty="0">
-              <a:latin typeface="Calibri"/>
-              <a:ea typeface="Calibri"/>
-              <a:cs typeface="Calibri"/>
-              <a:sym typeface="Calibri"/>
-            </a:endParaRPr>
-          </a:p>
-          <a:p>
-            <a:pPr marL="0" lvl="0" indent="0" algn="l" rtl="0">
-              <a:spcBef>
-                <a:spcPts val="0"/>
-              </a:spcBef>
-              <a:spcAft>
-                <a:spcPts val="0"/>
-              </a:spcAft>
-              <a:buClr>
-                <a:schemeClr val="dk1"/>
-              </a:buClr>
-              <a:buSzPts val="1100"/>
-              <a:buFont typeface="Arial"/>
-              <a:buNone/>
-            </a:pPr>
-            <a:r>
-              <a:rPr lang="en-US" sz="1300" dirty="0">
-                <a:latin typeface="Calibri"/>
-                <a:ea typeface="Calibri"/>
-                <a:cs typeface="Calibri"/>
-                <a:sym typeface="Calibri"/>
-              </a:rPr>
-              <a:t>Χ</a:t>
-            </a:r>
-            <a:r>
-              <a:rPr lang="en-US" sz="1300" baseline="30000" dirty="0">
-                <a:latin typeface="Calibri"/>
-                <a:ea typeface="Calibri"/>
-                <a:cs typeface="Calibri"/>
-                <a:sym typeface="Calibri"/>
-              </a:rPr>
-              <a:t>2</a:t>
-            </a:r>
-            <a:r>
-              <a:rPr lang="en-US" sz="1300" dirty="0">
-                <a:latin typeface="Calibri"/>
-                <a:ea typeface="Calibri"/>
-                <a:cs typeface="Calibri"/>
-                <a:sym typeface="Calibri"/>
-              </a:rPr>
-              <a:t> = </a:t>
-            </a:r>
-            <a:r>
-              <a:rPr lang="en-US" sz="1300" dirty="0" err="1">
-                <a:latin typeface="Calibri"/>
-                <a:ea typeface="Calibri"/>
-                <a:cs typeface="Calibri"/>
-                <a:sym typeface="Calibri"/>
-              </a:rPr>
-              <a:t>Σ</a:t>
-            </a:r>
-            <a:r>
-              <a:rPr lang="en-US" sz="1300" dirty="0">
-                <a:latin typeface="Calibri"/>
-                <a:ea typeface="Calibri"/>
-                <a:cs typeface="Calibri"/>
-                <a:sym typeface="Calibri"/>
-              </a:rPr>
-              <a:t> [ (O</a:t>
-            </a:r>
-            <a:r>
-              <a:rPr lang="en-US" sz="1300" baseline="-25000" dirty="0">
-                <a:latin typeface="Calibri"/>
-                <a:ea typeface="Calibri"/>
-                <a:cs typeface="Calibri"/>
-                <a:sym typeface="Calibri"/>
-              </a:rPr>
-              <a:t>i</a:t>
-            </a:r>
-            <a:r>
-              <a:rPr lang="en-US" sz="1300" dirty="0">
-                <a:latin typeface="Calibri"/>
-                <a:ea typeface="Calibri"/>
-                <a:cs typeface="Calibri"/>
-                <a:sym typeface="Calibri"/>
-              </a:rPr>
-              <a:t> - </a:t>
-            </a:r>
-            <a:r>
-              <a:rPr lang="en-US" sz="1300" dirty="0" err="1">
-                <a:latin typeface="Calibri"/>
-                <a:ea typeface="Calibri"/>
-                <a:cs typeface="Calibri"/>
-                <a:sym typeface="Calibri"/>
-              </a:rPr>
-              <a:t>E</a:t>
-            </a:r>
-            <a:r>
-              <a:rPr lang="en-US" sz="1300" baseline="-25000" dirty="0" err="1">
-                <a:latin typeface="Calibri"/>
-                <a:ea typeface="Calibri"/>
-                <a:cs typeface="Calibri"/>
-                <a:sym typeface="Calibri"/>
-              </a:rPr>
-              <a:t>i</a:t>
-            </a:r>
-            <a:r>
-              <a:rPr lang="en-US" sz="1300" dirty="0">
-                <a:latin typeface="Calibri"/>
-                <a:ea typeface="Calibri"/>
-                <a:cs typeface="Calibri"/>
-                <a:sym typeface="Calibri"/>
-              </a:rPr>
-              <a:t>)</a:t>
-            </a:r>
-            <a:r>
-              <a:rPr lang="en-US" sz="1300" baseline="30000" dirty="0">
-                <a:latin typeface="Calibri"/>
-                <a:ea typeface="Calibri"/>
-                <a:cs typeface="Calibri"/>
-                <a:sym typeface="Calibri"/>
-              </a:rPr>
-              <a:t>2</a:t>
-            </a:r>
-            <a:r>
-              <a:rPr lang="en-US" sz="1300" dirty="0">
-                <a:latin typeface="Calibri"/>
-                <a:ea typeface="Calibri"/>
-                <a:cs typeface="Calibri"/>
-                <a:sym typeface="Calibri"/>
-              </a:rPr>
-              <a:t> / </a:t>
-            </a:r>
-            <a:r>
-              <a:rPr lang="en-US" sz="1300" dirty="0" err="1">
-                <a:latin typeface="Calibri"/>
-                <a:ea typeface="Calibri"/>
-                <a:cs typeface="Calibri"/>
-                <a:sym typeface="Calibri"/>
-              </a:rPr>
-              <a:t>E</a:t>
-            </a:r>
-            <a:r>
-              <a:rPr lang="en-US" sz="1300" baseline="-25000" dirty="0" err="1">
-                <a:latin typeface="Calibri"/>
-                <a:ea typeface="Calibri"/>
-                <a:cs typeface="Calibri"/>
-                <a:sym typeface="Calibri"/>
-              </a:rPr>
-              <a:t>i</a:t>
-            </a:r>
-            <a:r>
-              <a:rPr lang="en-US" sz="1300" dirty="0">
-                <a:latin typeface="Calibri"/>
-                <a:ea typeface="Calibri"/>
-                <a:cs typeface="Calibri"/>
-                <a:sym typeface="Calibri"/>
-              </a:rPr>
-              <a:t> ] =  [ (50 - 30)</a:t>
-            </a:r>
-            <a:r>
-              <a:rPr lang="en-US" sz="1300" baseline="30000" dirty="0">
-                <a:latin typeface="Calibri"/>
-                <a:ea typeface="Calibri"/>
-                <a:cs typeface="Calibri"/>
-                <a:sym typeface="Calibri"/>
-              </a:rPr>
-              <a:t>2</a:t>
-            </a:r>
-            <a:r>
-              <a:rPr lang="en-US" sz="1300" dirty="0">
-                <a:latin typeface="Calibri"/>
-                <a:ea typeface="Calibri"/>
-                <a:cs typeface="Calibri"/>
-                <a:sym typeface="Calibri"/>
-              </a:rPr>
-              <a:t> / 30 ] + [ (45 - 60)</a:t>
-            </a:r>
-            <a:r>
-              <a:rPr lang="en-US" sz="1300" baseline="30000" dirty="0">
-                <a:latin typeface="Calibri"/>
-                <a:ea typeface="Calibri"/>
-                <a:cs typeface="Calibri"/>
-                <a:sym typeface="Calibri"/>
-              </a:rPr>
-              <a:t>2</a:t>
-            </a:r>
-            <a:r>
-              <a:rPr lang="en-US" sz="1300" dirty="0">
-                <a:latin typeface="Calibri"/>
-                <a:ea typeface="Calibri"/>
-                <a:cs typeface="Calibri"/>
-                <a:sym typeface="Calibri"/>
-              </a:rPr>
-              <a:t> / 60 ] + [ (5 - 10)</a:t>
-            </a:r>
-            <a:r>
-              <a:rPr lang="en-US" sz="1300" baseline="30000" dirty="0">
-                <a:latin typeface="Calibri"/>
-                <a:ea typeface="Calibri"/>
-                <a:cs typeface="Calibri"/>
-                <a:sym typeface="Calibri"/>
-              </a:rPr>
-              <a:t>2</a:t>
-            </a:r>
-            <a:r>
-              <a:rPr lang="en-US" sz="1300" dirty="0">
-                <a:latin typeface="Calibri"/>
-                <a:ea typeface="Calibri"/>
-                <a:cs typeface="Calibri"/>
-                <a:sym typeface="Calibri"/>
-              </a:rPr>
-              <a:t> / 10 ] = 19.58</a:t>
-            </a:r>
-            <a:endParaRPr sz="1300" dirty="0">
-              <a:latin typeface="Calibri"/>
-              <a:ea typeface="Calibri"/>
-              <a:cs typeface="Calibri"/>
-              <a:sym typeface="Calibri"/>
-            </a:endParaRPr>
-          </a:p>
-          <a:p>
-            <a:pPr marL="0" lvl="0" indent="0" algn="l" rtl="0">
-              <a:spcBef>
-                <a:spcPts val="0"/>
-              </a:spcBef>
-              <a:spcAft>
-                <a:spcPts val="0"/>
-              </a:spcAft>
-              <a:buClr>
-                <a:schemeClr val="dk1"/>
-              </a:buClr>
-              <a:buSzPts val="1100"/>
-              <a:buFont typeface="Arial"/>
-              <a:buNone/>
-            </a:pPr>
-            <a:endParaRPr sz="1300" dirty="0">
-              <a:latin typeface="Calibri"/>
-              <a:ea typeface="Calibri"/>
-              <a:cs typeface="Calibri"/>
-              <a:sym typeface="Calibri"/>
-            </a:endParaRPr>
-          </a:p>
-          <a:p>
-            <a:pPr marL="0" lvl="0" indent="0" algn="l" rtl="0">
-              <a:spcBef>
-                <a:spcPts val="0"/>
-              </a:spcBef>
-              <a:spcAft>
-                <a:spcPts val="0"/>
-              </a:spcAft>
-              <a:buClr>
-                <a:schemeClr val="dk1"/>
-              </a:buClr>
-              <a:buSzPts val="1100"/>
-              <a:buFont typeface="Arial"/>
-              <a:buNone/>
-            </a:pPr>
-            <a:r>
-              <a:rPr lang="en-US" sz="1300" dirty="0">
-                <a:latin typeface="Calibri"/>
-                <a:ea typeface="Calibri"/>
-                <a:cs typeface="Calibri"/>
-                <a:sym typeface="Calibri"/>
-              </a:rPr>
-              <a:t>The P-value is the probability that a chi-square statistic having 2 degrees of freedom is more extreme than 19.58.</a:t>
-            </a:r>
-            <a:endParaRPr sz="1300" dirty="0">
-              <a:latin typeface="Calibri"/>
-              <a:ea typeface="Calibri"/>
-              <a:cs typeface="Calibri"/>
-              <a:sym typeface="Calibri"/>
-            </a:endParaRPr>
-          </a:p>
-          <a:p>
-            <a:pPr marL="0" lvl="0" indent="0" algn="l" rtl="0">
-              <a:spcBef>
-                <a:spcPts val="0"/>
-              </a:spcBef>
-              <a:spcAft>
-                <a:spcPts val="0"/>
-              </a:spcAft>
-              <a:buNone/>
-            </a:pPr>
-            <a:r>
-              <a:rPr lang="en-US" sz="1300" dirty="0">
-                <a:latin typeface="Calibri"/>
-                <a:ea typeface="Calibri"/>
-                <a:cs typeface="Calibri"/>
-                <a:sym typeface="Calibri"/>
-              </a:rPr>
-              <a:t>Using Chi-Square Distribution we find P(Χ2 &gt; 19.58) = 0.0001.</a:t>
-            </a:r>
-            <a:endParaRPr sz="1300" dirty="0">
-              <a:latin typeface="Calibri"/>
-              <a:ea typeface="Calibri"/>
-              <a:cs typeface="Calibri"/>
-              <a:sym typeface="Calibri"/>
-            </a:endParaRPr>
-          </a:p>
-          <a:p>
-            <a:pPr marL="0" lvl="0" indent="0" algn="l" rtl="0">
-              <a:spcBef>
-                <a:spcPts val="0"/>
-              </a:spcBef>
-              <a:spcAft>
-                <a:spcPts val="0"/>
-              </a:spcAft>
-              <a:buClr>
-                <a:schemeClr val="dk1"/>
-              </a:buClr>
-              <a:buSzPts val="1100"/>
-              <a:buFont typeface="Arial"/>
-              <a:buNone/>
-            </a:pPr>
-            <a:endParaRPr sz="1300" dirty="0">
-              <a:latin typeface="Calibri"/>
-              <a:ea typeface="Calibri"/>
-              <a:cs typeface="Calibri"/>
-              <a:sym typeface="Calibri"/>
-            </a:endParaRPr>
-          </a:p>
-          <a:p>
-            <a:pPr marL="0" lvl="0" indent="0" algn="l" rtl="0">
-              <a:spcBef>
-                <a:spcPts val="0"/>
-              </a:spcBef>
-              <a:spcAft>
-                <a:spcPts val="0"/>
-              </a:spcAft>
-              <a:buNone/>
-            </a:pPr>
-            <a:r>
-              <a:rPr lang="en-US" sz="1300" dirty="0">
-                <a:latin typeface="Calibri"/>
-                <a:ea typeface="Calibri"/>
-                <a:cs typeface="Calibri"/>
-                <a:sym typeface="Calibri"/>
-              </a:rPr>
-              <a:t>Since the P-value (0.0001) is less than the significance level (0.05), we reject the null hypothesis.</a:t>
-            </a:r>
-            <a:endParaRPr sz="1300" dirty="0">
-              <a:latin typeface="Calibri"/>
-              <a:ea typeface="Calibri"/>
-              <a:cs typeface="Calibri"/>
-              <a:sym typeface="Calibri"/>
-            </a:endParaRPr>
-          </a:p>
-          <a:p>
-            <a:pPr marL="0" lvl="0" indent="0" algn="l" rtl="0">
-              <a:spcBef>
-                <a:spcPts val="0"/>
-              </a:spcBef>
-              <a:spcAft>
-                <a:spcPts val="0"/>
-              </a:spcAft>
-              <a:buClr>
-                <a:schemeClr val="dk1"/>
-              </a:buClr>
-              <a:buSzPts val="1100"/>
-              <a:buFont typeface="Arial"/>
-              <a:buNone/>
-            </a:pPr>
-            <a:endParaRPr sz="1300" dirty="0">
-              <a:latin typeface="Calibri"/>
-              <a:ea typeface="Calibri"/>
-              <a:cs typeface="Calibri"/>
-              <a:sym typeface="Calibri"/>
-            </a:endParaRPr>
-          </a:p>
-          <a:p>
-            <a:pPr marL="0" lvl="0" indent="0" algn="l" rtl="0">
-              <a:spcBef>
-                <a:spcPts val="0"/>
-              </a:spcBef>
-              <a:spcAft>
-                <a:spcPts val="0"/>
-              </a:spcAft>
-              <a:buNone/>
-            </a:pPr>
-            <a:r>
-              <a:rPr lang="en-US" sz="1300" dirty="0">
-                <a:latin typeface="Calibri"/>
-                <a:ea typeface="Calibri"/>
-                <a:cs typeface="Calibri"/>
-                <a:sym typeface="Calibri"/>
-              </a:rPr>
-              <a:t>Note: If you use this approach on an exam, you may also want to mention why this approach is appropriate. </a:t>
-            </a:r>
-            <a:endParaRPr sz="1300" dirty="0">
-              <a:latin typeface="Calibri"/>
-              <a:ea typeface="Calibri"/>
-              <a:cs typeface="Calibri"/>
-              <a:sym typeface="Calibri"/>
-            </a:endParaRPr>
-          </a:p>
-          <a:p>
-            <a:pPr marL="0" lvl="0" indent="0" algn="l" rtl="0">
-              <a:spcBef>
-                <a:spcPts val="0"/>
-              </a:spcBef>
-              <a:spcAft>
-                <a:spcPts val="0"/>
-              </a:spcAft>
-              <a:buClr>
-                <a:schemeClr val="dk1"/>
-              </a:buClr>
-              <a:buSzPts val="1100"/>
-              <a:buFont typeface="Arial"/>
-              <a:buNone/>
-            </a:pPr>
-            <a:r>
-              <a:rPr lang="en-US" sz="1300" dirty="0">
-                <a:latin typeface="Calibri"/>
-                <a:ea typeface="Calibri"/>
-                <a:cs typeface="Calibri"/>
-                <a:sym typeface="Calibri"/>
-              </a:rPr>
-              <a:t>Specifically, the approach is appropriate because the sampling method was simple random sampling, the variable under study was categorical, and each level of the categorical variable had an expected frequency count of at least 5.</a:t>
-            </a:r>
-            <a:endParaRPr sz="1300" dirty="0">
-              <a:latin typeface="Calibri"/>
-              <a:ea typeface="Calibri"/>
-              <a:cs typeface="Calibri"/>
-              <a:sym typeface="Calibri"/>
-            </a:endParaRPr>
-          </a:p>
-        </p:txBody>
-      </p:sp>
-      <p:sp>
-        <p:nvSpPr>
-          <p:cNvPr id="3" name="Google Shape;130;p18">
-            <a:extLst>
-              <a:ext uri="{FF2B5EF4-FFF2-40B4-BE49-F238E27FC236}">
-                <a16:creationId xmlns:a16="http://schemas.microsoft.com/office/drawing/2014/main" id="{B91C97CA-E596-D14D-8D2B-679B5C2D3B30}"/>
-              </a:ext>
-            </a:extLst>
-          </p:cNvPr>
-          <p:cNvSpPr txBox="1"/>
-          <p:nvPr/>
-        </p:nvSpPr>
-        <p:spPr>
-          <a:xfrm>
-            <a:off x="6390861" y="76200"/>
-            <a:ext cx="5184913" cy="3303104"/>
-          </a:xfrm>
-          <a:prstGeom prst="rect">
-            <a:avLst/>
-          </a:prstGeom>
-          <a:noFill/>
-          <a:ln>
-            <a:noFill/>
-          </a:ln>
-        </p:spPr>
-        <p:txBody>
-          <a:bodyPr spcFirstLastPara="1" wrap="square" lIns="91425" tIns="91425" rIns="91425" bIns="91425" anchor="t" anchorCtr="0">
-            <a:noAutofit/>
-          </a:bodyPr>
-          <a:lstStyle/>
-          <a:p>
-            <a:pPr lvl="0"/>
-            <a:r>
-              <a:rPr lang="en-US" sz="3000" b="1" dirty="0">
-                <a:latin typeface="Calibri"/>
-                <a:ea typeface="Calibri"/>
-                <a:cs typeface="Calibri"/>
-                <a:sym typeface="Calibri"/>
-              </a:rPr>
-              <a:t>Example of </a:t>
-            </a:r>
-            <a:r>
-              <a:rPr lang="en-US" sz="3000" b="1" i="1" dirty="0">
-                <a:solidFill>
-                  <a:srgbClr val="222222"/>
-                </a:solidFill>
-                <a:highlight>
-                  <a:srgbClr val="FFFFFF"/>
-                </a:highlight>
-                <a:latin typeface="Times New Roman"/>
-                <a:ea typeface="Times New Roman"/>
-                <a:cs typeface="Times New Roman"/>
-                <a:sym typeface="Times New Roman"/>
-              </a:rPr>
-              <a:t>χ</a:t>
-            </a:r>
-            <a:r>
-              <a:rPr lang="en-US" sz="3000" b="1" baseline="30000" dirty="0">
-                <a:solidFill>
-                  <a:srgbClr val="222222"/>
-                </a:solidFill>
-                <a:highlight>
-                  <a:srgbClr val="FFFFFF"/>
-                </a:highlight>
-                <a:latin typeface="Times New Roman"/>
-                <a:ea typeface="Times New Roman"/>
-                <a:cs typeface="Times New Roman"/>
-                <a:sym typeface="Times New Roman"/>
-              </a:rPr>
-              <a:t>2</a:t>
-            </a:r>
-            <a:r>
-              <a:rPr lang="en-US" sz="3000" b="1" dirty="0">
-                <a:latin typeface="Calibri"/>
-                <a:ea typeface="Calibri"/>
-                <a:cs typeface="Calibri"/>
-                <a:sym typeface="Calibri"/>
-              </a:rPr>
-              <a:t> test – coin flip</a:t>
-            </a:r>
-            <a:r>
-              <a:rPr lang="en-US" sz="1800" dirty="0">
-                <a:latin typeface="Calibri"/>
-                <a:ea typeface="Calibri"/>
-                <a:cs typeface="Calibri"/>
-                <a:sym typeface="Calibri"/>
-              </a:rPr>
-              <a:t>   </a:t>
-            </a:r>
-            <a:br>
-              <a:rPr lang="en-US" sz="1800" dirty="0">
-                <a:latin typeface="Calibri"/>
-                <a:ea typeface="Calibri"/>
-                <a:cs typeface="Calibri"/>
-                <a:sym typeface="Calibri"/>
-              </a:rPr>
-            </a:br>
-            <a:br>
-              <a:rPr lang="en-US" sz="1300" dirty="0">
-                <a:latin typeface="Calibri"/>
-                <a:ea typeface="Calibri"/>
-                <a:cs typeface="Calibri"/>
-                <a:sym typeface="Calibri"/>
-              </a:rPr>
-            </a:br>
-            <a:r>
-              <a:rPr lang="en-US" sz="1300" b="1" u="sng" dirty="0">
-                <a:latin typeface="Calibri"/>
-                <a:ea typeface="Calibri"/>
-                <a:cs typeface="Calibri"/>
-                <a:sym typeface="Calibri"/>
-              </a:rPr>
-              <a:t>Problem:</a:t>
-            </a:r>
-            <a:endParaRPr sz="1300" b="1" u="sng" dirty="0">
-              <a:latin typeface="Calibri"/>
-              <a:ea typeface="Calibri"/>
-              <a:cs typeface="Calibri"/>
-              <a:sym typeface="Calibri"/>
-            </a:endParaRPr>
-          </a:p>
-          <a:p>
-            <a:pPr marL="0" lvl="0" indent="0" algn="l" rtl="0">
-              <a:spcBef>
-                <a:spcPts val="0"/>
-              </a:spcBef>
-              <a:spcAft>
-                <a:spcPts val="0"/>
-              </a:spcAft>
-              <a:buNone/>
-            </a:pPr>
-            <a:r>
-              <a:rPr lang="en-US" sz="1300" dirty="0">
-                <a:latin typeface="Calibri"/>
-                <a:ea typeface="Calibri"/>
-                <a:cs typeface="Calibri"/>
-                <a:sym typeface="Calibri"/>
-              </a:rPr>
-              <a:t>We want to test a null hypothesis that the coin is fair.</a:t>
-            </a:r>
-          </a:p>
-          <a:p>
-            <a:pPr marL="0" lvl="0" indent="0" algn="l" rtl="0">
-              <a:spcBef>
-                <a:spcPts val="0"/>
-              </a:spcBef>
-              <a:spcAft>
-                <a:spcPts val="0"/>
-              </a:spcAft>
-              <a:buNone/>
-            </a:pPr>
-            <a:r>
-              <a:rPr lang="en-US" sz="1300" dirty="0">
-                <a:latin typeface="Calibri"/>
-                <a:ea typeface="Calibri"/>
-                <a:cs typeface="Calibri"/>
-                <a:sym typeface="Calibri"/>
-              </a:rPr>
-              <a:t>We flip the coin N times and got H heads.</a:t>
-            </a:r>
-          </a:p>
-          <a:p>
-            <a:pPr marL="0" lvl="0" indent="0" algn="l" rtl="0">
-              <a:spcBef>
-                <a:spcPts val="0"/>
-              </a:spcBef>
-              <a:spcAft>
-                <a:spcPts val="0"/>
-              </a:spcAft>
-              <a:buNone/>
-            </a:pPr>
-            <a:r>
-              <a:rPr lang="en-US" sz="1300" dirty="0">
-                <a:latin typeface="Calibri"/>
-                <a:ea typeface="Calibri"/>
-                <a:cs typeface="Calibri"/>
-                <a:sym typeface="Calibri"/>
-              </a:rPr>
-              <a:t>So number of observed tails T = N-H.</a:t>
-            </a:r>
-          </a:p>
-          <a:p>
-            <a:pPr marL="0" lvl="0" indent="0" algn="l" rtl="0">
-              <a:spcBef>
-                <a:spcPts val="0"/>
-              </a:spcBef>
-              <a:spcAft>
-                <a:spcPts val="0"/>
-              </a:spcAft>
-              <a:buNone/>
-            </a:pPr>
-            <a:endParaRPr lang="en-US" sz="1300" dirty="0">
-              <a:latin typeface="Calibri"/>
-              <a:ea typeface="Calibri"/>
-              <a:cs typeface="Calibri"/>
-              <a:sym typeface="Calibri"/>
-            </a:endParaRPr>
-          </a:p>
-          <a:p>
-            <a:pPr marL="0" lvl="0" indent="0" algn="l" rtl="0">
-              <a:spcBef>
-                <a:spcPts val="0"/>
-              </a:spcBef>
-              <a:spcAft>
-                <a:spcPts val="0"/>
-              </a:spcAft>
-              <a:buNone/>
-            </a:pPr>
-            <a:r>
-              <a:rPr lang="en-US" sz="1300" dirty="0">
-                <a:latin typeface="Calibri"/>
-                <a:ea typeface="Calibri"/>
-                <a:cs typeface="Calibri"/>
-                <a:sym typeface="Calibri"/>
-              </a:rPr>
-              <a:t>Expected values are N/2 for heads and for tails.</a:t>
-            </a:r>
-          </a:p>
-          <a:p>
-            <a:pPr lvl="0"/>
-            <a:endParaRPr lang="en-US" sz="1300" dirty="0">
-              <a:latin typeface="Calibri"/>
-              <a:ea typeface="Calibri"/>
-              <a:cs typeface="Calibri"/>
-              <a:sym typeface="Calibri"/>
-            </a:endParaRPr>
-          </a:p>
-          <a:p>
-            <a:pPr lvl="0"/>
-            <a:r>
-              <a:rPr lang="en-US" sz="1300" dirty="0">
-                <a:latin typeface="Calibri"/>
-                <a:ea typeface="Calibri"/>
-                <a:cs typeface="Calibri"/>
-                <a:sym typeface="Calibri"/>
-              </a:rPr>
-              <a:t>X2 = sum( (observed – expected)</a:t>
-            </a:r>
-            <a:r>
-              <a:rPr lang="en-US" sz="1300" baseline="30000" dirty="0">
-                <a:latin typeface="Calibri"/>
-                <a:ea typeface="Calibri"/>
-                <a:cs typeface="Calibri"/>
-                <a:sym typeface="Calibri"/>
-              </a:rPr>
-              <a:t>2</a:t>
-            </a:r>
-            <a:r>
-              <a:rPr lang="en-US" sz="1300" dirty="0">
-                <a:latin typeface="Calibri"/>
-                <a:ea typeface="Calibri"/>
-                <a:cs typeface="Calibri"/>
-                <a:sym typeface="Calibri"/>
-              </a:rPr>
-              <a:t>/expected) = </a:t>
-            </a:r>
-          </a:p>
-          <a:p>
-            <a:pPr lvl="0"/>
-            <a:endParaRPr lang="en-US" sz="1300" dirty="0">
-              <a:latin typeface="Calibri"/>
-              <a:ea typeface="Calibri"/>
-              <a:cs typeface="Calibri"/>
-              <a:sym typeface="Calibri"/>
-            </a:endParaRPr>
-          </a:p>
-          <a:p>
-            <a:pPr lvl="0"/>
-            <a:r>
-              <a:rPr lang="en-US" sz="1300" dirty="0">
-                <a:latin typeface="Calibri"/>
-                <a:ea typeface="Calibri"/>
-                <a:cs typeface="Calibri"/>
-                <a:sym typeface="Calibri"/>
-              </a:rPr>
-              <a:t>=  [ (H– N/2)</a:t>
-            </a:r>
-            <a:r>
-              <a:rPr lang="en-US" sz="1300" baseline="30000" dirty="0">
-                <a:latin typeface="Calibri"/>
-                <a:ea typeface="Calibri"/>
-                <a:cs typeface="Calibri"/>
-                <a:sym typeface="Calibri"/>
-              </a:rPr>
-              <a:t>2</a:t>
-            </a:r>
-            <a:r>
-              <a:rPr lang="en-US" sz="1300" dirty="0">
-                <a:latin typeface="Calibri"/>
-                <a:ea typeface="Calibri"/>
-                <a:cs typeface="Calibri"/>
-                <a:sym typeface="Calibri"/>
-              </a:rPr>
-              <a:t> / (N/2) ] + [ (T – N/2)</a:t>
-            </a:r>
-            <a:r>
-              <a:rPr lang="en-US" sz="1300" baseline="30000" dirty="0">
-                <a:latin typeface="Calibri"/>
-                <a:ea typeface="Calibri"/>
-                <a:cs typeface="Calibri"/>
-                <a:sym typeface="Calibri"/>
-              </a:rPr>
-              <a:t>2</a:t>
-            </a:r>
-            <a:r>
-              <a:rPr lang="en-US" sz="1300" dirty="0">
-                <a:latin typeface="Calibri"/>
-                <a:ea typeface="Calibri"/>
-                <a:cs typeface="Calibri"/>
-                <a:sym typeface="Calibri"/>
-              </a:rPr>
-              <a:t> / (N/2) ] </a:t>
-            </a:r>
-          </a:p>
-          <a:p>
-            <a:pPr marL="0" lvl="0" indent="0" algn="l" rtl="0">
-              <a:spcBef>
-                <a:spcPts val="0"/>
-              </a:spcBef>
-              <a:spcAft>
-                <a:spcPts val="0"/>
-              </a:spcAft>
-              <a:buClr>
-                <a:schemeClr val="dk1"/>
-              </a:buClr>
-              <a:buSzPts val="1100"/>
-              <a:buFont typeface="Arial"/>
-              <a:buNone/>
-            </a:pPr>
-            <a:endParaRPr sz="1300" dirty="0">
-              <a:latin typeface="Calibri"/>
-              <a:ea typeface="Calibri"/>
-              <a:cs typeface="Calibri"/>
-              <a:sym typeface="Calibri"/>
-            </a:endParaRPr>
-          </a:p>
-          <a:p>
-            <a:pPr marL="0" lvl="0" indent="0" algn="l" rtl="0">
-              <a:spcBef>
-                <a:spcPts val="0"/>
-              </a:spcBef>
-              <a:spcAft>
-                <a:spcPts val="0"/>
-              </a:spcAft>
-              <a:buClr>
-                <a:schemeClr val="dk1"/>
-              </a:buClr>
-              <a:buSzPts val="1100"/>
-              <a:buFont typeface="Arial"/>
-              <a:buNone/>
-            </a:pPr>
-            <a:r>
-              <a:rPr lang="en-US" sz="1300" dirty="0">
-                <a:latin typeface="Calibri"/>
-                <a:ea typeface="Calibri"/>
-                <a:cs typeface="Calibri"/>
-                <a:sym typeface="Calibri"/>
-              </a:rPr>
-              <a:t>The P-value is the probability that a chi-square statistic having one degree of freedom is more extreme than that value.</a:t>
-            </a:r>
-          </a:p>
-        </p:txBody>
-      </p:sp>
-    </p:spTree>
-  </p:cSld>
-  <p:clrMapOvr>
-    <a:masterClrMapping/>
-  </p:clrMapOvr>
-</p:sld>
-</file>
-
-<file path=ppt/slides/slide4.xml><?xml version="1.0" encoding="utf-8"?>
-<p:sld xmlns:a="http://schemas.openxmlformats.org/drawingml/2006/main" xmlns:r="http://schemas.openxmlformats.org/officeDocument/2006/relationships" xmlns:p="http://schemas.openxmlformats.org/presentationml/2006/main">
-  <p:cSld>
-    <p:spTree>
-      <p:nvGrpSpPr>
         <p:cNvPr id="1" name=""/>
         <p:cNvGrpSpPr/>
         <p:nvPr/>
@@ -18625,7 +17456,7 @@
         <p:spPr>
           <a:xfrm>
             <a:off x="117905" y="2232210"/>
-            <a:ext cx="6457707" cy="4401205"/>
+            <a:ext cx="6457707" cy="4185761"/>
           </a:xfrm>
           <a:prstGeom prst="rect">
             <a:avLst/>
@@ -18673,50 +17504,94 @@
             <a:pPr fontAlgn="base"/>
             <a:r>
               <a:rPr lang="en-US" dirty="0"/>
-              <a:t>         P(K=k | </a:t>
-            </a:r>
-            <a:r>
-              <a:rPr lang="en-US" dirty="0" err="1"/>
+              <a:t>  </a:t>
+            </a:r>
+            <a:r>
+              <a:rPr lang="en-US" dirty="0">
+                <a:solidFill>
+                  <a:srgbClr val="0070C0"/>
+                </a:solidFill>
+              </a:rPr>
+              <a:t> P(K=k | </a:t>
+            </a:r>
+            <a:r>
+              <a:rPr lang="en-US" dirty="0" err="1">
+                <a:solidFill>
+                  <a:srgbClr val="0070C0"/>
+                </a:solidFill>
+              </a:rPr>
               <a:t>n,p</a:t>
             </a:r>
             <a:r>
-              <a:rPr lang="en-US" dirty="0"/>
-              <a:t>)=bin(</a:t>
-            </a:r>
-            <a:r>
-              <a:rPr lang="en-US" dirty="0" err="1"/>
+              <a:rPr lang="en-US" dirty="0">
+                <a:solidFill>
+                  <a:srgbClr val="0070C0"/>
+                </a:solidFill>
+              </a:rPr>
+              <a:t>) = bin(</a:t>
+            </a:r>
+            <a:r>
+              <a:rPr lang="en-US" dirty="0" err="1">
+                <a:solidFill>
+                  <a:srgbClr val="0070C0"/>
+                </a:solidFill>
+              </a:rPr>
               <a:t>n,k</a:t>
             </a:r>
             <a:r>
-              <a:rPr lang="en-US" dirty="0"/>
-              <a:t>)</a:t>
-            </a:r>
-            <a:r>
-              <a:rPr lang="en-US" dirty="0" err="1"/>
-              <a:t>p</a:t>
-            </a:r>
-            <a:r>
-              <a:rPr lang="en-US" baseline="30000" dirty="0" err="1"/>
+              <a:rPr lang="en-US" dirty="0">
+                <a:solidFill>
+                  <a:srgbClr val="0070C0"/>
+                </a:solidFill>
+              </a:rPr>
+              <a:t>)p</a:t>
+            </a:r>
+            <a:r>
+              <a:rPr lang="en-US" baseline="30000" dirty="0">
+                <a:solidFill>
+                  <a:srgbClr val="0070C0"/>
+                </a:solidFill>
+              </a:rPr>
               <a:t>k</a:t>
             </a:r>
             <a:r>
-              <a:rPr lang="en-US" dirty="0"/>
+              <a:rPr lang="en-US" dirty="0">
+                <a:solidFill>
+                  <a:srgbClr val="0070C0"/>
+                </a:solidFill>
+              </a:rPr>
               <a:t>(1−p)</a:t>
             </a:r>
             <a:r>
-              <a:rPr lang="en-US" baseline="30000" dirty="0"/>
+              <a:rPr lang="en-US" baseline="30000" dirty="0">
+                <a:solidFill>
+                  <a:srgbClr val="0070C0"/>
+                </a:solidFill>
+              </a:rPr>
               <a:t>n−k</a:t>
             </a:r>
             <a:r>
-              <a:rPr lang="en-US" dirty="0"/>
+              <a:rPr lang="en-US" dirty="0">
+                <a:solidFill>
+                  <a:srgbClr val="0070C0"/>
+                </a:solidFill>
+              </a:rPr>
               <a:t>  , where bin(</a:t>
             </a:r>
             <a:r>
-              <a:rPr lang="en-US" dirty="0" err="1"/>
+              <a:rPr lang="en-US" dirty="0" err="1">
+                <a:solidFill>
+                  <a:srgbClr val="0070C0"/>
+                </a:solidFill>
+              </a:rPr>
               <a:t>n,k</a:t>
             </a:r>
             <a:r>
-              <a:rPr lang="en-US" dirty="0"/>
+              <a:rPr lang="en-US" dirty="0">
+                <a:solidFill>
+                  <a:srgbClr val="0070C0"/>
+                </a:solidFill>
+              </a:rPr>
               <a:t>) is the binomial coefficient. </a:t>
             </a:r>
           </a:p>
@@ -18735,21 +17610,57 @@
             <a:pPr fontAlgn="base"/>
             <a:r>
               <a:rPr lang="en-US" dirty="0"/>
-              <a:t>The mean of the binomial distribution is nq </a:t>
+              <a:t>The mean of the binomial distribution is </a:t>
+            </a:r>
+            <a:r>
+              <a:rPr lang="en-US" b="1" dirty="0">
+                <a:solidFill>
+                  <a:srgbClr val="0070C0"/>
+                </a:solidFill>
+              </a:rPr>
+              <a:t>nq</a:t>
+            </a:r>
+            <a:r>
+              <a:rPr lang="en-US" dirty="0"/>
+              <a:t> </a:t>
             </a:r>
           </a:p>
           <a:p>
             <a:pPr fontAlgn="base"/>
             <a:r>
               <a:rPr lang="en-US" dirty="0"/>
-              <a:t>and standard deviation s = sqrt(np(1−p)). </a:t>
+              <a:t>and standard deviation </a:t>
+            </a:r>
+            <a:r>
+              <a:rPr lang="en-US" b="1" dirty="0">
+                <a:solidFill>
+                  <a:srgbClr val="0070C0"/>
+                </a:solidFill>
+              </a:rPr>
+              <a:t>s = sqrt(np(1−p))</a:t>
+            </a:r>
+            <a:r>
+              <a:rPr lang="en-US" dirty="0"/>
+              <a:t>. </a:t>
             </a:r>
           </a:p>
           <a:p>
             <a:pPr fontAlgn="base"/>
             <a:r>
               <a:rPr lang="en-US" dirty="0"/>
-              <a:t>So the z-score is z=(k−np)/s and it follows standard normal distribution. </a:t>
+              <a:t>So the z-score is </a:t>
+            </a:r>
+            <a:r>
+              <a:rPr lang="en-US" b="1" dirty="0">
+                <a:solidFill>
+                  <a:srgbClr val="0070C0"/>
+                </a:solidFill>
+              </a:rPr>
+              <a:t>z=(k−np)/s</a:t>
+            </a:r>
+            <a:r>
+              <a:rPr lang="en-US" dirty="0"/>
+              <a:t> and it follows standard normal distribution. </a:t>
             </a:r>
           </a:p>
           <a:p>
@@ -18760,7 +17671,7 @@
             <a:pPr fontAlgn="base"/>
             <a:r>
               <a:rPr lang="en-US" dirty="0"/>
-              <a:t>On the the hand, a squared normally distributed variable (or their sum) </a:t>
+              <a:t>On the other hand, a squared normally distributed variable (or their sum) </a:t>
             </a:r>
           </a:p>
           <a:p>
@@ -18798,14 +17709,7 @@
             </a:r>
             <a:r>
               <a:rPr lang="en-US" dirty="0"/>
-              <a:t>distributed </a:t>
-            </a:r>
-          </a:p>
-          <a:p>
-            <a:pPr fontAlgn="base"/>
-            <a:r>
-              <a:rPr lang="en-US" dirty="0"/>
-              <a:t>(with 1 degree of freedom). </a:t>
+              <a:t>distributed (with 1 degree of freedom). </a:t>
             </a:r>
           </a:p>
           <a:p>
@@ -18972,7 +17876,7 @@
         </p:blipFill>
         <p:spPr>
           <a:xfrm>
-            <a:off x="2963632" y="5806142"/>
+            <a:off x="3217724" y="5602822"/>
             <a:ext cx="2211603" cy="436277"/>
           </a:xfrm>
           <a:prstGeom prst="rect">
@@ -18994,7 +17898,7 @@
         </p:nvSpPr>
         <p:spPr>
           <a:xfrm>
-            <a:off x="7345583" y="5468731"/>
+            <a:off x="7504079" y="5261467"/>
             <a:ext cx="2413650" cy="1200329"/>
           </a:xfrm>
           <a:prstGeom prst="rect">
@@ -19059,7 +17963,7 @@
         </p:nvSpPr>
         <p:spPr>
           <a:xfrm rot="10800000">
-            <a:off x="5429328" y="5730862"/>
+            <a:off x="5587824" y="5523598"/>
             <a:ext cx="1867516" cy="665241"/>
           </a:xfrm>
           <a:prstGeom prst="rightArrow">
@@ -19127,12 +18031,1378 @@
           </a:prstGeom>
         </p:spPr>
       </p:pic>
+      <p:sp>
+        <p:nvSpPr>
+          <p:cNvPr id="2" name="TextBox 1">
+            <a:extLst>
+              <a:ext uri="{FF2B5EF4-FFF2-40B4-BE49-F238E27FC236}">
+                <a16:creationId xmlns:a16="http://schemas.microsoft.com/office/drawing/2014/main" id="{97F20C75-EA93-B340-A0A6-B71E1F218F42}"/>
+              </a:ext>
+            </a:extLst>
+          </p:cNvPr>
+          <p:cNvSpPr txBox="1"/>
+          <p:nvPr/>
+        </p:nvSpPr>
+        <p:spPr>
+          <a:xfrm>
+            <a:off x="9917728" y="3983055"/>
+            <a:ext cx="2018239" cy="523220"/>
+          </a:xfrm>
+          <a:prstGeom prst="rect">
+            <a:avLst/>
+          </a:prstGeom>
+          <a:noFill/>
+        </p:spPr>
+        <p:txBody>
+          <a:bodyPr wrap="square" rtlCol="0">
+            <a:spAutoFit/>
+          </a:bodyPr>
+          <a:lstStyle/>
+          <a:p>
+            <a:r>
+              <a:rPr lang="en-US" dirty="0"/>
+              <a:t>Chi-squared with 1 degree of freedom</a:t>
+            </a:r>
+          </a:p>
+        </p:txBody>
+      </p:sp>
     </p:spTree>
     <p:extLst>
       <p:ext uri="{BB962C8B-B14F-4D97-AF65-F5344CB8AC3E}">
         <p14:creationId xmlns:p14="http://schemas.microsoft.com/office/powerpoint/2010/main" val="884841344"/>
       </p:ext>
     </p:extLst>
+  </p:cSld>
+  <p:clrMapOvr>
+    <a:masterClrMapping/>
+  </p:clrMapOvr>
+</p:sld>
+</file>
+
+<file path=ppt/slides/slide4.xml><?xml version="1.0" encoding="utf-8"?>
+<p:sld xmlns:a="http://schemas.openxmlformats.org/drawingml/2006/main" xmlns:r="http://schemas.openxmlformats.org/officeDocument/2006/relationships" xmlns:p="http://schemas.openxmlformats.org/presentationml/2006/main">
+  <p:cSld>
+    <p:spTree>
+      <p:nvGrpSpPr>
+        <p:cNvPr id="1" name="Shape 129"/>
+        <p:cNvGrpSpPr/>
+        <p:nvPr/>
+      </p:nvGrpSpPr>
+      <p:grpSpPr>
+        <a:xfrm>
+          <a:off x="0" y="0"/>
+          <a:ext cx="0" cy="0"/>
+          <a:chOff x="0" y="0"/>
+          <a:chExt cx="0" cy="0"/>
+        </a:xfrm>
+      </p:grpSpPr>
+      <p:sp>
+        <p:nvSpPr>
+          <p:cNvPr id="130" name="Google Shape;130;p18"/>
+          <p:cNvSpPr txBox="1"/>
+          <p:nvPr/>
+        </p:nvSpPr>
+        <p:spPr>
+          <a:xfrm>
+            <a:off x="76200" y="76200"/>
+            <a:ext cx="6059557" cy="6205330"/>
+          </a:xfrm>
+          <a:prstGeom prst="rect">
+            <a:avLst/>
+          </a:prstGeom>
+          <a:noFill/>
+          <a:ln>
+            <a:noFill/>
+          </a:ln>
+        </p:spPr>
+        <p:txBody>
+          <a:bodyPr spcFirstLastPara="1" wrap="square" lIns="91425" tIns="91425" rIns="91425" bIns="91425" anchor="t" anchorCtr="0">
+            <a:noAutofit/>
+          </a:bodyPr>
+          <a:lstStyle/>
+          <a:p>
+            <a:pPr lvl="0"/>
+            <a:r>
+              <a:rPr lang="en-US" sz="3000" b="1" dirty="0">
+                <a:latin typeface="Calibri"/>
+                <a:ea typeface="Calibri"/>
+                <a:cs typeface="Calibri"/>
+                <a:sym typeface="Calibri"/>
+              </a:rPr>
+              <a:t>Example of </a:t>
+            </a:r>
+            <a:r>
+              <a:rPr lang="en-US" sz="3000" b="1" i="1" dirty="0">
+                <a:solidFill>
+                  <a:srgbClr val="222222"/>
+                </a:solidFill>
+                <a:highlight>
+                  <a:srgbClr val="FFFFFF"/>
+                </a:highlight>
+                <a:latin typeface="Times New Roman"/>
+                <a:ea typeface="Times New Roman"/>
+                <a:cs typeface="Times New Roman"/>
+                <a:sym typeface="Times New Roman"/>
+              </a:rPr>
+              <a:t>χ</a:t>
+            </a:r>
+            <a:r>
+              <a:rPr lang="en-US" sz="3000" b="1" baseline="30000" dirty="0">
+                <a:solidFill>
+                  <a:srgbClr val="222222"/>
+                </a:solidFill>
+                <a:highlight>
+                  <a:srgbClr val="FFFFFF"/>
+                </a:highlight>
+                <a:latin typeface="Times New Roman"/>
+                <a:ea typeface="Times New Roman"/>
+                <a:cs typeface="Times New Roman"/>
+                <a:sym typeface="Times New Roman"/>
+              </a:rPr>
+              <a:t>2</a:t>
+            </a:r>
+            <a:r>
+              <a:rPr lang="en-US" sz="3000" b="1" dirty="0">
+                <a:latin typeface="Calibri"/>
+                <a:ea typeface="Calibri"/>
+                <a:cs typeface="Calibri"/>
+                <a:sym typeface="Calibri"/>
+              </a:rPr>
+              <a:t> test</a:t>
+            </a:r>
+            <a:r>
+              <a:rPr lang="en-US" sz="1800" dirty="0">
+                <a:latin typeface="Calibri"/>
+                <a:ea typeface="Calibri"/>
+                <a:cs typeface="Calibri"/>
+                <a:sym typeface="Calibri"/>
+              </a:rPr>
+              <a:t> </a:t>
+            </a:r>
+            <a:r>
+              <a:rPr lang="en-US" sz="3000" b="1" dirty="0">
+                <a:latin typeface="Calibri"/>
+                <a:cs typeface="Calibri"/>
+                <a:sym typeface="Calibri"/>
+              </a:rPr>
+              <a:t> - goodness of fit</a:t>
+            </a:r>
+            <a:br>
+              <a:rPr lang="en-US" sz="1800" dirty="0">
+                <a:latin typeface="Calibri"/>
+                <a:ea typeface="Calibri"/>
+                <a:cs typeface="Calibri"/>
+                <a:sym typeface="Calibri"/>
+              </a:rPr>
+            </a:br>
+            <a:r>
+              <a:rPr lang="en-US" sz="1300" dirty="0">
+                <a:latin typeface="Calibri"/>
+                <a:ea typeface="Calibri"/>
+                <a:cs typeface="Calibri"/>
+                <a:sym typeface="Calibri"/>
+              </a:rPr>
+              <a:t>( from </a:t>
+            </a:r>
+            <a:r>
+              <a:rPr lang="en-US" sz="1300" u="sng" dirty="0">
+                <a:solidFill>
+                  <a:schemeClr val="hlink"/>
+                </a:solidFill>
+                <a:hlinkClick r:id="rId3"/>
+              </a:rPr>
+              <a:t>https://stattrek.com/chi-square-test/goodness-of-fit.aspx</a:t>
+            </a:r>
+            <a:r>
+              <a:rPr lang="en-US" sz="1300" dirty="0">
+                <a:latin typeface="Calibri"/>
+                <a:ea typeface="Calibri"/>
+                <a:cs typeface="Calibri"/>
+                <a:sym typeface="Calibri"/>
+              </a:rPr>
+              <a:t> )</a:t>
+            </a:r>
+            <a:endParaRPr sz="1300" dirty="0">
+              <a:latin typeface="Calibri"/>
+              <a:ea typeface="Calibri"/>
+              <a:cs typeface="Calibri"/>
+              <a:sym typeface="Calibri"/>
+            </a:endParaRPr>
+          </a:p>
+          <a:p>
+            <a:pPr marL="0" lvl="0" indent="0" algn="l" rtl="0">
+              <a:spcBef>
+                <a:spcPts val="0"/>
+              </a:spcBef>
+              <a:spcAft>
+                <a:spcPts val="0"/>
+              </a:spcAft>
+              <a:buClr>
+                <a:schemeClr val="dk1"/>
+              </a:buClr>
+              <a:buSzPts val="1100"/>
+              <a:buFont typeface="Arial"/>
+              <a:buNone/>
+            </a:pPr>
+            <a:br>
+              <a:rPr lang="en-US" sz="1300" dirty="0">
+                <a:latin typeface="Calibri"/>
+                <a:ea typeface="Calibri"/>
+                <a:cs typeface="Calibri"/>
+                <a:sym typeface="Calibri"/>
+              </a:rPr>
+            </a:br>
+            <a:r>
+              <a:rPr lang="en-US" sz="1300" b="1" u="sng" dirty="0">
+                <a:latin typeface="Calibri"/>
+                <a:ea typeface="Calibri"/>
+                <a:cs typeface="Calibri"/>
+                <a:sym typeface="Calibri"/>
+              </a:rPr>
+              <a:t>Problem:</a:t>
+            </a:r>
+            <a:endParaRPr sz="1300" b="1" u="sng" dirty="0">
+              <a:latin typeface="Calibri"/>
+              <a:ea typeface="Calibri"/>
+              <a:cs typeface="Calibri"/>
+              <a:sym typeface="Calibri"/>
+            </a:endParaRPr>
+          </a:p>
+          <a:p>
+            <a:pPr marL="0" lvl="0" indent="0" algn="l" rtl="0">
+              <a:spcBef>
+                <a:spcPts val="0"/>
+              </a:spcBef>
+              <a:spcAft>
+                <a:spcPts val="0"/>
+              </a:spcAft>
+              <a:buNone/>
+            </a:pPr>
+            <a:r>
+              <a:rPr lang="en-US" sz="1300" dirty="0">
+                <a:latin typeface="Calibri"/>
+                <a:ea typeface="Calibri"/>
+                <a:cs typeface="Calibri"/>
+                <a:sym typeface="Calibri"/>
+              </a:rPr>
+              <a:t>We have 3 types of cards (T1,T2,T3) with theoretical frequency of (30%, 60%, 10%).</a:t>
+            </a:r>
+            <a:endParaRPr sz="1300" dirty="0">
+              <a:latin typeface="Calibri"/>
+              <a:ea typeface="Calibri"/>
+              <a:cs typeface="Calibri"/>
+              <a:sym typeface="Calibri"/>
+            </a:endParaRPr>
+          </a:p>
+          <a:p>
+            <a:pPr marL="0" lvl="0" indent="0" algn="l" rtl="0">
+              <a:spcBef>
+                <a:spcPts val="0"/>
+              </a:spcBef>
+              <a:spcAft>
+                <a:spcPts val="0"/>
+              </a:spcAft>
+              <a:buNone/>
+            </a:pPr>
+            <a:r>
+              <a:rPr lang="en-US" sz="1300" dirty="0">
+                <a:latin typeface="Calibri"/>
+                <a:ea typeface="Calibri"/>
+                <a:cs typeface="Calibri"/>
+                <a:sym typeface="Calibri"/>
+              </a:rPr>
+              <a:t>We have a random sample of 100 cards with counts (50, 45, 5).</a:t>
+            </a:r>
+            <a:endParaRPr sz="1300" dirty="0">
+              <a:latin typeface="Calibri"/>
+              <a:ea typeface="Calibri"/>
+              <a:cs typeface="Calibri"/>
+              <a:sym typeface="Calibri"/>
+            </a:endParaRPr>
+          </a:p>
+          <a:p>
+            <a:pPr marL="0" lvl="0" indent="0" algn="l" rtl="0">
+              <a:spcBef>
+                <a:spcPts val="0"/>
+              </a:spcBef>
+              <a:spcAft>
+                <a:spcPts val="0"/>
+              </a:spcAft>
+              <a:buClr>
+                <a:schemeClr val="dk1"/>
+              </a:buClr>
+              <a:buSzPts val="1100"/>
+              <a:buFont typeface="Arial"/>
+              <a:buNone/>
+            </a:pPr>
+            <a:r>
+              <a:rPr lang="en-US" sz="1300" dirty="0">
+                <a:latin typeface="Calibri"/>
+                <a:ea typeface="Calibri"/>
+                <a:cs typeface="Calibri"/>
+                <a:sym typeface="Calibri"/>
+              </a:rPr>
+              <a:t>Is this sample consistent with theory? Use a 0.05 level of significance.</a:t>
+            </a:r>
+            <a:endParaRPr sz="1300" dirty="0">
+              <a:latin typeface="Calibri"/>
+              <a:ea typeface="Calibri"/>
+              <a:cs typeface="Calibri"/>
+              <a:sym typeface="Calibri"/>
+            </a:endParaRPr>
+          </a:p>
+          <a:p>
+            <a:pPr marL="0" lvl="0" indent="0" algn="l" rtl="0">
+              <a:spcBef>
+                <a:spcPts val="0"/>
+              </a:spcBef>
+              <a:spcAft>
+                <a:spcPts val="0"/>
+              </a:spcAft>
+              <a:buClr>
+                <a:schemeClr val="dk1"/>
+              </a:buClr>
+              <a:buSzPts val="1100"/>
+              <a:buFont typeface="Arial"/>
+              <a:buNone/>
+            </a:pPr>
+            <a:endParaRPr sz="1300" dirty="0">
+              <a:latin typeface="Calibri"/>
+              <a:ea typeface="Calibri"/>
+              <a:cs typeface="Calibri"/>
+              <a:sym typeface="Calibri"/>
+            </a:endParaRPr>
+          </a:p>
+          <a:p>
+            <a:pPr marL="0" lvl="0" indent="0" algn="l" rtl="0">
+              <a:spcBef>
+                <a:spcPts val="0"/>
+              </a:spcBef>
+              <a:spcAft>
+                <a:spcPts val="0"/>
+              </a:spcAft>
+              <a:buClr>
+                <a:schemeClr val="dk1"/>
+              </a:buClr>
+              <a:buSzPts val="1100"/>
+              <a:buFont typeface="Arial"/>
+              <a:buNone/>
+            </a:pPr>
+            <a:r>
+              <a:rPr lang="en-US" sz="1300" b="1" u="sng" dirty="0">
+                <a:latin typeface="Calibri"/>
+                <a:ea typeface="Calibri"/>
+                <a:cs typeface="Calibri"/>
+                <a:sym typeface="Calibri"/>
+              </a:rPr>
+              <a:t>Solution:</a:t>
+            </a:r>
+            <a:endParaRPr sz="1300" b="1" u="sng" dirty="0">
+              <a:latin typeface="Calibri"/>
+              <a:ea typeface="Calibri"/>
+              <a:cs typeface="Calibri"/>
+              <a:sym typeface="Calibri"/>
+            </a:endParaRPr>
+          </a:p>
+          <a:p>
+            <a:pPr marL="0" lvl="0" indent="0" algn="l" rtl="0">
+              <a:spcBef>
+                <a:spcPts val="0"/>
+              </a:spcBef>
+              <a:spcAft>
+                <a:spcPts val="0"/>
+              </a:spcAft>
+              <a:buNone/>
+            </a:pPr>
+            <a:r>
+              <a:rPr lang="en-US" sz="1300" dirty="0">
+                <a:latin typeface="Calibri"/>
+                <a:ea typeface="Calibri"/>
+                <a:cs typeface="Calibri"/>
+                <a:sym typeface="Calibri"/>
+              </a:rPr>
+              <a:t>Null hypothesis: The proportions are </a:t>
+            </a:r>
+            <a:r>
+              <a:rPr lang="en-US" sz="1300" dirty="0">
+                <a:solidFill>
+                  <a:schemeClr val="dk1"/>
+                </a:solidFill>
+                <a:latin typeface="Calibri"/>
+                <a:ea typeface="Calibri"/>
+                <a:cs typeface="Calibri"/>
+                <a:sym typeface="Calibri"/>
+              </a:rPr>
+              <a:t>(30%, 60%, 10%)</a:t>
+            </a:r>
+            <a:endParaRPr sz="1300" dirty="0">
+              <a:solidFill>
+                <a:schemeClr val="dk1"/>
+              </a:solidFill>
+              <a:latin typeface="Calibri"/>
+              <a:ea typeface="Calibri"/>
+              <a:cs typeface="Calibri"/>
+              <a:sym typeface="Calibri"/>
+            </a:endParaRPr>
+          </a:p>
+          <a:p>
+            <a:pPr marL="0" lvl="0" indent="0" algn="l" rtl="0">
+              <a:spcBef>
+                <a:spcPts val="0"/>
+              </a:spcBef>
+              <a:spcAft>
+                <a:spcPts val="0"/>
+              </a:spcAft>
+              <a:buClr>
+                <a:schemeClr val="dk1"/>
+              </a:buClr>
+              <a:buSzPts val="1100"/>
+              <a:buFont typeface="Arial"/>
+              <a:buNone/>
+            </a:pPr>
+            <a:r>
+              <a:rPr lang="en-US" sz="1300" dirty="0">
+                <a:latin typeface="Calibri"/>
+                <a:ea typeface="Calibri"/>
+                <a:cs typeface="Calibri"/>
+                <a:sym typeface="Calibri"/>
+              </a:rPr>
+              <a:t>Alternative hypothesis: At least one of the proportions in the null hypothesis is false.</a:t>
+            </a:r>
+            <a:endParaRPr sz="1300" dirty="0">
+              <a:latin typeface="Calibri"/>
+              <a:ea typeface="Calibri"/>
+              <a:cs typeface="Calibri"/>
+              <a:sym typeface="Calibri"/>
+            </a:endParaRPr>
+          </a:p>
+          <a:p>
+            <a:pPr marL="0" lvl="0" indent="0" algn="l" rtl="0">
+              <a:spcBef>
+                <a:spcPts val="0"/>
+              </a:spcBef>
+              <a:spcAft>
+                <a:spcPts val="0"/>
+              </a:spcAft>
+              <a:buNone/>
+            </a:pPr>
+            <a:r>
+              <a:rPr lang="en-US" sz="1300" dirty="0">
+                <a:latin typeface="Calibri"/>
+                <a:ea typeface="Calibri"/>
+                <a:cs typeface="Calibri"/>
+                <a:sym typeface="Calibri"/>
+              </a:rPr>
+              <a:t>Degrees of Freedom DF = k-1 = 3-1 = 2</a:t>
+            </a:r>
+            <a:endParaRPr sz="1300" dirty="0">
+              <a:latin typeface="Calibri"/>
+              <a:ea typeface="Calibri"/>
+              <a:cs typeface="Calibri"/>
+              <a:sym typeface="Calibri"/>
+            </a:endParaRPr>
+          </a:p>
+          <a:p>
+            <a:pPr marL="0" lvl="0" indent="0" algn="l" rtl="0">
+              <a:spcBef>
+                <a:spcPts val="0"/>
+              </a:spcBef>
+              <a:spcAft>
+                <a:spcPts val="0"/>
+              </a:spcAft>
+              <a:buNone/>
+            </a:pPr>
+            <a:r>
+              <a:rPr lang="en-US" sz="1300" dirty="0">
+                <a:latin typeface="Calibri"/>
+                <a:ea typeface="Calibri"/>
+                <a:cs typeface="Calibri"/>
+                <a:sym typeface="Calibri"/>
+              </a:rPr>
+              <a:t>Expected values:</a:t>
+            </a:r>
+            <a:endParaRPr sz="1300" dirty="0">
+              <a:latin typeface="Calibri"/>
+              <a:ea typeface="Calibri"/>
+              <a:cs typeface="Calibri"/>
+              <a:sym typeface="Calibri"/>
+            </a:endParaRPr>
+          </a:p>
+          <a:p>
+            <a:pPr marL="0" lvl="0" indent="0" algn="l" rtl="0">
+              <a:spcBef>
+                <a:spcPts val="0"/>
+              </a:spcBef>
+              <a:spcAft>
+                <a:spcPts val="0"/>
+              </a:spcAft>
+              <a:buNone/>
+            </a:pPr>
+            <a:r>
+              <a:rPr lang="en-US" sz="1300" dirty="0">
+                <a:latin typeface="Calibri"/>
+                <a:ea typeface="Calibri"/>
+                <a:cs typeface="Calibri"/>
+                <a:sym typeface="Calibri"/>
+              </a:rPr>
+              <a:t>E</a:t>
+            </a:r>
+            <a:r>
+              <a:rPr lang="en-US" sz="1300" baseline="-25000" dirty="0">
+                <a:latin typeface="Calibri"/>
+                <a:ea typeface="Calibri"/>
+                <a:cs typeface="Calibri"/>
+                <a:sym typeface="Calibri"/>
+              </a:rPr>
+              <a:t>1</a:t>
+            </a:r>
+            <a:r>
+              <a:rPr lang="en-US" sz="1300" dirty="0">
+                <a:latin typeface="Calibri"/>
+                <a:ea typeface="Calibri"/>
+                <a:cs typeface="Calibri"/>
+                <a:sym typeface="Calibri"/>
+              </a:rPr>
+              <a:t> = 100*0.3 = 30, E</a:t>
+            </a:r>
+            <a:r>
+              <a:rPr lang="en-US" sz="1300" baseline="-25000" dirty="0">
+                <a:latin typeface="Calibri"/>
+                <a:ea typeface="Calibri"/>
+                <a:cs typeface="Calibri"/>
+                <a:sym typeface="Calibri"/>
+              </a:rPr>
+              <a:t>2</a:t>
+            </a:r>
+            <a:r>
+              <a:rPr lang="en-US" sz="1300" dirty="0">
+                <a:latin typeface="Calibri"/>
+                <a:ea typeface="Calibri"/>
+                <a:cs typeface="Calibri"/>
+                <a:sym typeface="Calibri"/>
+              </a:rPr>
+              <a:t> = 100*0.6 = 60, E</a:t>
+            </a:r>
+            <a:r>
+              <a:rPr lang="en-US" sz="1300" baseline="-25000" dirty="0">
+                <a:latin typeface="Calibri"/>
+                <a:ea typeface="Calibri"/>
+                <a:cs typeface="Calibri"/>
+                <a:sym typeface="Calibri"/>
+              </a:rPr>
+              <a:t>3</a:t>
+            </a:r>
+            <a:r>
+              <a:rPr lang="en-US" sz="1300" dirty="0">
+                <a:latin typeface="Calibri"/>
+                <a:ea typeface="Calibri"/>
+                <a:cs typeface="Calibri"/>
+                <a:sym typeface="Calibri"/>
+              </a:rPr>
+              <a:t> = </a:t>
+            </a:r>
+            <a:r>
+              <a:rPr lang="en-US" sz="1300" dirty="0">
+                <a:solidFill>
+                  <a:schemeClr val="dk1"/>
+                </a:solidFill>
+                <a:latin typeface="Calibri"/>
+                <a:ea typeface="Calibri"/>
+                <a:cs typeface="Calibri"/>
+                <a:sym typeface="Calibri"/>
+              </a:rPr>
+              <a:t>100 * 0.10 = 10</a:t>
+            </a:r>
+            <a:endParaRPr sz="1300" dirty="0">
+              <a:latin typeface="Calibri"/>
+              <a:ea typeface="Calibri"/>
+              <a:cs typeface="Calibri"/>
+              <a:sym typeface="Calibri"/>
+            </a:endParaRPr>
+          </a:p>
+          <a:p>
+            <a:pPr marL="0" lvl="0" indent="0" algn="l" rtl="0">
+              <a:spcBef>
+                <a:spcPts val="0"/>
+              </a:spcBef>
+              <a:spcAft>
+                <a:spcPts val="0"/>
+              </a:spcAft>
+              <a:buClr>
+                <a:schemeClr val="dk1"/>
+              </a:buClr>
+              <a:buSzPts val="1100"/>
+              <a:buFont typeface="Arial"/>
+              <a:buNone/>
+            </a:pPr>
+            <a:r>
+              <a:rPr lang="en-US" sz="1300" dirty="0">
+                <a:latin typeface="Calibri"/>
+                <a:ea typeface="Calibri"/>
+                <a:cs typeface="Calibri"/>
+                <a:sym typeface="Calibri"/>
+              </a:rPr>
+              <a:t>Χ</a:t>
+            </a:r>
+            <a:r>
+              <a:rPr lang="en-US" sz="1300" baseline="30000" dirty="0">
+                <a:latin typeface="Calibri"/>
+                <a:ea typeface="Calibri"/>
+                <a:cs typeface="Calibri"/>
+                <a:sym typeface="Calibri"/>
+              </a:rPr>
+              <a:t>2</a:t>
+            </a:r>
+            <a:r>
+              <a:rPr lang="en-US" sz="1300" dirty="0">
+                <a:latin typeface="Calibri"/>
+                <a:ea typeface="Calibri"/>
+                <a:cs typeface="Calibri"/>
+                <a:sym typeface="Calibri"/>
+              </a:rPr>
+              <a:t> = </a:t>
+            </a:r>
+            <a:r>
+              <a:rPr lang="en-US" sz="1300" dirty="0" err="1">
+                <a:latin typeface="Calibri"/>
+                <a:ea typeface="Calibri"/>
+                <a:cs typeface="Calibri"/>
+                <a:sym typeface="Calibri"/>
+              </a:rPr>
+              <a:t>Σ</a:t>
+            </a:r>
+            <a:r>
+              <a:rPr lang="en-US" sz="1300" dirty="0">
+                <a:latin typeface="Calibri"/>
+                <a:ea typeface="Calibri"/>
+                <a:cs typeface="Calibri"/>
+                <a:sym typeface="Calibri"/>
+              </a:rPr>
+              <a:t> [ (O</a:t>
+            </a:r>
+            <a:r>
+              <a:rPr lang="en-US" sz="1300" baseline="-25000" dirty="0">
+                <a:latin typeface="Calibri"/>
+                <a:ea typeface="Calibri"/>
+                <a:cs typeface="Calibri"/>
+                <a:sym typeface="Calibri"/>
+              </a:rPr>
+              <a:t>i</a:t>
+            </a:r>
+            <a:r>
+              <a:rPr lang="en-US" sz="1300" dirty="0">
+                <a:latin typeface="Calibri"/>
+                <a:ea typeface="Calibri"/>
+                <a:cs typeface="Calibri"/>
+                <a:sym typeface="Calibri"/>
+              </a:rPr>
+              <a:t> - </a:t>
+            </a:r>
+            <a:r>
+              <a:rPr lang="en-US" sz="1300" dirty="0" err="1">
+                <a:latin typeface="Calibri"/>
+                <a:ea typeface="Calibri"/>
+                <a:cs typeface="Calibri"/>
+                <a:sym typeface="Calibri"/>
+              </a:rPr>
+              <a:t>E</a:t>
+            </a:r>
+            <a:r>
+              <a:rPr lang="en-US" sz="1300" baseline="-25000" dirty="0" err="1">
+                <a:latin typeface="Calibri"/>
+                <a:ea typeface="Calibri"/>
+                <a:cs typeface="Calibri"/>
+                <a:sym typeface="Calibri"/>
+              </a:rPr>
+              <a:t>i</a:t>
+            </a:r>
+            <a:r>
+              <a:rPr lang="en-US" sz="1300" dirty="0">
+                <a:latin typeface="Calibri"/>
+                <a:ea typeface="Calibri"/>
+                <a:cs typeface="Calibri"/>
+                <a:sym typeface="Calibri"/>
+              </a:rPr>
+              <a:t>)</a:t>
+            </a:r>
+            <a:r>
+              <a:rPr lang="en-US" sz="1300" baseline="30000" dirty="0">
+                <a:latin typeface="Calibri"/>
+                <a:ea typeface="Calibri"/>
+                <a:cs typeface="Calibri"/>
+                <a:sym typeface="Calibri"/>
+              </a:rPr>
+              <a:t>2</a:t>
+            </a:r>
+            <a:r>
+              <a:rPr lang="en-US" sz="1300" dirty="0">
+                <a:latin typeface="Calibri"/>
+                <a:ea typeface="Calibri"/>
+                <a:cs typeface="Calibri"/>
+                <a:sym typeface="Calibri"/>
+              </a:rPr>
+              <a:t> / </a:t>
+            </a:r>
+            <a:r>
+              <a:rPr lang="en-US" sz="1300" dirty="0" err="1">
+                <a:latin typeface="Calibri"/>
+                <a:ea typeface="Calibri"/>
+                <a:cs typeface="Calibri"/>
+                <a:sym typeface="Calibri"/>
+              </a:rPr>
+              <a:t>E</a:t>
+            </a:r>
+            <a:r>
+              <a:rPr lang="en-US" sz="1300" baseline="-25000" dirty="0" err="1">
+                <a:latin typeface="Calibri"/>
+                <a:ea typeface="Calibri"/>
+                <a:cs typeface="Calibri"/>
+                <a:sym typeface="Calibri"/>
+              </a:rPr>
+              <a:t>i</a:t>
+            </a:r>
+            <a:r>
+              <a:rPr lang="en-US" sz="1300" dirty="0">
+                <a:latin typeface="Calibri"/>
+                <a:ea typeface="Calibri"/>
+                <a:cs typeface="Calibri"/>
+                <a:sym typeface="Calibri"/>
+              </a:rPr>
+              <a:t> ] =  [ (50 - 30)</a:t>
+            </a:r>
+            <a:r>
+              <a:rPr lang="en-US" sz="1300" baseline="30000" dirty="0">
+                <a:latin typeface="Calibri"/>
+                <a:ea typeface="Calibri"/>
+                <a:cs typeface="Calibri"/>
+                <a:sym typeface="Calibri"/>
+              </a:rPr>
+              <a:t>2</a:t>
+            </a:r>
+            <a:r>
+              <a:rPr lang="en-US" sz="1300" dirty="0">
+                <a:latin typeface="Calibri"/>
+                <a:ea typeface="Calibri"/>
+                <a:cs typeface="Calibri"/>
+                <a:sym typeface="Calibri"/>
+              </a:rPr>
+              <a:t> / 30 ] + [ (45 - 60)</a:t>
+            </a:r>
+            <a:r>
+              <a:rPr lang="en-US" sz="1300" baseline="30000" dirty="0">
+                <a:latin typeface="Calibri"/>
+                <a:ea typeface="Calibri"/>
+                <a:cs typeface="Calibri"/>
+                <a:sym typeface="Calibri"/>
+              </a:rPr>
+              <a:t>2</a:t>
+            </a:r>
+            <a:r>
+              <a:rPr lang="en-US" sz="1300" dirty="0">
+                <a:latin typeface="Calibri"/>
+                <a:ea typeface="Calibri"/>
+                <a:cs typeface="Calibri"/>
+                <a:sym typeface="Calibri"/>
+              </a:rPr>
+              <a:t> / 60 ] + [ (5 - 10)</a:t>
+            </a:r>
+            <a:r>
+              <a:rPr lang="en-US" sz="1300" baseline="30000" dirty="0">
+                <a:latin typeface="Calibri"/>
+                <a:ea typeface="Calibri"/>
+                <a:cs typeface="Calibri"/>
+                <a:sym typeface="Calibri"/>
+              </a:rPr>
+              <a:t>2</a:t>
+            </a:r>
+            <a:r>
+              <a:rPr lang="en-US" sz="1300" dirty="0">
+                <a:latin typeface="Calibri"/>
+                <a:ea typeface="Calibri"/>
+                <a:cs typeface="Calibri"/>
+                <a:sym typeface="Calibri"/>
+              </a:rPr>
+              <a:t> / 10 ] = 19.58</a:t>
+            </a:r>
+            <a:endParaRPr sz="1300" dirty="0">
+              <a:latin typeface="Calibri"/>
+              <a:ea typeface="Calibri"/>
+              <a:cs typeface="Calibri"/>
+              <a:sym typeface="Calibri"/>
+            </a:endParaRPr>
+          </a:p>
+          <a:p>
+            <a:pPr marL="0" lvl="0" indent="0" algn="l" rtl="0">
+              <a:spcBef>
+                <a:spcPts val="0"/>
+              </a:spcBef>
+              <a:spcAft>
+                <a:spcPts val="0"/>
+              </a:spcAft>
+              <a:buClr>
+                <a:schemeClr val="dk1"/>
+              </a:buClr>
+              <a:buSzPts val="1100"/>
+              <a:buFont typeface="Arial"/>
+              <a:buNone/>
+            </a:pPr>
+            <a:endParaRPr sz="1300" dirty="0">
+              <a:latin typeface="Calibri"/>
+              <a:ea typeface="Calibri"/>
+              <a:cs typeface="Calibri"/>
+              <a:sym typeface="Calibri"/>
+            </a:endParaRPr>
+          </a:p>
+          <a:p>
+            <a:pPr marL="0" lvl="0" indent="0" algn="l" rtl="0">
+              <a:spcBef>
+                <a:spcPts val="0"/>
+              </a:spcBef>
+              <a:spcAft>
+                <a:spcPts val="0"/>
+              </a:spcAft>
+              <a:buClr>
+                <a:schemeClr val="dk1"/>
+              </a:buClr>
+              <a:buSzPts val="1100"/>
+              <a:buFont typeface="Arial"/>
+              <a:buNone/>
+            </a:pPr>
+            <a:r>
+              <a:rPr lang="en-US" sz="1300" dirty="0">
+                <a:latin typeface="Calibri"/>
+                <a:ea typeface="Calibri"/>
+                <a:cs typeface="Calibri"/>
+                <a:sym typeface="Calibri"/>
+              </a:rPr>
+              <a:t>The P-value is the probability that a chi-square statistic having 2 degrees of freedom is more extreme than 19.58.</a:t>
+            </a:r>
+            <a:endParaRPr sz="1300" dirty="0">
+              <a:latin typeface="Calibri"/>
+              <a:ea typeface="Calibri"/>
+              <a:cs typeface="Calibri"/>
+              <a:sym typeface="Calibri"/>
+            </a:endParaRPr>
+          </a:p>
+          <a:p>
+            <a:pPr marL="0" lvl="0" indent="0" algn="l" rtl="0">
+              <a:spcBef>
+                <a:spcPts val="0"/>
+              </a:spcBef>
+              <a:spcAft>
+                <a:spcPts val="0"/>
+              </a:spcAft>
+              <a:buNone/>
+            </a:pPr>
+            <a:r>
+              <a:rPr lang="en-US" sz="1300" dirty="0">
+                <a:latin typeface="Calibri"/>
+                <a:ea typeface="Calibri"/>
+                <a:cs typeface="Calibri"/>
+                <a:sym typeface="Calibri"/>
+              </a:rPr>
+              <a:t>Using Chi-Square Distribution we find P(Χ2 &gt; 19.58) = 0.0001.</a:t>
+            </a:r>
+            <a:endParaRPr sz="1300" dirty="0">
+              <a:latin typeface="Calibri"/>
+              <a:ea typeface="Calibri"/>
+              <a:cs typeface="Calibri"/>
+              <a:sym typeface="Calibri"/>
+            </a:endParaRPr>
+          </a:p>
+          <a:p>
+            <a:pPr marL="0" lvl="0" indent="0" algn="l" rtl="0">
+              <a:spcBef>
+                <a:spcPts val="0"/>
+              </a:spcBef>
+              <a:spcAft>
+                <a:spcPts val="0"/>
+              </a:spcAft>
+              <a:buClr>
+                <a:schemeClr val="dk1"/>
+              </a:buClr>
+              <a:buSzPts val="1100"/>
+              <a:buFont typeface="Arial"/>
+              <a:buNone/>
+            </a:pPr>
+            <a:endParaRPr sz="1300" dirty="0">
+              <a:latin typeface="Calibri"/>
+              <a:ea typeface="Calibri"/>
+              <a:cs typeface="Calibri"/>
+              <a:sym typeface="Calibri"/>
+            </a:endParaRPr>
+          </a:p>
+          <a:p>
+            <a:pPr marL="0" lvl="0" indent="0" algn="l" rtl="0">
+              <a:spcBef>
+                <a:spcPts val="0"/>
+              </a:spcBef>
+              <a:spcAft>
+                <a:spcPts val="0"/>
+              </a:spcAft>
+              <a:buNone/>
+            </a:pPr>
+            <a:r>
+              <a:rPr lang="en-US" sz="1300" dirty="0">
+                <a:latin typeface="Calibri"/>
+                <a:ea typeface="Calibri"/>
+                <a:cs typeface="Calibri"/>
+                <a:sym typeface="Calibri"/>
+              </a:rPr>
+              <a:t>Since the P-value (0.0001) is less than the significance level (0.05), we reject the null hypothesis.</a:t>
+            </a:r>
+            <a:endParaRPr sz="1300" dirty="0">
+              <a:latin typeface="Calibri"/>
+              <a:ea typeface="Calibri"/>
+              <a:cs typeface="Calibri"/>
+              <a:sym typeface="Calibri"/>
+            </a:endParaRPr>
+          </a:p>
+          <a:p>
+            <a:pPr marL="0" lvl="0" indent="0" algn="l" rtl="0">
+              <a:spcBef>
+                <a:spcPts val="0"/>
+              </a:spcBef>
+              <a:spcAft>
+                <a:spcPts val="0"/>
+              </a:spcAft>
+              <a:buClr>
+                <a:schemeClr val="dk1"/>
+              </a:buClr>
+              <a:buSzPts val="1100"/>
+              <a:buFont typeface="Arial"/>
+              <a:buNone/>
+            </a:pPr>
+            <a:endParaRPr sz="1300" dirty="0">
+              <a:latin typeface="Calibri"/>
+              <a:ea typeface="Calibri"/>
+              <a:cs typeface="Calibri"/>
+              <a:sym typeface="Calibri"/>
+            </a:endParaRPr>
+          </a:p>
+          <a:p>
+            <a:pPr marL="0" lvl="0" indent="0" algn="l" rtl="0">
+              <a:spcBef>
+                <a:spcPts val="0"/>
+              </a:spcBef>
+              <a:spcAft>
+                <a:spcPts val="0"/>
+              </a:spcAft>
+              <a:buNone/>
+            </a:pPr>
+            <a:r>
+              <a:rPr lang="en-US" sz="1300" dirty="0">
+                <a:latin typeface="Calibri"/>
+                <a:ea typeface="Calibri"/>
+                <a:cs typeface="Calibri"/>
+                <a:sym typeface="Calibri"/>
+              </a:rPr>
+              <a:t>Note: If you use this approach on an exam, you may also want to mention why this approach is appropriate. </a:t>
+            </a:r>
+            <a:endParaRPr sz="1300" dirty="0">
+              <a:latin typeface="Calibri"/>
+              <a:ea typeface="Calibri"/>
+              <a:cs typeface="Calibri"/>
+              <a:sym typeface="Calibri"/>
+            </a:endParaRPr>
+          </a:p>
+          <a:p>
+            <a:pPr marL="0" lvl="0" indent="0" algn="l" rtl="0">
+              <a:spcBef>
+                <a:spcPts val="0"/>
+              </a:spcBef>
+              <a:spcAft>
+                <a:spcPts val="0"/>
+              </a:spcAft>
+              <a:buClr>
+                <a:schemeClr val="dk1"/>
+              </a:buClr>
+              <a:buSzPts val="1100"/>
+              <a:buFont typeface="Arial"/>
+              <a:buNone/>
+            </a:pPr>
+            <a:r>
+              <a:rPr lang="en-US" sz="1300" dirty="0">
+                <a:latin typeface="Calibri"/>
+                <a:ea typeface="Calibri"/>
+                <a:cs typeface="Calibri"/>
+                <a:sym typeface="Calibri"/>
+              </a:rPr>
+              <a:t>Specifically, the approach is appropriate because the sampling method was simple random sampling, the variable under study was categorical, and each level of the categorical variable had an expected frequency count of at least 5.</a:t>
+            </a:r>
+            <a:endParaRPr sz="1300" dirty="0">
+              <a:latin typeface="Calibri"/>
+              <a:ea typeface="Calibri"/>
+              <a:cs typeface="Calibri"/>
+              <a:sym typeface="Calibri"/>
+            </a:endParaRPr>
+          </a:p>
+        </p:txBody>
+      </p:sp>
+      <p:sp>
+        <p:nvSpPr>
+          <p:cNvPr id="3" name="Google Shape;130;p18">
+            <a:extLst>
+              <a:ext uri="{FF2B5EF4-FFF2-40B4-BE49-F238E27FC236}">
+                <a16:creationId xmlns:a16="http://schemas.microsoft.com/office/drawing/2014/main" id="{B91C97CA-E596-D14D-8D2B-679B5C2D3B30}"/>
+              </a:ext>
+            </a:extLst>
+          </p:cNvPr>
+          <p:cNvSpPr txBox="1"/>
+          <p:nvPr/>
+        </p:nvSpPr>
+        <p:spPr>
+          <a:xfrm>
+            <a:off x="6390861" y="76200"/>
+            <a:ext cx="5184913" cy="3303104"/>
+          </a:xfrm>
+          <a:prstGeom prst="rect">
+            <a:avLst/>
+          </a:prstGeom>
+          <a:noFill/>
+          <a:ln>
+            <a:noFill/>
+          </a:ln>
+        </p:spPr>
+        <p:txBody>
+          <a:bodyPr spcFirstLastPara="1" wrap="square" lIns="91425" tIns="91425" rIns="91425" bIns="91425" anchor="t" anchorCtr="0">
+            <a:noAutofit/>
+          </a:bodyPr>
+          <a:lstStyle/>
+          <a:p>
+            <a:pPr lvl="0"/>
+            <a:r>
+              <a:rPr lang="en-US" sz="3000" b="1" dirty="0">
+                <a:latin typeface="Calibri"/>
+                <a:ea typeface="Calibri"/>
+                <a:cs typeface="Calibri"/>
+                <a:sym typeface="Calibri"/>
+              </a:rPr>
+              <a:t>Example of </a:t>
+            </a:r>
+            <a:r>
+              <a:rPr lang="en-US" sz="3000" b="1" i="1" dirty="0">
+                <a:solidFill>
+                  <a:srgbClr val="222222"/>
+                </a:solidFill>
+                <a:highlight>
+                  <a:srgbClr val="FFFFFF"/>
+                </a:highlight>
+                <a:latin typeface="Times New Roman"/>
+                <a:ea typeface="Times New Roman"/>
+                <a:cs typeface="Times New Roman"/>
+                <a:sym typeface="Times New Roman"/>
+              </a:rPr>
+              <a:t>χ</a:t>
+            </a:r>
+            <a:r>
+              <a:rPr lang="en-US" sz="3000" b="1" baseline="30000" dirty="0">
+                <a:solidFill>
+                  <a:srgbClr val="222222"/>
+                </a:solidFill>
+                <a:highlight>
+                  <a:srgbClr val="FFFFFF"/>
+                </a:highlight>
+                <a:latin typeface="Times New Roman"/>
+                <a:ea typeface="Times New Roman"/>
+                <a:cs typeface="Times New Roman"/>
+                <a:sym typeface="Times New Roman"/>
+              </a:rPr>
+              <a:t>2</a:t>
+            </a:r>
+            <a:r>
+              <a:rPr lang="en-US" sz="3000" b="1" dirty="0">
+                <a:latin typeface="Calibri"/>
+                <a:ea typeface="Calibri"/>
+                <a:cs typeface="Calibri"/>
+                <a:sym typeface="Calibri"/>
+              </a:rPr>
+              <a:t> test – coin flip</a:t>
+            </a:r>
+            <a:r>
+              <a:rPr lang="en-US" sz="1800" dirty="0">
+                <a:latin typeface="Calibri"/>
+                <a:ea typeface="Calibri"/>
+                <a:cs typeface="Calibri"/>
+                <a:sym typeface="Calibri"/>
+              </a:rPr>
+              <a:t>   </a:t>
+            </a:r>
+            <a:br>
+              <a:rPr lang="en-US" sz="1800" dirty="0">
+                <a:latin typeface="Calibri"/>
+                <a:ea typeface="Calibri"/>
+                <a:cs typeface="Calibri"/>
+                <a:sym typeface="Calibri"/>
+              </a:rPr>
+            </a:br>
+            <a:br>
+              <a:rPr lang="en-US" sz="1300" dirty="0">
+                <a:latin typeface="Calibri"/>
+                <a:ea typeface="Calibri"/>
+                <a:cs typeface="Calibri"/>
+                <a:sym typeface="Calibri"/>
+              </a:rPr>
+            </a:br>
+            <a:r>
+              <a:rPr lang="en-US" sz="1300" b="1" u="sng" dirty="0">
+                <a:latin typeface="Calibri"/>
+                <a:ea typeface="Calibri"/>
+                <a:cs typeface="Calibri"/>
+                <a:sym typeface="Calibri"/>
+              </a:rPr>
+              <a:t>Problem:</a:t>
+            </a:r>
+            <a:endParaRPr sz="1300" b="1" u="sng" dirty="0">
+              <a:latin typeface="Calibri"/>
+              <a:ea typeface="Calibri"/>
+              <a:cs typeface="Calibri"/>
+              <a:sym typeface="Calibri"/>
+            </a:endParaRPr>
+          </a:p>
+          <a:p>
+            <a:pPr marL="0" lvl="0" indent="0" algn="l" rtl="0">
+              <a:spcBef>
+                <a:spcPts val="0"/>
+              </a:spcBef>
+              <a:spcAft>
+                <a:spcPts val="0"/>
+              </a:spcAft>
+              <a:buNone/>
+            </a:pPr>
+            <a:r>
+              <a:rPr lang="en-US" sz="1300" dirty="0">
+                <a:latin typeface="Calibri"/>
+                <a:ea typeface="Calibri"/>
+                <a:cs typeface="Calibri"/>
+                <a:sym typeface="Calibri"/>
+              </a:rPr>
+              <a:t>We want to test a null hypothesis that the coin is fair.</a:t>
+            </a:r>
+          </a:p>
+          <a:p>
+            <a:pPr marL="0" lvl="0" indent="0" algn="l" rtl="0">
+              <a:spcBef>
+                <a:spcPts val="0"/>
+              </a:spcBef>
+              <a:spcAft>
+                <a:spcPts val="0"/>
+              </a:spcAft>
+              <a:buNone/>
+            </a:pPr>
+            <a:r>
+              <a:rPr lang="en-US" sz="1300" dirty="0">
+                <a:latin typeface="Calibri"/>
+                <a:ea typeface="Calibri"/>
+                <a:cs typeface="Calibri"/>
+                <a:sym typeface="Calibri"/>
+              </a:rPr>
+              <a:t>We flip the coin N times and got H heads.</a:t>
+            </a:r>
+          </a:p>
+          <a:p>
+            <a:pPr marL="0" lvl="0" indent="0" algn="l" rtl="0">
+              <a:spcBef>
+                <a:spcPts val="0"/>
+              </a:spcBef>
+              <a:spcAft>
+                <a:spcPts val="0"/>
+              </a:spcAft>
+              <a:buNone/>
+            </a:pPr>
+            <a:r>
+              <a:rPr lang="en-US" sz="1300" dirty="0">
+                <a:latin typeface="Calibri"/>
+                <a:ea typeface="Calibri"/>
+                <a:cs typeface="Calibri"/>
+                <a:sym typeface="Calibri"/>
+              </a:rPr>
+              <a:t>So number of observed tails T = N-H.</a:t>
+            </a:r>
+          </a:p>
+          <a:p>
+            <a:pPr marL="0" lvl="0" indent="0" algn="l" rtl="0">
+              <a:spcBef>
+                <a:spcPts val="0"/>
+              </a:spcBef>
+              <a:spcAft>
+                <a:spcPts val="0"/>
+              </a:spcAft>
+              <a:buNone/>
+            </a:pPr>
+            <a:endParaRPr lang="en-US" sz="1300" dirty="0">
+              <a:latin typeface="Calibri"/>
+              <a:ea typeface="Calibri"/>
+              <a:cs typeface="Calibri"/>
+              <a:sym typeface="Calibri"/>
+            </a:endParaRPr>
+          </a:p>
+          <a:p>
+            <a:pPr marL="0" lvl="0" indent="0" algn="l" rtl="0">
+              <a:spcBef>
+                <a:spcPts val="0"/>
+              </a:spcBef>
+              <a:spcAft>
+                <a:spcPts val="0"/>
+              </a:spcAft>
+              <a:buNone/>
+            </a:pPr>
+            <a:r>
+              <a:rPr lang="en-US" sz="1300" dirty="0">
+                <a:latin typeface="Calibri"/>
+                <a:ea typeface="Calibri"/>
+                <a:cs typeface="Calibri"/>
+                <a:sym typeface="Calibri"/>
+              </a:rPr>
+              <a:t>Expected values are N/2 for heads and for tails.</a:t>
+            </a:r>
+          </a:p>
+          <a:p>
+            <a:pPr lvl="0"/>
+            <a:endParaRPr lang="en-US" sz="1300" dirty="0">
+              <a:latin typeface="Calibri"/>
+              <a:ea typeface="Calibri"/>
+              <a:cs typeface="Calibri"/>
+              <a:sym typeface="Calibri"/>
+            </a:endParaRPr>
+          </a:p>
+          <a:p>
+            <a:pPr lvl="0"/>
+            <a:r>
+              <a:rPr lang="en-US" sz="1300" dirty="0">
+                <a:latin typeface="Calibri"/>
+                <a:ea typeface="Calibri"/>
+                <a:cs typeface="Calibri"/>
+                <a:sym typeface="Calibri"/>
+              </a:rPr>
+              <a:t>X2 = sum( (observed – expected)</a:t>
+            </a:r>
+            <a:r>
+              <a:rPr lang="en-US" sz="1300" baseline="30000" dirty="0">
+                <a:latin typeface="Calibri"/>
+                <a:ea typeface="Calibri"/>
+                <a:cs typeface="Calibri"/>
+                <a:sym typeface="Calibri"/>
+              </a:rPr>
+              <a:t>2</a:t>
+            </a:r>
+            <a:r>
+              <a:rPr lang="en-US" sz="1300" dirty="0">
+                <a:latin typeface="Calibri"/>
+                <a:ea typeface="Calibri"/>
+                <a:cs typeface="Calibri"/>
+                <a:sym typeface="Calibri"/>
+              </a:rPr>
+              <a:t>/expected) = </a:t>
+            </a:r>
+          </a:p>
+          <a:p>
+            <a:pPr lvl="0"/>
+            <a:endParaRPr lang="en-US" sz="1300" dirty="0">
+              <a:latin typeface="Calibri"/>
+              <a:ea typeface="Calibri"/>
+              <a:cs typeface="Calibri"/>
+              <a:sym typeface="Calibri"/>
+            </a:endParaRPr>
+          </a:p>
+          <a:p>
+            <a:pPr lvl="0"/>
+            <a:r>
+              <a:rPr lang="en-US" sz="1300" dirty="0">
+                <a:latin typeface="Calibri"/>
+                <a:ea typeface="Calibri"/>
+                <a:cs typeface="Calibri"/>
+                <a:sym typeface="Calibri"/>
+              </a:rPr>
+              <a:t>=  [ (H– N/2)</a:t>
+            </a:r>
+            <a:r>
+              <a:rPr lang="en-US" sz="1300" baseline="30000" dirty="0">
+                <a:latin typeface="Calibri"/>
+                <a:ea typeface="Calibri"/>
+                <a:cs typeface="Calibri"/>
+                <a:sym typeface="Calibri"/>
+              </a:rPr>
+              <a:t>2</a:t>
+            </a:r>
+            <a:r>
+              <a:rPr lang="en-US" sz="1300" dirty="0">
+                <a:latin typeface="Calibri"/>
+                <a:ea typeface="Calibri"/>
+                <a:cs typeface="Calibri"/>
+                <a:sym typeface="Calibri"/>
+              </a:rPr>
+              <a:t> / (N/2) ] + [ (T – N/2)</a:t>
+            </a:r>
+            <a:r>
+              <a:rPr lang="en-US" sz="1300" baseline="30000" dirty="0">
+                <a:latin typeface="Calibri"/>
+                <a:ea typeface="Calibri"/>
+                <a:cs typeface="Calibri"/>
+                <a:sym typeface="Calibri"/>
+              </a:rPr>
+              <a:t>2</a:t>
+            </a:r>
+            <a:r>
+              <a:rPr lang="en-US" sz="1300" dirty="0">
+                <a:latin typeface="Calibri"/>
+                <a:ea typeface="Calibri"/>
+                <a:cs typeface="Calibri"/>
+                <a:sym typeface="Calibri"/>
+              </a:rPr>
+              <a:t> / (N/2) ] </a:t>
+            </a:r>
+          </a:p>
+          <a:p>
+            <a:pPr marL="0" lvl="0" indent="0" algn="l" rtl="0">
+              <a:spcBef>
+                <a:spcPts val="0"/>
+              </a:spcBef>
+              <a:spcAft>
+                <a:spcPts val="0"/>
+              </a:spcAft>
+              <a:buClr>
+                <a:schemeClr val="dk1"/>
+              </a:buClr>
+              <a:buSzPts val="1100"/>
+              <a:buFont typeface="Arial"/>
+              <a:buNone/>
+            </a:pPr>
+            <a:endParaRPr sz="1300" dirty="0">
+              <a:latin typeface="Calibri"/>
+              <a:ea typeface="Calibri"/>
+              <a:cs typeface="Calibri"/>
+              <a:sym typeface="Calibri"/>
+            </a:endParaRPr>
+          </a:p>
+          <a:p>
+            <a:pPr marL="0" lvl="0" indent="0" algn="l" rtl="0">
+              <a:spcBef>
+                <a:spcPts val="0"/>
+              </a:spcBef>
+              <a:spcAft>
+                <a:spcPts val="0"/>
+              </a:spcAft>
+              <a:buClr>
+                <a:schemeClr val="dk1"/>
+              </a:buClr>
+              <a:buSzPts val="1100"/>
+              <a:buFont typeface="Arial"/>
+              <a:buNone/>
+            </a:pPr>
+            <a:r>
+              <a:rPr lang="en-US" sz="1300" dirty="0">
+                <a:latin typeface="Calibri"/>
+                <a:ea typeface="Calibri"/>
+                <a:cs typeface="Calibri"/>
+                <a:sym typeface="Calibri"/>
+              </a:rPr>
+              <a:t>The P-value is the probability that a chi-square statistic having one degree of freedom is more extreme than that value.</a:t>
+            </a:r>
+          </a:p>
+        </p:txBody>
+      </p:sp>
+    </p:spTree>
   </p:cSld>
   <p:clrMapOvr>
     <a:masterClrMapping/>
@@ -19166,7 +19436,7 @@
         <p:spPr>
           <a:xfrm>
             <a:off x="104925" y="105600"/>
-            <a:ext cx="6332451" cy="4649280"/>
+            <a:ext cx="6332451" cy="4941888"/>
           </a:xfrm>
           <a:prstGeom prst="rect">
             <a:avLst/>
@@ -19256,6 +19526,23 @@
               </a:rPr>
               <a:t>(two-way tables, association)</a:t>
             </a:r>
+          </a:p>
+          <a:p>
+            <a:pPr marL="0" lvl="0" indent="0" algn="l" rtl="0">
+              <a:spcBef>
+                <a:spcPts val="0"/>
+              </a:spcBef>
+              <a:spcAft>
+                <a:spcPts val="0"/>
+              </a:spcAft>
+              <a:buNone/>
+            </a:pPr>
+            <a:endParaRPr lang="en-US" b="1" dirty="0">
+              <a:latin typeface="Calibri"/>
+              <a:ea typeface="Calibri"/>
+              <a:cs typeface="Calibri"/>
+              <a:sym typeface="Calibri"/>
+            </a:endParaRPr>
           </a:p>
           <a:p>
             <a:pPr marL="0" lvl="0" indent="0" algn="l" rtl="0">
@@ -19858,6 +20145,809 @@
 </file>
 
 <file path=ppt/slides/slide6.xml><?xml version="1.0" encoding="utf-8"?>
+<p:sld xmlns:a="http://schemas.openxmlformats.org/drawingml/2006/main" xmlns:r="http://schemas.openxmlformats.org/officeDocument/2006/relationships" xmlns:p="http://schemas.openxmlformats.org/presentationml/2006/main">
+  <p:cSld>
+    <p:spTree>
+      <p:nvGrpSpPr>
+        <p:cNvPr id="1" name="Shape 120"/>
+        <p:cNvGrpSpPr/>
+        <p:nvPr/>
+      </p:nvGrpSpPr>
+      <p:grpSpPr>
+        <a:xfrm>
+          <a:off x="0" y="0"/>
+          <a:ext cx="0" cy="0"/>
+          <a:chOff x="0" y="0"/>
+          <a:chExt cx="0" cy="0"/>
+        </a:xfrm>
+      </p:grpSpPr>
+      <p:sp>
+        <p:nvSpPr>
+          <p:cNvPr id="121" name="Google Shape;121;p17"/>
+          <p:cNvSpPr txBox="1"/>
+          <p:nvPr/>
+        </p:nvSpPr>
+        <p:spPr>
+          <a:xfrm>
+            <a:off x="104925" y="105600"/>
+            <a:ext cx="6332451" cy="4624896"/>
+          </a:xfrm>
+          <a:prstGeom prst="rect">
+            <a:avLst/>
+          </a:prstGeom>
+          <a:noFill/>
+          <a:ln>
+            <a:noFill/>
+          </a:ln>
+        </p:spPr>
+        <p:txBody>
+          <a:bodyPr spcFirstLastPara="1" wrap="square" lIns="91425" tIns="91425" rIns="91425" bIns="91425" anchor="t" anchorCtr="0">
+            <a:noAutofit/>
+          </a:bodyPr>
+          <a:lstStyle/>
+          <a:p>
+            <a:pPr lvl="0"/>
+            <a:r>
+              <a:rPr lang="en-US" sz="3000" b="1" dirty="0">
+                <a:latin typeface="Calibri"/>
+                <a:ea typeface="Calibri"/>
+                <a:cs typeface="Calibri"/>
+                <a:sym typeface="Calibri"/>
+              </a:rPr>
+              <a:t>Chi-Square  </a:t>
+            </a:r>
+            <a:r>
+              <a:rPr lang="en-US" sz="3000" b="1" i="1" dirty="0">
+                <a:solidFill>
+                  <a:srgbClr val="222222"/>
+                </a:solidFill>
+                <a:highlight>
+                  <a:srgbClr val="FFFFFF"/>
+                </a:highlight>
+                <a:latin typeface="Times New Roman"/>
+                <a:ea typeface="Times New Roman"/>
+                <a:cs typeface="Times New Roman"/>
+                <a:sym typeface="Times New Roman"/>
+              </a:rPr>
+              <a:t>χ</a:t>
+            </a:r>
+            <a:r>
+              <a:rPr lang="en-US" sz="3000" b="1" baseline="30000" dirty="0">
+                <a:solidFill>
+                  <a:srgbClr val="222222"/>
+                </a:solidFill>
+                <a:highlight>
+                  <a:srgbClr val="FFFFFF"/>
+                </a:highlight>
+                <a:latin typeface="Times New Roman"/>
+                <a:ea typeface="Times New Roman"/>
+                <a:cs typeface="Times New Roman"/>
+                <a:sym typeface="Times New Roman"/>
+              </a:rPr>
+              <a:t>2</a:t>
+            </a:r>
+            <a:r>
+              <a:rPr lang="en-US" sz="3000" b="1" dirty="0">
+                <a:latin typeface="Calibri"/>
+                <a:ea typeface="Calibri"/>
+                <a:cs typeface="Calibri"/>
+                <a:sym typeface="Calibri"/>
+              </a:rPr>
+              <a:t>  Test of Homogeneity</a:t>
+            </a:r>
+            <a:br>
+              <a:rPr lang="en-US" sz="3000" b="1" dirty="0">
+                <a:latin typeface="Calibri"/>
+                <a:ea typeface="Calibri"/>
+                <a:cs typeface="Calibri"/>
+                <a:sym typeface="Calibri"/>
+              </a:rPr>
+            </a:br>
+            <a:r>
+              <a:rPr lang="en-US" sz="1000" b="1" dirty="0">
+                <a:latin typeface="Calibri"/>
+                <a:ea typeface="Calibri"/>
+                <a:cs typeface="Calibri"/>
+                <a:sym typeface="Calibri"/>
+              </a:rPr>
+              <a:t>from </a:t>
+            </a:r>
+            <a:r>
+              <a:rPr lang="en-US" sz="1000" b="1" dirty="0">
+                <a:latin typeface="Calibri"/>
+                <a:ea typeface="Calibri"/>
+                <a:cs typeface="Calibri"/>
+                <a:sym typeface="Calibri"/>
+                <a:hlinkClick r:id="rId3"/>
+              </a:rPr>
+              <a:t>https://courses.lumenlearning.com/wmopen-concepts-statistics/chapter/test-of-homogeneity/</a:t>
+            </a:r>
+            <a:r>
+              <a:rPr lang="en-US" sz="1000" b="1" dirty="0">
+                <a:latin typeface="Calibri"/>
+                <a:ea typeface="Calibri"/>
+                <a:cs typeface="Calibri"/>
+                <a:sym typeface="Calibri"/>
+              </a:rPr>
+              <a:t> </a:t>
+            </a:r>
+          </a:p>
+          <a:p>
+            <a:pPr marL="0" lvl="0" indent="0" algn="l" rtl="0">
+              <a:spcBef>
+                <a:spcPts val="0"/>
+              </a:spcBef>
+              <a:spcAft>
+                <a:spcPts val="0"/>
+              </a:spcAft>
+              <a:buNone/>
+            </a:pPr>
+            <a:endParaRPr lang="en-US" b="1" dirty="0">
+              <a:latin typeface="Calibri"/>
+              <a:ea typeface="Calibri"/>
+              <a:cs typeface="Calibri"/>
+              <a:sym typeface="Calibri"/>
+            </a:endParaRPr>
+          </a:p>
+          <a:p>
+            <a:pPr marL="0" lvl="0" indent="0" algn="l" rtl="0">
+              <a:spcBef>
+                <a:spcPts val="0"/>
+              </a:spcBef>
+              <a:spcAft>
+                <a:spcPts val="0"/>
+              </a:spcAft>
+              <a:buNone/>
+            </a:pPr>
+            <a:endParaRPr lang="en-US" b="1" dirty="0">
+              <a:latin typeface="Calibri"/>
+              <a:ea typeface="Calibri"/>
+              <a:cs typeface="Calibri"/>
+              <a:sym typeface="Calibri"/>
+            </a:endParaRPr>
+          </a:p>
+          <a:p>
+            <a:pPr marL="0" lvl="0" indent="0" algn="l" rtl="0">
+              <a:spcBef>
+                <a:spcPts val="0"/>
+              </a:spcBef>
+              <a:spcAft>
+                <a:spcPts val="0"/>
+              </a:spcAft>
+              <a:buNone/>
+            </a:pPr>
+            <a:endParaRPr lang="en-US" b="1" dirty="0">
+              <a:latin typeface="Calibri"/>
+              <a:ea typeface="Calibri"/>
+              <a:cs typeface="Calibri"/>
+              <a:sym typeface="Calibri"/>
+            </a:endParaRPr>
+          </a:p>
+          <a:p>
+            <a:pPr lvl="0"/>
+            <a:r>
+              <a:rPr lang="en-US" b="1" dirty="0">
+                <a:latin typeface="Calibri"/>
+                <a:ea typeface="Calibri"/>
+                <a:cs typeface="Calibri"/>
+                <a:sym typeface="Calibri"/>
+              </a:rPr>
+              <a:t>Null hypothesis:</a:t>
+            </a:r>
+          </a:p>
+          <a:p>
+            <a:pPr lvl="0"/>
+            <a:r>
+              <a:rPr lang="en-US" b="1" dirty="0">
+                <a:latin typeface="Calibri"/>
+                <a:ea typeface="Calibri"/>
+                <a:cs typeface="Calibri"/>
+                <a:sym typeface="Calibri"/>
+              </a:rPr>
+              <a:t>  steroid use doesn't differ between divisions.</a:t>
+            </a:r>
+          </a:p>
+          <a:p>
+            <a:pPr marL="0" lvl="0" indent="0" algn="l" rtl="0">
+              <a:spcBef>
+                <a:spcPts val="0"/>
+              </a:spcBef>
+              <a:spcAft>
+                <a:spcPts val="0"/>
+              </a:spcAft>
+              <a:buNone/>
+            </a:pPr>
+            <a:endParaRPr lang="en-US" b="1" dirty="0">
+              <a:latin typeface="Calibri"/>
+              <a:ea typeface="Calibri"/>
+              <a:cs typeface="Calibri"/>
+              <a:sym typeface="Calibri"/>
+            </a:endParaRPr>
+          </a:p>
+          <a:p>
+            <a:pPr marL="0" lvl="0" indent="0" algn="l" rtl="0">
+              <a:spcBef>
+                <a:spcPts val="0"/>
+              </a:spcBef>
+              <a:spcAft>
+                <a:spcPts val="0"/>
+              </a:spcAft>
+              <a:buNone/>
+            </a:pPr>
+            <a:r>
+              <a:rPr lang="en-US" b="1" dirty="0">
+                <a:latin typeface="Calibri"/>
+                <a:ea typeface="Calibri"/>
+                <a:cs typeface="Calibri"/>
+                <a:sym typeface="Calibri"/>
+              </a:rPr>
+              <a:t>Degrees of Freedom </a:t>
+            </a:r>
+            <a:r>
+              <a:rPr lang="en-US" b="1" dirty="0" err="1">
+                <a:latin typeface="Calibri"/>
+                <a:ea typeface="Calibri"/>
+                <a:cs typeface="Calibri"/>
+                <a:sym typeface="Calibri"/>
+              </a:rPr>
+              <a:t>df</a:t>
+            </a:r>
+            <a:r>
+              <a:rPr lang="en-US" b="1" dirty="0">
+                <a:latin typeface="Calibri"/>
+                <a:ea typeface="Calibri"/>
+                <a:cs typeface="Calibri"/>
+                <a:sym typeface="Calibri"/>
+              </a:rPr>
+              <a:t> = (rows-1)(columns-1) = (2-1)(3-1) = 2</a:t>
+            </a:r>
+          </a:p>
+          <a:p>
+            <a:pPr marL="0" lvl="0" indent="0" algn="l" rtl="0">
+              <a:spcBef>
+                <a:spcPts val="0"/>
+              </a:spcBef>
+              <a:spcAft>
+                <a:spcPts val="0"/>
+              </a:spcAft>
+              <a:buNone/>
+            </a:pPr>
+            <a:endParaRPr lang="en-US" b="1" dirty="0">
+              <a:latin typeface="Calibri"/>
+              <a:ea typeface="Calibri"/>
+              <a:cs typeface="Calibri"/>
+              <a:sym typeface="Calibri"/>
+            </a:endParaRPr>
+          </a:p>
+          <a:p>
+            <a:pPr lvl="0"/>
+            <a:r>
+              <a:rPr lang="en-US" b="1" dirty="0">
+                <a:latin typeface="Calibri"/>
+                <a:ea typeface="Calibri"/>
+                <a:cs typeface="Calibri"/>
+                <a:sym typeface="Calibri"/>
+              </a:rPr>
+              <a:t>In </a:t>
+            </a:r>
+            <a:r>
+              <a:rPr lang="en-US" b="1" i="1" dirty="0">
+                <a:solidFill>
+                  <a:srgbClr val="222222"/>
+                </a:solidFill>
+                <a:highlight>
+                  <a:srgbClr val="FFFFFF"/>
+                </a:highlight>
+                <a:latin typeface="Times New Roman"/>
+                <a:ea typeface="Times New Roman"/>
+                <a:cs typeface="Times New Roman"/>
+                <a:sym typeface="Times New Roman"/>
+              </a:rPr>
+              <a:t>χ</a:t>
+            </a:r>
+            <a:r>
+              <a:rPr lang="en-US" b="1" baseline="30000" dirty="0">
+                <a:solidFill>
+                  <a:srgbClr val="222222"/>
+                </a:solidFill>
+                <a:highlight>
+                  <a:srgbClr val="FFFFFF"/>
+                </a:highlight>
+                <a:latin typeface="Times New Roman"/>
+                <a:ea typeface="Times New Roman"/>
+                <a:cs typeface="Times New Roman"/>
+                <a:sym typeface="Times New Roman"/>
+              </a:rPr>
+              <a:t>2</a:t>
+            </a:r>
+            <a:r>
+              <a:rPr lang="en-US" b="1" dirty="0">
+                <a:latin typeface="Calibri"/>
+                <a:ea typeface="Calibri"/>
+                <a:cs typeface="Calibri"/>
+                <a:sym typeface="Calibri"/>
+              </a:rPr>
+              <a:t>  table looking for value for (alpha=0.05 and df=2):   </a:t>
+            </a:r>
+            <a:r>
+              <a:rPr lang="en-US" b="1" i="1" dirty="0">
+                <a:solidFill>
+                  <a:srgbClr val="222222"/>
+                </a:solidFill>
+                <a:highlight>
+                  <a:srgbClr val="FFFFFF"/>
+                </a:highlight>
+                <a:latin typeface="Times New Roman"/>
+                <a:ea typeface="Times New Roman"/>
+                <a:cs typeface="Times New Roman"/>
+                <a:sym typeface="Times New Roman"/>
+              </a:rPr>
+              <a:t>χ</a:t>
+            </a:r>
+            <a:r>
+              <a:rPr lang="en-US" b="1" baseline="30000" dirty="0">
+                <a:solidFill>
+                  <a:srgbClr val="222222"/>
+                </a:solidFill>
+                <a:highlight>
+                  <a:srgbClr val="FFFFFF"/>
+                </a:highlight>
+                <a:latin typeface="Times New Roman"/>
+                <a:ea typeface="Times New Roman"/>
+                <a:cs typeface="Times New Roman"/>
+                <a:sym typeface="Times New Roman"/>
+              </a:rPr>
+              <a:t>2</a:t>
+            </a:r>
+            <a:r>
+              <a:rPr lang="en-US" b="1" dirty="0">
+                <a:latin typeface="Calibri"/>
+                <a:ea typeface="Calibri"/>
+                <a:cs typeface="Calibri"/>
+                <a:sym typeface="Calibri"/>
+              </a:rPr>
+              <a:t>  = 5.99</a:t>
+            </a:r>
+          </a:p>
+          <a:p>
+            <a:pPr lvl="0"/>
+            <a:endParaRPr lang="en-US" b="1" dirty="0">
+              <a:latin typeface="Calibri"/>
+              <a:ea typeface="Calibri"/>
+              <a:cs typeface="Calibri"/>
+              <a:sym typeface="Calibri"/>
+            </a:endParaRPr>
+          </a:p>
+          <a:p>
+            <a:pPr lvl="0"/>
+            <a:r>
+              <a:rPr lang="en-US" b="1" dirty="0">
+                <a:latin typeface="Calibri"/>
+                <a:ea typeface="Calibri"/>
+                <a:cs typeface="Calibri"/>
+                <a:sym typeface="Calibri"/>
+              </a:rPr>
+              <a:t>Calculate statistics: </a:t>
+            </a:r>
+            <a:r>
+              <a:rPr lang="en-US" b="1" i="1" dirty="0">
+                <a:solidFill>
+                  <a:srgbClr val="222222"/>
+                </a:solidFill>
+                <a:highlight>
+                  <a:srgbClr val="FFFFFF"/>
+                </a:highlight>
+                <a:latin typeface="Times New Roman"/>
+                <a:ea typeface="Times New Roman"/>
+                <a:cs typeface="Times New Roman"/>
+                <a:sym typeface="Times New Roman"/>
+              </a:rPr>
+              <a:t>χ</a:t>
+            </a:r>
+            <a:r>
+              <a:rPr lang="en-US" b="1" baseline="30000" dirty="0">
+                <a:solidFill>
+                  <a:srgbClr val="222222"/>
+                </a:solidFill>
+                <a:highlight>
+                  <a:srgbClr val="FFFFFF"/>
+                </a:highlight>
+                <a:latin typeface="Times New Roman"/>
+                <a:ea typeface="Times New Roman"/>
+                <a:cs typeface="Times New Roman"/>
+                <a:sym typeface="Times New Roman"/>
+              </a:rPr>
+              <a:t>2</a:t>
+            </a:r>
+            <a:r>
+              <a:rPr lang="en-US" b="1" dirty="0">
+                <a:latin typeface="Calibri"/>
+                <a:ea typeface="Calibri"/>
+                <a:cs typeface="Calibri"/>
+                <a:sym typeface="Calibri"/>
+              </a:rPr>
+              <a:t> = sum (</a:t>
+            </a:r>
+            <a:r>
+              <a:rPr lang="en-US" b="1" dirty="0" err="1">
+                <a:latin typeface="Calibri"/>
+                <a:ea typeface="Calibri"/>
+                <a:cs typeface="Calibri"/>
+                <a:sym typeface="Calibri"/>
+              </a:rPr>
+              <a:t>f</a:t>
+            </a:r>
+            <a:r>
+              <a:rPr lang="en-US" b="1" baseline="-25000" dirty="0" err="1">
+                <a:latin typeface="Calibri"/>
+                <a:ea typeface="Calibri"/>
+                <a:cs typeface="Calibri"/>
+                <a:sym typeface="Calibri"/>
+              </a:rPr>
+              <a:t>o</a:t>
+            </a:r>
+            <a:r>
+              <a:rPr lang="en-US" b="1" dirty="0">
+                <a:latin typeface="Calibri"/>
+                <a:ea typeface="Calibri"/>
+                <a:cs typeface="Calibri"/>
+                <a:sym typeface="Calibri"/>
+              </a:rPr>
+              <a:t> – </a:t>
+            </a:r>
+            <a:r>
+              <a:rPr lang="en-US" b="1" dirty="0" err="1">
+                <a:latin typeface="Calibri"/>
+                <a:ea typeface="Calibri"/>
+                <a:cs typeface="Calibri"/>
+                <a:sym typeface="Calibri"/>
+              </a:rPr>
+              <a:t>f</a:t>
+            </a:r>
+            <a:r>
+              <a:rPr lang="en-US" b="1" baseline="-25000" dirty="0" err="1">
+                <a:latin typeface="Calibri"/>
+                <a:ea typeface="Calibri"/>
+                <a:cs typeface="Calibri"/>
+                <a:sym typeface="Calibri"/>
+              </a:rPr>
+              <a:t>e</a:t>
+            </a:r>
+            <a:r>
+              <a:rPr lang="en-US" b="1" dirty="0">
+                <a:latin typeface="Calibri"/>
+                <a:ea typeface="Calibri"/>
+                <a:cs typeface="Calibri"/>
+                <a:sym typeface="Calibri"/>
+              </a:rPr>
+              <a:t>)</a:t>
+            </a:r>
+            <a:r>
+              <a:rPr lang="en-US" b="1" baseline="30000" dirty="0">
+                <a:latin typeface="Calibri"/>
+                <a:ea typeface="Calibri"/>
+                <a:cs typeface="Calibri"/>
+                <a:sym typeface="Calibri"/>
+              </a:rPr>
+              <a:t>2</a:t>
+            </a:r>
+            <a:r>
+              <a:rPr lang="en-US" b="1" dirty="0">
+                <a:latin typeface="Calibri"/>
+                <a:ea typeface="Calibri"/>
+                <a:cs typeface="Calibri"/>
+                <a:sym typeface="Calibri"/>
+              </a:rPr>
+              <a:t> / </a:t>
+            </a:r>
+            <a:r>
+              <a:rPr lang="en-US" b="1" dirty="0" err="1">
+                <a:latin typeface="Calibri"/>
+                <a:ea typeface="Calibri"/>
+                <a:cs typeface="Calibri"/>
+                <a:sym typeface="Calibri"/>
+              </a:rPr>
+              <a:t>f</a:t>
+            </a:r>
+            <a:r>
+              <a:rPr lang="en-US" b="1" baseline="-25000" dirty="0" err="1">
+                <a:latin typeface="Calibri"/>
+                <a:ea typeface="Calibri"/>
+                <a:cs typeface="Calibri"/>
+                <a:sym typeface="Calibri"/>
+              </a:rPr>
+              <a:t>e</a:t>
+            </a:r>
+            <a:r>
+              <a:rPr lang="en-US" b="1" dirty="0">
+                <a:latin typeface="Calibri"/>
+                <a:ea typeface="Calibri"/>
+                <a:cs typeface="Calibri"/>
+                <a:sym typeface="Calibri"/>
+              </a:rPr>
+              <a:t>    =  1.57 </a:t>
+            </a:r>
+          </a:p>
+          <a:p>
+            <a:pPr lvl="0"/>
+            <a:endParaRPr lang="en-US" b="1" dirty="0">
+              <a:latin typeface="Calibri"/>
+              <a:ea typeface="Calibri"/>
+              <a:cs typeface="Calibri"/>
+              <a:sym typeface="Calibri"/>
+            </a:endParaRPr>
+          </a:p>
+          <a:p>
+            <a:pPr lvl="0"/>
+            <a:r>
+              <a:rPr lang="en-US" b="1" dirty="0">
+                <a:latin typeface="Calibri"/>
+                <a:ea typeface="Calibri"/>
+                <a:cs typeface="Calibri"/>
+                <a:sym typeface="Calibri"/>
+              </a:rPr>
+              <a:t>The smaller is the experimental chi-square statistics – the larger is P-value.</a:t>
+            </a:r>
+          </a:p>
+          <a:p>
+            <a:pPr lvl="0"/>
+            <a:r>
+              <a:rPr lang="en-US" b="1" dirty="0">
+                <a:latin typeface="Calibri"/>
+                <a:ea typeface="Calibri"/>
+                <a:cs typeface="Calibri"/>
+                <a:sym typeface="Calibri"/>
+              </a:rPr>
+              <a:t>(P-value =  0.4561 for </a:t>
+            </a:r>
+            <a:r>
+              <a:rPr lang="en-US" b="1" i="1" dirty="0">
+                <a:solidFill>
+                  <a:srgbClr val="222222"/>
+                </a:solidFill>
+                <a:highlight>
+                  <a:srgbClr val="FFFFFF"/>
+                </a:highlight>
+                <a:latin typeface="Times New Roman"/>
+                <a:ea typeface="Times New Roman"/>
+                <a:cs typeface="Times New Roman"/>
+                <a:sym typeface="Times New Roman"/>
+              </a:rPr>
+              <a:t>χ</a:t>
+            </a:r>
+            <a:r>
+              <a:rPr lang="en-US" b="1" baseline="30000" dirty="0">
+                <a:solidFill>
+                  <a:srgbClr val="222222"/>
+                </a:solidFill>
+                <a:highlight>
+                  <a:srgbClr val="FFFFFF"/>
+                </a:highlight>
+                <a:latin typeface="Times New Roman"/>
+                <a:ea typeface="Times New Roman"/>
+                <a:cs typeface="Times New Roman"/>
+                <a:sym typeface="Times New Roman"/>
+              </a:rPr>
+              <a:t>2</a:t>
+            </a:r>
+            <a:r>
+              <a:rPr lang="en-US" b="1" dirty="0">
+                <a:latin typeface="Calibri"/>
+                <a:ea typeface="Calibri"/>
+                <a:cs typeface="Calibri"/>
+                <a:sym typeface="Calibri"/>
+              </a:rPr>
+              <a:t> = 1.57)</a:t>
+            </a:r>
+          </a:p>
+          <a:p>
+            <a:pPr lvl="0"/>
+            <a:endParaRPr lang="en-US" b="1" dirty="0">
+              <a:latin typeface="Calibri"/>
+              <a:ea typeface="Calibri"/>
+              <a:cs typeface="Calibri"/>
+              <a:sym typeface="Calibri"/>
+            </a:endParaRPr>
+          </a:p>
+          <a:p>
+            <a:pPr lvl="0"/>
+            <a:r>
+              <a:rPr lang="en-US" b="1" dirty="0">
+                <a:latin typeface="Calibri"/>
+                <a:ea typeface="Calibri"/>
+                <a:cs typeface="Calibri"/>
+                <a:sym typeface="Calibri"/>
+              </a:rPr>
+              <a:t>So, as 1.57 &lt; 5.99, we conclude that we can not reject the null hypothesis.</a:t>
+            </a:r>
+          </a:p>
+          <a:p>
+            <a:pPr lvl="0"/>
+            <a:r>
+              <a:rPr lang="en-US" b="1" dirty="0">
+                <a:latin typeface="Calibri"/>
+                <a:ea typeface="Calibri"/>
+                <a:cs typeface="Calibri"/>
+                <a:sym typeface="Calibri"/>
+              </a:rPr>
+              <a:t>The data does not provide strong enough evidence to conclude that steroid use differs in the three divisions (P-value = 0.4561).</a:t>
+            </a:r>
+          </a:p>
+          <a:p>
+            <a:pPr lvl="0"/>
+            <a:endParaRPr lang="en-US" b="1" dirty="0">
+              <a:latin typeface="Calibri"/>
+              <a:ea typeface="Calibri"/>
+              <a:cs typeface="Calibri"/>
+              <a:sym typeface="Calibri"/>
+            </a:endParaRPr>
+          </a:p>
+          <a:p>
+            <a:pPr lvl="0"/>
+            <a:endParaRPr lang="en-US" b="1" dirty="0">
+              <a:latin typeface="Calibri"/>
+              <a:ea typeface="Calibri"/>
+              <a:cs typeface="Calibri"/>
+              <a:sym typeface="Calibri"/>
+            </a:endParaRPr>
+          </a:p>
+        </p:txBody>
+      </p:sp>
+      <p:pic>
+        <p:nvPicPr>
+          <p:cNvPr id="6146" name="Picture 2" descr="Observed data for the amount of athletes in each division who do and do not admit to steroid use">
+            <a:extLst>
+              <a:ext uri="{FF2B5EF4-FFF2-40B4-BE49-F238E27FC236}">
+                <a16:creationId xmlns:a16="http://schemas.microsoft.com/office/drawing/2014/main" id="{98F56375-DF0B-704B-BB36-70BDCD108FF6}"/>
+              </a:ext>
+            </a:extLst>
+          </p:cNvPr>
+          <p:cNvPicPr>
+            <a:picLocks noChangeAspect="1" noChangeArrowheads="1"/>
+          </p:cNvPicPr>
+          <p:nvPr/>
+        </p:nvPicPr>
+        <p:blipFill>
+          <a:blip r:embed="rId4">
+            <a:extLst>
+              <a:ext uri="{28A0092B-C50C-407E-A947-70E740481C1C}">
+                <a14:useLocalDpi xmlns:a14="http://schemas.microsoft.com/office/drawing/2010/main" val="0"/>
+              </a:ext>
+            </a:extLst>
+          </a:blip>
+          <a:srcRect/>
+          <a:stretch>
+            <a:fillRect/>
+          </a:stretch>
+        </p:blipFill>
+        <p:spPr bwMode="auto">
+          <a:xfrm>
+            <a:off x="7339838" y="367030"/>
+            <a:ext cx="3340100" cy="1257300"/>
+          </a:xfrm>
+          <a:prstGeom prst="rect">
+            <a:avLst/>
+          </a:prstGeom>
+          <a:noFill/>
+          <a:extLst>
+            <a:ext uri="{909E8E84-426E-40DD-AFC4-6F175D3DCCD1}">
+              <a14:hiddenFill xmlns:a14="http://schemas.microsoft.com/office/drawing/2010/main">
+                <a:solidFill>
+                  <a:srgbClr val="FFFFFF"/>
+                </a:solidFill>
+              </a14:hiddenFill>
+            </a:ext>
+          </a:extLst>
+        </p:spPr>
+      </p:pic>
+      <p:pic>
+        <p:nvPicPr>
+          <p:cNvPr id="6148" name="Picture 4" descr="Expected counts">
+            <a:extLst>
+              <a:ext uri="{FF2B5EF4-FFF2-40B4-BE49-F238E27FC236}">
+                <a16:creationId xmlns:a16="http://schemas.microsoft.com/office/drawing/2014/main" id="{E539680D-A949-F84E-8699-53A3C27E57BE}"/>
+              </a:ext>
+            </a:extLst>
+          </p:cNvPr>
+          <p:cNvPicPr>
+            <a:picLocks noChangeAspect="1" noChangeArrowheads="1"/>
+          </p:cNvPicPr>
+          <p:nvPr/>
+        </p:nvPicPr>
+        <p:blipFill>
+          <a:blip r:embed="rId5">
+            <a:extLst>
+              <a:ext uri="{28A0092B-C50C-407E-A947-70E740481C1C}">
+                <a14:useLocalDpi xmlns:a14="http://schemas.microsoft.com/office/drawing/2010/main" val="0"/>
+              </a:ext>
+            </a:extLst>
+          </a:blip>
+          <a:srcRect/>
+          <a:stretch>
+            <a:fillRect/>
+          </a:stretch>
+        </p:blipFill>
+        <p:spPr bwMode="auto">
+          <a:xfrm>
+            <a:off x="6210300" y="1712722"/>
+            <a:ext cx="5981700" cy="2832100"/>
+          </a:xfrm>
+          <a:prstGeom prst="rect">
+            <a:avLst/>
+          </a:prstGeom>
+          <a:noFill/>
+          <a:extLst>
+            <a:ext uri="{909E8E84-426E-40DD-AFC4-6F175D3DCCD1}">
+              <a14:hiddenFill xmlns:a14="http://schemas.microsoft.com/office/drawing/2010/main">
+                <a:solidFill>
+                  <a:srgbClr val="FFFFFF"/>
+                </a:solidFill>
+              </a14:hiddenFill>
+            </a:ext>
+          </a:extLst>
+        </p:spPr>
+      </p:pic>
+      <p:pic>
+        <p:nvPicPr>
+          <p:cNvPr id="6150" name="Picture 6" descr="The chi-square value is 1.57">
+            <a:extLst>
+              <a:ext uri="{FF2B5EF4-FFF2-40B4-BE49-F238E27FC236}">
+                <a16:creationId xmlns:a16="http://schemas.microsoft.com/office/drawing/2014/main" id="{5E8D19C2-8188-2146-B973-39CDD08B1233}"/>
+              </a:ext>
+            </a:extLst>
+          </p:cNvPr>
+          <p:cNvPicPr>
+            <a:picLocks noChangeAspect="1" noChangeArrowheads="1"/>
+          </p:cNvPicPr>
+          <p:nvPr/>
+        </p:nvPicPr>
+        <p:blipFill>
+          <a:blip r:embed="rId6">
+            <a:extLst>
+              <a:ext uri="{28A0092B-C50C-407E-A947-70E740481C1C}">
+                <a14:useLocalDpi xmlns:a14="http://schemas.microsoft.com/office/drawing/2010/main" val="0"/>
+              </a:ext>
+            </a:extLst>
+          </a:blip>
+          <a:srcRect/>
+          <a:stretch>
+            <a:fillRect/>
+          </a:stretch>
+        </p:blipFill>
+        <p:spPr bwMode="auto">
+          <a:xfrm>
+            <a:off x="3375152" y="5119370"/>
+            <a:ext cx="8636000" cy="1371600"/>
+          </a:xfrm>
+          <a:prstGeom prst="rect">
+            <a:avLst/>
+          </a:prstGeom>
+          <a:noFill/>
+          <a:extLst>
+            <a:ext uri="{909E8E84-426E-40DD-AFC4-6F175D3DCCD1}">
+              <a14:hiddenFill xmlns:a14="http://schemas.microsoft.com/office/drawing/2010/main">
+                <a:solidFill>
+                  <a:srgbClr val="FFFFFF"/>
+                </a:solidFill>
+              </a14:hiddenFill>
+            </a:ext>
+          </a:extLst>
+        </p:spPr>
+      </p:pic>
+    </p:spTree>
+    <p:extLst>
+      <p:ext uri="{BB962C8B-B14F-4D97-AF65-F5344CB8AC3E}">
+        <p14:creationId xmlns:p14="http://schemas.microsoft.com/office/powerpoint/2010/main" val="2637010887"/>
+      </p:ext>
+    </p:extLst>
+  </p:cSld>
+  <p:clrMapOvr>
+    <a:masterClrMapping/>
+  </p:clrMapOvr>
+</p:sld>
+</file>
+
+<file path=ppt/slides/slide7.xml><?xml version="1.0" encoding="utf-8"?>
 <p:sld xmlns:a="http://schemas.openxmlformats.org/drawingml/2006/main" xmlns:r="http://schemas.openxmlformats.org/officeDocument/2006/relationships" xmlns:p="http://schemas.openxmlformats.org/presentationml/2006/main">
   <p:cSld>
     <p:spTree>

--- a/statistics_06_x2_distribution.pptx
+++ b/statistics_06_x2_distribution.pptx
@@ -17000,7 +17000,7 @@
           <a:graphicData uri="http://schemas.openxmlformats.org/presentationml/2006/ole">
             <mc:AlternateContent xmlns:mc="http://schemas.openxmlformats.org/markup-compatibility/2006">
               <mc:Choice xmlns:v="urn:schemas-microsoft-com:vml" Requires="v">
-                <p:oleObj spid="_x0000_s5483" name="Equation" r:id="rId6" imgW="26517600" imgH="10363200" progId="Equation.3">
+                <p:oleObj spid="_x0000_s5487" name="Equation" r:id="rId6" imgW="26517600" imgH="10363200" progId="Equation.3">
                   <p:embed/>
                 </p:oleObj>
               </mc:Choice>
@@ -17204,7 +17204,7 @@
           <a:graphicData uri="http://schemas.openxmlformats.org/presentationml/2006/ole">
             <mc:AlternateContent xmlns:mc="http://schemas.openxmlformats.org/markup-compatibility/2006">
               <mc:Choice xmlns:v="urn:schemas-microsoft-com:vml" Requires="v">
-                <p:oleObj spid="_x0000_s5484" name="Equation" r:id="rId8" imgW="14325600" imgH="8839200" progId="Equation.3">
+                <p:oleObj spid="_x0000_s5488" name="Equation" r:id="rId8" imgW="14325600" imgH="8839200" progId="Equation.3">
                   <p:embed/>
                 </p:oleObj>
               </mc:Choice>
@@ -19054,7 +19054,7 @@
         <p:spPr>
           <a:xfrm>
             <a:off x="6390861" y="76200"/>
-            <a:ext cx="5184913" cy="3303104"/>
+            <a:ext cx="5184913" cy="3642360"/>
           </a:xfrm>
           <a:prstGeom prst="rect">
             <a:avLst/>
@@ -19397,7 +19397,57 @@
                 <a:cs typeface="Calibri"/>
                 <a:sym typeface="Calibri"/>
               </a:rPr>
-              <a:t>The P-value is the probability that a chi-square statistic having one degree of freedom is more extreme than that value.</a:t>
+              <a:t>The P-value is the probability </a:t>
+            </a:r>
+          </a:p>
+          <a:p>
+            <a:pPr marL="0" lvl="0" indent="0" algn="l" rtl="0">
+              <a:spcBef>
+                <a:spcPts val="0"/>
+              </a:spcBef>
+              <a:spcAft>
+                <a:spcPts val="0"/>
+              </a:spcAft>
+              <a:buClr>
+                <a:schemeClr val="dk1"/>
+              </a:buClr>
+              <a:buSzPts val="1100"/>
+              <a:buFont typeface="Arial"/>
+              <a:buNone/>
+            </a:pPr>
+            <a:r>
+              <a:rPr lang="en-US" sz="1300" dirty="0">
+                <a:latin typeface="Calibri"/>
+                <a:ea typeface="Calibri"/>
+                <a:cs typeface="Calibri"/>
+                <a:sym typeface="Calibri"/>
+              </a:rPr>
+              <a:t>that a chi-square statistic having one degree of freedom </a:t>
+            </a:r>
+          </a:p>
+          <a:p>
+            <a:pPr marL="0" lvl="0" indent="0" algn="l" rtl="0">
+              <a:spcBef>
+                <a:spcPts val="0"/>
+              </a:spcBef>
+              <a:spcAft>
+                <a:spcPts val="0"/>
+              </a:spcAft>
+              <a:buClr>
+                <a:schemeClr val="dk1"/>
+              </a:buClr>
+              <a:buSzPts val="1100"/>
+              <a:buFont typeface="Arial"/>
+              <a:buNone/>
+            </a:pPr>
+            <a:r>
+              <a:rPr lang="en-US" sz="1300" dirty="0">
+                <a:latin typeface="Calibri"/>
+                <a:ea typeface="Calibri"/>
+                <a:cs typeface="Calibri"/>
+                <a:sym typeface="Calibri"/>
+              </a:rPr>
+              <a:t>is more extreme than that value.</a:t>
             </a:r>
           </a:p>
         </p:txBody>
